--- a/propuestas/pobrevermut/PobreVermut - Propuesta Campanas 2026.pptx
+++ b/propuestas/pobrevermut/PobreVermut - Propuesta Campanas 2026.pptx
@@ -1213,7 +1213,7 @@
     <p:bg>
       <p:bgPr>
         <a:solidFill>
-          <a:srgbClr val="4A1220"/>
+          <a:srgbClr val="0F0E0D"/>
         </a:solidFill>
       </p:bgPr>
     </p:bg>
@@ -1239,21 +1239,16 @@
         </p:nvSpPr>
         <p:spPr>
           <a:xfrm>
-            <a:off x="8778240" y="2103120"/>
-            <a:ext cx="2468880" cy="2468880"/>
+            <a:off x="9006840" y="2487168"/>
+            <a:ext cx="2377440" cy="2377440"/>
           </a:xfrm>
           <a:prstGeom prst="ellipse">
             <a:avLst/>
           </a:prstGeom>
           <a:solidFill>
-            <a:srgbClr val="4A1220"/>
+            <a:srgbClr val="EF5B25"/>
           </a:solidFill>
-          <a:ln w="15875">
-            <a:solidFill>
-              <a:srgbClr val="C8963E"/>
-            </a:solidFill>
-            <a:prstDash val="solid"/>
-          </a:ln>
+          <a:ln/>
         </p:spPr>
       </p:sp>
       <p:sp>
@@ -1264,34 +1259,34 @@
         </p:nvSpPr>
         <p:spPr>
           <a:xfrm>
-            <a:off x="8778240" y="2103120"/>
-            <a:ext cx="2468880" cy="2468880"/>
-          </a:xfrm>
-          <a:prstGeom prst="rect">
-            <a:avLst/>
-          </a:prstGeom>
-          <a:noFill/>
-          <a:ln/>
-        </p:spPr>
-        <p:txBody>
-          <a:bodyPr wrap="square" lIns="0" tIns="0" rIns="0" bIns="0" rtlCol="0" anchor="ctr"/>
-          <a:lstStyle/>
-          <a:p>
-            <a:pPr algn="ctr" indent="0" marL="0">
-              <a:buNone/>
-            </a:pPr>
-            <a:r>
-              <a:rPr lang="en-US" sz="5600" b="1" dirty="0">
-                <a:solidFill>
-                  <a:srgbClr val="C8963E"/>
-                </a:solidFill>
-                <a:latin typeface="Cambria" pitchFamily="34" charset="0"/>
-                <a:ea typeface="Cambria" pitchFamily="34" charset="-122"/>
-                <a:cs typeface="Cambria" pitchFamily="34" charset="-120"/>
-              </a:rPr>
-              <a:t>PV</a:t>
-            </a:r>
-            <a:endParaRPr lang="en-US" sz="5600" dirty="0"/>
+            <a:off x="822960" y="868680"/>
+            <a:ext cx="6400800" cy="310896"/>
+          </a:xfrm>
+          <a:prstGeom prst="rect">
+            <a:avLst/>
+          </a:prstGeom>
+          <a:noFill/>
+          <a:ln/>
+        </p:spPr>
+        <p:txBody>
+          <a:bodyPr wrap="square" lIns="0" tIns="0" rIns="0" bIns="0" rtlCol="0" anchor="ctr"/>
+          <a:lstStyle/>
+          <a:p>
+            <a:pPr indent="0" marL="0">
+              <a:buNone/>
+            </a:pPr>
+            <a:r>
+              <a:rPr lang="en-US" sz="1200" b="1" spc="600" kern="0" dirty="0">
+                <a:solidFill>
+                  <a:srgbClr val="EF5B25"/>
+                </a:solidFill>
+                <a:latin typeface="Arial" pitchFamily="34" charset="0"/>
+                <a:ea typeface="Arial" pitchFamily="34" charset="-122"/>
+                <a:cs typeface="Arial" pitchFamily="34" charset="-120"/>
+              </a:rPr>
+              <a:t>POBREVERMUT</a:t>
+            </a:r>
+            <a:endParaRPr lang="en-US" sz="1200" dirty="0"/>
           </a:p>
         </p:txBody>
       </p:sp>
@@ -1303,135 +1298,135 @@
         </p:nvSpPr>
         <p:spPr>
           <a:xfrm>
-            <a:off x="822960" y="777240"/>
-            <a:ext cx="6858000" cy="274320"/>
-          </a:xfrm>
-          <a:prstGeom prst="rect">
-            <a:avLst/>
-          </a:prstGeom>
-          <a:noFill/>
-          <a:ln/>
-        </p:spPr>
-        <p:txBody>
-          <a:bodyPr wrap="square" lIns="0" tIns="0" rIns="0" bIns="0" rtlCol="0" anchor="ctr"/>
-          <a:lstStyle/>
-          <a:p>
-            <a:pPr indent="0" marL="0">
-              <a:buNone/>
-            </a:pPr>
-            <a:r>
-              <a:rPr lang="en-US" sz="1100" b="1" spc="250" kern="0" dirty="0">
-                <a:solidFill>
-                  <a:srgbClr val="C8963E"/>
+            <a:off x="822960" y="2743200"/>
+            <a:ext cx="7863840" cy="1920240"/>
+          </a:xfrm>
+          <a:prstGeom prst="rect">
+            <a:avLst/>
+          </a:prstGeom>
+          <a:noFill/>
+          <a:ln/>
+        </p:spPr>
+        <p:txBody>
+          <a:bodyPr wrap="square" lIns="0" tIns="0" rIns="0" bIns="0" rtlCol="0" anchor="ctr"/>
+          <a:lstStyle/>
+          <a:p>
+            <a:pPr indent="0" marL="0">
+              <a:lnSpc>
+                <a:spcPct val="102000"/>
+              </a:lnSpc>
+              <a:buNone/>
+            </a:pPr>
+            <a:r>
+              <a:rPr lang="en-US" sz="5400" b="1" dirty="0">
+                <a:solidFill>
+                  <a:srgbClr val="F2EEE9"/>
+                </a:solidFill>
+                <a:latin typeface="Arial" pitchFamily="34" charset="0"/>
+                <a:ea typeface="Arial" pitchFamily="34" charset="-122"/>
+                <a:cs typeface="Arial" pitchFamily="34" charset="-120"/>
+              </a:rPr>
+              <a:t>Campañas para</a:t>
+            </a:r>
+            <a:endParaRPr lang="en-US" sz="5400" dirty="0"/>
+          </a:p>
+          <a:p>
+            <a:pPr indent="0" marL="0">
+              <a:lnSpc>
+                <a:spcPct val="102000"/>
+              </a:lnSpc>
+              <a:buNone/>
+            </a:pPr>
+            <a:r>
+              <a:rPr lang="en-US" sz="5400" b="1" dirty="0">
+                <a:solidFill>
+                  <a:srgbClr val="EF5B25"/>
+                </a:solidFill>
+                <a:latin typeface="Arial" pitchFamily="34" charset="0"/>
+                <a:ea typeface="Arial" pitchFamily="34" charset="-122"/>
+                <a:cs typeface="Arial" pitchFamily="34" charset="-120"/>
+              </a:rPr>
+              <a:t>vender online</a:t>
+            </a:r>
+            <a:endParaRPr lang="en-US" sz="5400" dirty="0"/>
+          </a:p>
+        </p:txBody>
+      </p:sp>
+      <p:sp>
+        <p:nvSpPr>
+          <p:cNvPr id="5" name="Text 3"/>
+          <p:cNvSpPr/>
+          <p:nvPr/>
+        </p:nvSpPr>
+        <p:spPr>
+          <a:xfrm>
+            <a:off x="822960" y="4828032"/>
+            <a:ext cx="7863840" cy="365760"/>
+          </a:xfrm>
+          <a:prstGeom prst="rect">
+            <a:avLst/>
+          </a:prstGeom>
+          <a:noFill/>
+          <a:ln/>
+        </p:spPr>
+        <p:txBody>
+          <a:bodyPr wrap="square" lIns="0" tIns="0" rIns="0" bIns="0" rtlCol="0" anchor="ctr"/>
+          <a:lstStyle/>
+          <a:p>
+            <a:pPr indent="0" marL="0">
+              <a:buNone/>
+            </a:pPr>
+            <a:r>
+              <a:rPr lang="en-US" sz="1700" dirty="0">
+                <a:solidFill>
+                  <a:srgbClr val="8A807A"/>
                 </a:solidFill>
                 <a:latin typeface="Calibri" pitchFamily="34" charset="0"/>
                 <a:ea typeface="Calibri" pitchFamily="34" charset="-122"/>
                 <a:cs typeface="Calibri" pitchFamily="34" charset="-120"/>
               </a:rPr>
-              <a:t>PROPUESTA  ·  AGOSTO 2026</a:t>
-            </a:r>
-            <a:endParaRPr lang="en-US" sz="1100" dirty="0"/>
-          </a:p>
-        </p:txBody>
-      </p:sp>
-      <p:sp>
-        <p:nvSpPr>
-          <p:cNvPr id="5" name="Text 3"/>
-          <p:cNvSpPr/>
-          <p:nvPr/>
-        </p:nvSpPr>
-        <p:spPr>
-          <a:xfrm>
-            <a:off x="822960" y="2286000"/>
-            <a:ext cx="7498080" cy="384048"/>
-          </a:xfrm>
-          <a:prstGeom prst="rect">
-            <a:avLst/>
-          </a:prstGeom>
-          <a:noFill/>
-          <a:ln/>
-        </p:spPr>
-        <p:txBody>
-          <a:bodyPr wrap="square" lIns="0" tIns="0" rIns="0" bIns="0" rtlCol="0" anchor="ctr"/>
-          <a:lstStyle/>
-          <a:p>
-            <a:pPr indent="0" marL="0">
-              <a:buNone/>
-            </a:pPr>
-            <a:r>
-              <a:rPr lang="en-US" sz="1600" b="1" spc="500" kern="0" dirty="0">
-                <a:solidFill>
-                  <a:srgbClr val="F6F1EA"/>
+              <a:t>Ya hay marca, comunidad y ecommerce. Ahora, a vender.</a:t>
+            </a:r>
+            <a:endParaRPr lang="en-US" sz="1700" dirty="0"/>
+          </a:p>
+        </p:txBody>
+      </p:sp>
+      <p:sp>
+        <p:nvSpPr>
+          <p:cNvPr id="6" name="Text 4"/>
+          <p:cNvSpPr/>
+          <p:nvPr/>
+        </p:nvSpPr>
+        <p:spPr>
+          <a:xfrm>
+            <a:off x="822960" y="5742432"/>
+            <a:ext cx="5486400" cy="274320"/>
+          </a:xfrm>
+          <a:prstGeom prst="rect">
+            <a:avLst/>
+          </a:prstGeom>
+          <a:noFill/>
+          <a:ln/>
+        </p:spPr>
+        <p:txBody>
+          <a:bodyPr wrap="square" lIns="0" tIns="0" rIns="0" bIns="0" rtlCol="0" anchor="ctr"/>
+          <a:lstStyle/>
+          <a:p>
+            <a:pPr indent="0" marL="0">
+              <a:buNone/>
+            </a:pPr>
+            <a:r>
+              <a:rPr lang="en-US" sz="1300" dirty="0">
+                <a:solidFill>
+                  <a:srgbClr val="8A807A"/>
                 </a:solidFill>
                 <a:latin typeface="Calibri" pitchFamily="34" charset="0"/>
                 <a:ea typeface="Calibri" pitchFamily="34" charset="-122"/>
                 <a:cs typeface="Calibri" pitchFamily="34" charset="-120"/>
               </a:rPr>
-              <a:t>POBREVERMUT</a:t>
-            </a:r>
-            <a:endParaRPr lang="en-US" sz="1600" dirty="0"/>
-          </a:p>
-        </p:txBody>
-      </p:sp>
-      <p:sp>
-        <p:nvSpPr>
-          <p:cNvPr id="6" name="Text 4"/>
-          <p:cNvSpPr/>
-          <p:nvPr/>
-        </p:nvSpPr>
-        <p:spPr>
-          <a:xfrm>
-            <a:off x="822960" y="2697480"/>
-            <a:ext cx="7498080" cy="1600200"/>
-          </a:xfrm>
-          <a:prstGeom prst="rect">
-            <a:avLst/>
-          </a:prstGeom>
-          <a:noFill/>
-          <a:ln/>
-        </p:spPr>
-        <p:txBody>
-          <a:bodyPr wrap="square" lIns="0" tIns="0" rIns="0" bIns="0" rtlCol="0" anchor="ctr"/>
-          <a:lstStyle/>
-          <a:p>
-            <a:pPr indent="0" marL="0">
-              <a:lnSpc>
-                <a:spcPct val="100000"/>
-              </a:lnSpc>
-              <a:buNone/>
-            </a:pPr>
-            <a:r>
-              <a:rPr lang="en-US" sz="5000" b="1" dirty="0">
-                <a:solidFill>
-                  <a:srgbClr val="FFFFFF"/>
-                </a:solidFill>
-                <a:latin typeface="Cambria" pitchFamily="34" charset="0"/>
-                <a:ea typeface="Cambria" pitchFamily="34" charset="-122"/>
-                <a:cs typeface="Cambria" pitchFamily="34" charset="-120"/>
-              </a:rPr>
-              <a:t>Campañas para</a:t>
-            </a:r>
-            <a:endParaRPr lang="en-US" sz="5000" dirty="0"/>
-          </a:p>
-          <a:p>
-            <a:pPr indent="0" marL="0">
-              <a:lnSpc>
-                <a:spcPct val="100000"/>
-              </a:lnSpc>
-              <a:buNone/>
-            </a:pPr>
-            <a:r>
-              <a:rPr lang="en-US" sz="5000" b="1" dirty="0">
-                <a:solidFill>
-                  <a:srgbClr val="FFFFFF"/>
-                </a:solidFill>
-                <a:latin typeface="Cambria" pitchFamily="34" charset="0"/>
-                <a:ea typeface="Cambria" pitchFamily="34" charset="-122"/>
-                <a:cs typeface="Cambria" pitchFamily="34" charset="-120"/>
-              </a:rPr>
-              <a:t>vender online</a:t>
-            </a:r>
-            <a:endParaRPr lang="en-US" sz="5000" dirty="0"/>
+              <a:t>Propuesta  ·  Agosto 2026</a:t>
+            </a:r>
+            <a:endParaRPr lang="en-US" sz="1300" dirty="0"/>
           </a:p>
         </p:txBody>
       </p:sp>
@@ -1443,71 +1438,32 @@
         </p:nvSpPr>
         <p:spPr>
           <a:xfrm>
-            <a:off x="822960" y="4434840"/>
-            <a:ext cx="7498080" cy="365760"/>
-          </a:xfrm>
-          <a:prstGeom prst="rect">
-            <a:avLst/>
-          </a:prstGeom>
-          <a:noFill/>
-          <a:ln/>
-        </p:spPr>
-        <p:txBody>
-          <a:bodyPr wrap="square" lIns="0" tIns="0" rIns="0" bIns="0" rtlCol="0" anchor="ctr"/>
-          <a:lstStyle/>
-          <a:p>
-            <a:pPr indent="0" marL="0">
-              <a:buNone/>
-            </a:pPr>
-            <a:r>
-              <a:rPr lang="en-US" sz="1600" dirty="0">
-                <a:solidFill>
-                  <a:srgbClr val="C4AEA1"/>
+            <a:off x="822960" y="6035040"/>
+            <a:ext cx="5486400" cy="274320"/>
+          </a:xfrm>
+          <a:prstGeom prst="rect">
+            <a:avLst/>
+          </a:prstGeom>
+          <a:noFill/>
+          <a:ln/>
+        </p:spPr>
+        <p:txBody>
+          <a:bodyPr wrap="square" lIns="0" tIns="0" rIns="0" bIns="0" rtlCol="0" anchor="ctr"/>
+          <a:lstStyle/>
+          <a:p>
+            <a:pPr indent="0" marL="0">
+              <a:buNone/>
+            </a:pPr>
+            <a:r>
+              <a:rPr lang="en-US" sz="1300" b="1" dirty="0">
+                <a:solidFill>
+                  <a:srgbClr val="F2EEE9"/>
                 </a:solidFill>
                 <a:latin typeface="Calibri" pitchFamily="34" charset="0"/>
                 <a:ea typeface="Calibri" pitchFamily="34" charset="-122"/>
                 <a:cs typeface="Calibri" pitchFamily="34" charset="-120"/>
               </a:rPr>
-              <a:t>Ya hay marca, comunidad y ecommerce. Ahora, a vender.</a:t>
-            </a:r>
-            <a:endParaRPr lang="en-US" sz="1600" dirty="0"/>
-          </a:p>
-        </p:txBody>
-      </p:sp>
-      <p:sp>
-        <p:nvSpPr>
-          <p:cNvPr id="8" name="Text 6"/>
-          <p:cNvSpPr/>
-          <p:nvPr/>
-        </p:nvSpPr>
-        <p:spPr>
-          <a:xfrm>
-            <a:off x="822960" y="5806440"/>
-            <a:ext cx="7772400" cy="292608"/>
-          </a:xfrm>
-          <a:prstGeom prst="rect">
-            <a:avLst/>
-          </a:prstGeom>
-          <a:noFill/>
-          <a:ln/>
-        </p:spPr>
-        <p:txBody>
-          <a:bodyPr wrap="square" lIns="0" tIns="0" rIns="0" bIns="0" rtlCol="0" anchor="ctr"/>
-          <a:lstStyle/>
-          <a:p>
-            <a:pPr indent="0" marL="0">
-              <a:buNone/>
-            </a:pPr>
-            <a:r>
-              <a:rPr lang="en-US" sz="1300" dirty="0">
-                <a:solidFill>
-                  <a:srgbClr val="C4AEA1"/>
-                </a:solidFill>
-                <a:latin typeface="Calibri" pitchFamily="34" charset="0"/>
-                <a:ea typeface="Calibri" pitchFamily="34" charset="-122"/>
-                <a:cs typeface="Calibri" pitchFamily="34" charset="-120"/>
-              </a:rPr>
-              <a:t>Nicolás  ·  Sherpas Studio  ·  nicolas@sherpasstudio.cl</a:t>
+              <a:t>Nicolás  ·  nicolas@sherpasstudio.cl</a:t>
             </a:r>
             <a:endParaRPr lang="en-US" sz="1300" dirty="0"/>
           </a:p>
@@ -1527,7 +1483,7 @@
     <p:bg>
       <p:bgPr>
         <a:solidFill>
-          <a:srgbClr val="FFFFFF"/>
+          <a:srgbClr val="0F0E0D"/>
         </a:solidFill>
       </p:bgPr>
     </p:bg>
@@ -1553,7 +1509,7 @@
         </p:nvSpPr>
         <p:spPr>
           <a:xfrm>
-            <a:off x="822960" y="658368"/>
+            <a:off x="822960" y="749808"/>
             <a:ext cx="10545775" cy="274320"/>
           </a:xfrm>
           <a:prstGeom prst="rect">
@@ -1572,164 +1528,326 @@
             <a:r>
               <a:rPr lang="en-US" sz="1100" b="1" spc="250" kern="0" dirty="0">
                 <a:solidFill>
-                  <a:srgbClr val="C8963E"/>
+                  <a:srgbClr val="EF5B25"/>
+                </a:solidFill>
+                <a:latin typeface="Arial" pitchFamily="34" charset="0"/>
+                <a:ea typeface="Arial" pitchFamily="34" charset="-122"/>
+                <a:cs typeface="Arial" pitchFamily="34" charset="-120"/>
+              </a:rPr>
+              <a:t>01  —  EL PLAN</a:t>
+            </a:r>
+            <a:endParaRPr lang="en-US" sz="1100" dirty="0"/>
+          </a:p>
+        </p:txBody>
+      </p:sp>
+      <p:sp>
+        <p:nvSpPr>
+          <p:cNvPr id="3" name="Text 1"/>
+          <p:cNvSpPr/>
+          <p:nvPr/>
+        </p:nvSpPr>
+        <p:spPr>
+          <a:xfrm>
+            <a:off x="822960" y="1133856"/>
+            <a:ext cx="10545775" cy="731520"/>
+          </a:xfrm>
+          <a:prstGeom prst="rect">
+            <a:avLst/>
+          </a:prstGeom>
+          <a:noFill/>
+          <a:ln/>
+        </p:spPr>
+        <p:txBody>
+          <a:bodyPr wrap="square" lIns="0" tIns="0" rIns="0" bIns="0" rtlCol="0" anchor="ctr"/>
+          <a:lstStyle/>
+          <a:p>
+            <a:pPr indent="0" marL="0">
+              <a:buNone/>
+            </a:pPr>
+            <a:r>
+              <a:rPr lang="en-US" sz="3800" b="1" dirty="0">
+                <a:solidFill>
+                  <a:srgbClr val="F2EEE9"/>
+                </a:solidFill>
+                <a:latin typeface="Arial" pitchFamily="34" charset="0"/>
+                <a:ea typeface="Arial" pitchFamily="34" charset="-122"/>
+                <a:cs typeface="Arial" pitchFamily="34" charset="-120"/>
+              </a:rPr>
+              <a:t>Tres fases, un objetivo</a:t>
+            </a:r>
+            <a:endParaRPr lang="en-US" sz="3800" dirty="0"/>
+          </a:p>
+        </p:txBody>
+      </p:sp>
+      <p:sp>
+        <p:nvSpPr>
+          <p:cNvPr id="4" name="Text 2"/>
+          <p:cNvSpPr/>
+          <p:nvPr/>
+        </p:nvSpPr>
+        <p:spPr>
+          <a:xfrm>
+            <a:off x="822960" y="1901952"/>
+            <a:ext cx="10545775" cy="329184"/>
+          </a:xfrm>
+          <a:prstGeom prst="rect">
+            <a:avLst/>
+          </a:prstGeom>
+          <a:noFill/>
+          <a:ln/>
+        </p:spPr>
+        <p:txBody>
+          <a:bodyPr wrap="square" lIns="0" tIns="0" rIns="0" bIns="0" rtlCol="0" anchor="ctr"/>
+          <a:lstStyle/>
+          <a:p>
+            <a:pPr indent="0" marL="0">
+              <a:buNone/>
+            </a:pPr>
+            <a:r>
+              <a:rPr lang="en-US" sz="1500" dirty="0">
+                <a:solidFill>
+                  <a:srgbClr val="8A807A"/>
                 </a:solidFill>
                 <a:latin typeface="Calibri" pitchFamily="34" charset="0"/>
                 <a:ea typeface="Calibri" pitchFamily="34" charset="-122"/>
                 <a:cs typeface="Calibri" pitchFamily="34" charset="-120"/>
               </a:rPr>
-              <a:t>EL PLAN</a:t>
-            </a:r>
-            <a:endParaRPr lang="en-US" sz="1100" dirty="0"/>
-          </a:p>
-        </p:txBody>
-      </p:sp>
-      <p:sp>
-        <p:nvSpPr>
-          <p:cNvPr id="3" name="Text 1"/>
-          <p:cNvSpPr/>
-          <p:nvPr/>
-        </p:nvSpPr>
-        <p:spPr>
-          <a:xfrm>
-            <a:off x="822960" y="987552"/>
-            <a:ext cx="10545775" cy="658368"/>
-          </a:xfrm>
-          <a:prstGeom prst="rect">
-            <a:avLst/>
-          </a:prstGeom>
-          <a:noFill/>
-          <a:ln/>
-        </p:spPr>
-        <p:txBody>
-          <a:bodyPr wrap="square" lIns="0" tIns="0" rIns="0" bIns="0" rtlCol="0" anchor="ctr"/>
-          <a:lstStyle/>
-          <a:p>
-            <a:pPr indent="0" marL="0">
-              <a:buNone/>
-            </a:pPr>
-            <a:r>
-              <a:rPr lang="en-US" sz="4000" b="1" dirty="0">
-                <a:solidFill>
-                  <a:srgbClr val="2B1B14"/>
-                </a:solidFill>
-                <a:latin typeface="Cambria" pitchFamily="34" charset="0"/>
-                <a:ea typeface="Cambria" pitchFamily="34" charset="-122"/>
-                <a:cs typeface="Cambria" pitchFamily="34" charset="-120"/>
-              </a:rPr>
-              <a:t>Tres fases, un objetivo</a:t>
-            </a:r>
-            <a:endParaRPr lang="en-US" sz="4000" dirty="0"/>
-          </a:p>
-        </p:txBody>
-      </p:sp>
-      <p:sp>
-        <p:nvSpPr>
-          <p:cNvPr id="4" name="Text 2"/>
-          <p:cNvSpPr/>
-          <p:nvPr/>
-        </p:nvSpPr>
-        <p:spPr>
-          <a:xfrm>
-            <a:off x="822960" y="1700784"/>
-            <a:ext cx="10545775" cy="329184"/>
-          </a:xfrm>
-          <a:prstGeom prst="rect">
-            <a:avLst/>
-          </a:prstGeom>
-          <a:noFill/>
-          <a:ln/>
-        </p:spPr>
-        <p:txBody>
-          <a:bodyPr wrap="square" lIns="0" tIns="0" rIns="0" bIns="0" rtlCol="0" anchor="ctr"/>
-          <a:lstStyle/>
-          <a:p>
-            <a:pPr indent="0" marL="0">
-              <a:buNone/>
-            </a:pPr>
-            <a:r>
-              <a:rPr lang="en-US" sz="1500" dirty="0">
-                <a:solidFill>
-                  <a:srgbClr val="7D6A5E"/>
+              <a:t>Cada fase construye lo que la siguiente necesita.</a:t>
+            </a:r>
+            <a:endParaRPr lang="en-US" sz="1500" dirty="0"/>
+          </a:p>
+        </p:txBody>
+      </p:sp>
+      <p:sp>
+        <p:nvSpPr>
+          <p:cNvPr id="5" name="Text 3"/>
+          <p:cNvSpPr/>
+          <p:nvPr/>
+        </p:nvSpPr>
+        <p:spPr>
+          <a:xfrm>
+            <a:off x="822960" y="2606040"/>
+            <a:ext cx="3108960" cy="1051560"/>
+          </a:xfrm>
+          <a:prstGeom prst="rect">
+            <a:avLst/>
+          </a:prstGeom>
+          <a:noFill/>
+          <a:ln/>
+        </p:spPr>
+        <p:txBody>
+          <a:bodyPr wrap="square" lIns="0" tIns="0" rIns="0" bIns="0" rtlCol="0" anchor="t"/>
+          <a:lstStyle/>
+          <a:p>
+            <a:pPr indent="0" marL="0">
+              <a:buNone/>
+            </a:pPr>
+            <a:r>
+              <a:rPr lang="en-US" sz="7200" b="1" dirty="0">
+                <a:solidFill>
+                  <a:srgbClr val="EF5B25"/>
+                </a:solidFill>
+                <a:latin typeface="Arial" pitchFamily="34" charset="0"/>
+                <a:ea typeface="Arial" pitchFamily="34" charset="-122"/>
+                <a:cs typeface="Arial" pitchFamily="34" charset="-120"/>
+              </a:rPr>
+              <a:t>1</a:t>
+            </a:r>
+            <a:endParaRPr lang="en-US" sz="7200" dirty="0"/>
+          </a:p>
+        </p:txBody>
+      </p:sp>
+      <p:sp>
+        <p:nvSpPr>
+          <p:cNvPr id="6" name="Text 4"/>
+          <p:cNvSpPr/>
+          <p:nvPr/>
+        </p:nvSpPr>
+        <p:spPr>
+          <a:xfrm>
+            <a:off x="822960" y="3767328"/>
+            <a:ext cx="3108960" cy="256032"/>
+          </a:xfrm>
+          <a:prstGeom prst="rect">
+            <a:avLst/>
+          </a:prstGeom>
+          <a:noFill/>
+          <a:ln/>
+        </p:spPr>
+        <p:txBody>
+          <a:bodyPr wrap="square" lIns="0" tIns="0" rIns="0" bIns="0" rtlCol="0" anchor="ctr"/>
+          <a:lstStyle/>
+          <a:p>
+            <a:pPr indent="0" marL="0">
+              <a:buNone/>
+            </a:pPr>
+            <a:r>
+              <a:rPr lang="en-US" sz="1050" b="1" spc="150" kern="0" dirty="0">
+                <a:solidFill>
+                  <a:srgbClr val="8A807A"/>
+                </a:solidFill>
+                <a:latin typeface="Arial" pitchFamily="34" charset="0"/>
+                <a:ea typeface="Arial" pitchFamily="34" charset="-122"/>
+                <a:cs typeface="Arial" pitchFamily="34" charset="-120"/>
+              </a:rPr>
+              <a:t>MES 1 – 2  ·  META</a:t>
+            </a:r>
+            <a:endParaRPr lang="en-US" sz="1050" dirty="0"/>
+          </a:p>
+        </p:txBody>
+      </p:sp>
+      <p:sp>
+        <p:nvSpPr>
+          <p:cNvPr id="7" name="Text 5"/>
+          <p:cNvSpPr/>
+          <p:nvPr/>
+        </p:nvSpPr>
+        <p:spPr>
+          <a:xfrm>
+            <a:off x="822960" y="4078224"/>
+            <a:ext cx="3108960" cy="1051560"/>
+          </a:xfrm>
+          <a:prstGeom prst="rect">
+            <a:avLst/>
+          </a:prstGeom>
+          <a:noFill/>
+          <a:ln/>
+        </p:spPr>
+        <p:txBody>
+          <a:bodyPr wrap="square" lIns="0" tIns="0" rIns="0" bIns="0" rtlCol="0" anchor="t"/>
+          <a:lstStyle/>
+          <a:p>
+            <a:pPr indent="0" marL="0">
+              <a:lnSpc>
+                <a:spcPct val="105000"/>
+              </a:lnSpc>
+              <a:buNone/>
+            </a:pPr>
+            <a:r>
+              <a:rPr lang="en-US" sz="2500" b="1" dirty="0">
+                <a:solidFill>
+                  <a:srgbClr val="F2EEE9"/>
+                </a:solidFill>
+                <a:latin typeface="Arial" pitchFamily="34" charset="0"/>
+                <a:ea typeface="Arial" pitchFamily="34" charset="-122"/>
+                <a:cs typeface="Arial" pitchFamily="34" charset="-120"/>
+              </a:rPr>
+              <a:t>Que nos</a:t>
+            </a:r>
+            <a:endParaRPr lang="en-US" sz="2500" dirty="0"/>
+          </a:p>
+          <a:p>
+            <a:pPr indent="0" marL="0">
+              <a:lnSpc>
+                <a:spcPct val="105000"/>
+              </a:lnSpc>
+              <a:buNone/>
+            </a:pPr>
+            <a:r>
+              <a:rPr lang="en-US" sz="2500" b="1" dirty="0">
+                <a:solidFill>
+                  <a:srgbClr val="F2EEE9"/>
+                </a:solidFill>
+                <a:latin typeface="Arial" pitchFamily="34" charset="0"/>
+                <a:ea typeface="Arial" pitchFamily="34" charset="-122"/>
+                <a:cs typeface="Arial" pitchFamily="34" charset="-120"/>
+              </a:rPr>
+              <a:t>conozcan</a:t>
+            </a:r>
+            <a:endParaRPr lang="en-US" sz="2500" dirty="0"/>
+          </a:p>
+        </p:txBody>
+      </p:sp>
+      <p:sp>
+        <p:nvSpPr>
+          <p:cNvPr id="8" name="Text 6"/>
+          <p:cNvSpPr/>
+          <p:nvPr/>
+        </p:nvSpPr>
+        <p:spPr>
+          <a:xfrm>
+            <a:off x="822960" y="5230368"/>
+            <a:ext cx="3108960" cy="777240"/>
+          </a:xfrm>
+          <a:prstGeom prst="rect">
+            <a:avLst/>
+          </a:prstGeom>
+          <a:noFill/>
+          <a:ln/>
+        </p:spPr>
+        <p:txBody>
+          <a:bodyPr wrap="square" lIns="0" tIns="0" rIns="0" bIns="0" rtlCol="0" anchor="t"/>
+          <a:lstStyle/>
+          <a:p>
+            <a:pPr indent="0" marL="0">
+              <a:lnSpc>
+                <a:spcPct val="115000"/>
+              </a:lnSpc>
+              <a:buNone/>
+            </a:pPr>
+            <a:r>
+              <a:rPr lang="en-US" sz="1400" dirty="0">
+                <a:solidFill>
+                  <a:srgbClr val="8A807A"/>
                 </a:solidFill>
                 <a:latin typeface="Calibri" pitchFamily="34" charset="0"/>
                 <a:ea typeface="Calibri" pitchFamily="34" charset="-122"/>
                 <a:cs typeface="Calibri" pitchFamily="34" charset="-120"/>
               </a:rPr>
-              <a:t>Cada fase construye lo que la siguiente necesita.</a:t>
-            </a:r>
-            <a:endParaRPr lang="en-US" sz="1500" dirty="0"/>
-          </a:p>
-        </p:txBody>
-      </p:sp>
-      <p:sp>
-        <p:nvSpPr>
-          <p:cNvPr id="5" name="Shape 3"/>
-          <p:cNvSpPr/>
-          <p:nvPr/>
-        </p:nvSpPr>
-        <p:spPr>
-          <a:xfrm>
-            <a:off x="822960" y="2514600"/>
-            <a:ext cx="713232" cy="713232"/>
-          </a:xfrm>
-          <a:prstGeom prst="ellipse">
-            <a:avLst/>
-          </a:prstGeom>
-          <a:solidFill>
-            <a:srgbClr val="C8963E"/>
-          </a:solidFill>
-          <a:ln/>
-        </p:spPr>
-      </p:sp>
-      <p:sp>
-        <p:nvSpPr>
-          <p:cNvPr id="6" name="Text 4"/>
-          <p:cNvSpPr/>
-          <p:nvPr/>
-        </p:nvSpPr>
-        <p:spPr>
-          <a:xfrm>
-            <a:off x="822960" y="2514600"/>
-            <a:ext cx="713232" cy="713232"/>
-          </a:xfrm>
-          <a:prstGeom prst="rect">
-            <a:avLst/>
-          </a:prstGeom>
-          <a:noFill/>
-          <a:ln/>
-        </p:spPr>
-        <p:txBody>
-          <a:bodyPr wrap="square" lIns="0" tIns="0" rIns="0" bIns="0" rtlCol="0" anchor="ctr"/>
-          <a:lstStyle/>
-          <a:p>
-            <a:pPr algn="ctr" indent="0" marL="0">
-              <a:buNone/>
-            </a:pPr>
-            <a:r>
-              <a:rPr lang="en-US" sz="2600" b="1" dirty="0">
-                <a:solidFill>
-                  <a:srgbClr val="4A1220"/>
-                </a:solidFill>
-                <a:latin typeface="Cambria" pitchFamily="34" charset="0"/>
-                <a:ea typeface="Cambria" pitchFamily="34" charset="-122"/>
-                <a:cs typeface="Cambria" pitchFamily="34" charset="-120"/>
-              </a:rPr>
-              <a:t>1</a:t>
-            </a:r>
-            <a:endParaRPr lang="en-US" sz="2600" dirty="0"/>
-          </a:p>
-        </p:txBody>
-      </p:sp>
-      <p:sp>
-        <p:nvSpPr>
-          <p:cNvPr id="7" name="Text 5"/>
-          <p:cNvSpPr/>
-          <p:nvPr/>
-        </p:nvSpPr>
-        <p:spPr>
-          <a:xfrm>
-            <a:off x="822960" y="3474720"/>
+              <a:t>Instalamos la marca y dejamos la medición andando.</a:t>
+            </a:r>
+            <a:endParaRPr lang="en-US" sz="1400" dirty="0"/>
+          </a:p>
+        </p:txBody>
+      </p:sp>
+      <p:sp>
+        <p:nvSpPr>
+          <p:cNvPr id="9" name="Text 7"/>
+          <p:cNvSpPr/>
+          <p:nvPr/>
+        </p:nvSpPr>
+        <p:spPr>
+          <a:xfrm>
+            <a:off x="4541368" y="2606040"/>
+            <a:ext cx="3108960" cy="1051560"/>
+          </a:xfrm>
+          <a:prstGeom prst="rect">
+            <a:avLst/>
+          </a:prstGeom>
+          <a:noFill/>
+          <a:ln/>
+        </p:spPr>
+        <p:txBody>
+          <a:bodyPr wrap="square" lIns="0" tIns="0" rIns="0" bIns="0" rtlCol="0" anchor="t"/>
+          <a:lstStyle/>
+          <a:p>
+            <a:pPr indent="0" marL="0">
+              <a:buNone/>
+            </a:pPr>
+            <a:r>
+              <a:rPr lang="en-US" sz="7200" b="1" dirty="0">
+                <a:solidFill>
+                  <a:srgbClr val="EF5B25"/>
+                </a:solidFill>
+                <a:latin typeface="Arial" pitchFamily="34" charset="0"/>
+                <a:ea typeface="Arial" pitchFamily="34" charset="-122"/>
+                <a:cs typeface="Arial" pitchFamily="34" charset="-120"/>
+              </a:rPr>
+              <a:t>2</a:t>
+            </a:r>
+            <a:endParaRPr lang="en-US" sz="7200" dirty="0"/>
+          </a:p>
+        </p:txBody>
+      </p:sp>
+      <p:sp>
+        <p:nvSpPr>
+          <p:cNvPr id="10" name="Text 8"/>
+          <p:cNvSpPr/>
+          <p:nvPr/>
+        </p:nvSpPr>
+        <p:spPr>
+          <a:xfrm>
+            <a:off x="4541368" y="3767328"/>
             <a:ext cx="3108960" cy="256032"/>
           </a:xfrm>
           <a:prstGeom prst="rect">
@@ -1746,30 +1864,134 @@
               <a:buNone/>
             </a:pPr>
             <a:r>
-              <a:rPr lang="en-US" sz="1100" b="1" spc="150" kern="0" dirty="0">
-                <a:solidFill>
-                  <a:srgbClr val="8C2F39"/>
+              <a:rPr lang="en-US" sz="1050" b="1" spc="150" kern="0" dirty="0">
+                <a:solidFill>
+                  <a:srgbClr val="8A807A"/>
+                </a:solidFill>
+                <a:latin typeface="Arial" pitchFamily="34" charset="0"/>
+                <a:ea typeface="Arial" pitchFamily="34" charset="-122"/>
+                <a:cs typeface="Arial" pitchFamily="34" charset="-120"/>
+              </a:rPr>
+              <a:t>MES 3 – 4  ·  META</a:t>
+            </a:r>
+            <a:endParaRPr lang="en-US" sz="1050" dirty="0"/>
+          </a:p>
+        </p:txBody>
+      </p:sp>
+      <p:sp>
+        <p:nvSpPr>
+          <p:cNvPr id="11" name="Text 9"/>
+          <p:cNvSpPr/>
+          <p:nvPr/>
+        </p:nvSpPr>
+        <p:spPr>
+          <a:xfrm>
+            <a:off x="4541368" y="4078224"/>
+            <a:ext cx="3108960" cy="1051560"/>
+          </a:xfrm>
+          <a:prstGeom prst="rect">
+            <a:avLst/>
+          </a:prstGeom>
+          <a:noFill/>
+          <a:ln/>
+        </p:spPr>
+        <p:txBody>
+          <a:bodyPr wrap="square" lIns="0" tIns="0" rIns="0" bIns="0" rtlCol="0" anchor="t"/>
+          <a:lstStyle/>
+          <a:p>
+            <a:pPr indent="0" marL="0">
+              <a:lnSpc>
+                <a:spcPct val="105000"/>
+              </a:lnSpc>
+              <a:buNone/>
+            </a:pPr>
+            <a:r>
+              <a:rPr lang="en-US" sz="2500" b="1" dirty="0">
+                <a:solidFill>
+                  <a:srgbClr val="F2EEE9"/>
+                </a:solidFill>
+                <a:latin typeface="Arial" pitchFamily="34" charset="0"/>
+                <a:ea typeface="Arial" pitchFamily="34" charset="-122"/>
+                <a:cs typeface="Arial" pitchFamily="34" charset="-120"/>
+              </a:rPr>
+              <a:t>Que</a:t>
+            </a:r>
+            <a:endParaRPr lang="en-US" sz="2500" dirty="0"/>
+          </a:p>
+          <a:p>
+            <a:pPr indent="0" marL="0">
+              <a:lnSpc>
+                <a:spcPct val="105000"/>
+              </a:lnSpc>
+              <a:buNone/>
+            </a:pPr>
+            <a:r>
+              <a:rPr lang="en-US" sz="2500" b="1" dirty="0">
+                <a:solidFill>
+                  <a:srgbClr val="F2EEE9"/>
+                </a:solidFill>
+                <a:latin typeface="Arial" pitchFamily="34" charset="0"/>
+                <a:ea typeface="Arial" pitchFamily="34" charset="-122"/>
+                <a:cs typeface="Arial" pitchFamily="34" charset="-120"/>
+              </a:rPr>
+              <a:t>compren</a:t>
+            </a:r>
+            <a:endParaRPr lang="en-US" sz="2500" dirty="0"/>
+          </a:p>
+        </p:txBody>
+      </p:sp>
+      <p:sp>
+        <p:nvSpPr>
+          <p:cNvPr id="12" name="Text 10"/>
+          <p:cNvSpPr/>
+          <p:nvPr/>
+        </p:nvSpPr>
+        <p:spPr>
+          <a:xfrm>
+            <a:off x="4541368" y="5230368"/>
+            <a:ext cx="3108960" cy="777240"/>
+          </a:xfrm>
+          <a:prstGeom prst="rect">
+            <a:avLst/>
+          </a:prstGeom>
+          <a:noFill/>
+          <a:ln/>
+        </p:spPr>
+        <p:txBody>
+          <a:bodyPr wrap="square" lIns="0" tIns="0" rIns="0" bIns="0" rtlCol="0" anchor="t"/>
+          <a:lstStyle/>
+          <a:p>
+            <a:pPr indent="0" marL="0">
+              <a:lnSpc>
+                <a:spcPct val="115000"/>
+              </a:lnSpc>
+              <a:buNone/>
+            </a:pPr>
+            <a:r>
+              <a:rPr lang="en-US" sz="1400" dirty="0">
+                <a:solidFill>
+                  <a:srgbClr val="8A807A"/>
                 </a:solidFill>
                 <a:latin typeface="Calibri" pitchFamily="34" charset="0"/>
                 <a:ea typeface="Calibri" pitchFamily="34" charset="-122"/>
                 <a:cs typeface="Calibri" pitchFamily="34" charset="-120"/>
               </a:rPr>
-              <a:t>MES 1 – 2  ·  META</a:t>
-            </a:r>
-            <a:endParaRPr lang="en-US" sz="1100" dirty="0"/>
-          </a:p>
-        </p:txBody>
-      </p:sp>
-      <p:sp>
-        <p:nvSpPr>
-          <p:cNvPr id="8" name="Text 6"/>
-          <p:cNvSpPr/>
-          <p:nvPr/>
-        </p:nvSpPr>
-        <p:spPr>
-          <a:xfrm>
-            <a:off x="822960" y="3767328"/>
-            <a:ext cx="3108960" cy="1005840"/>
+              <a:t>Campañas de venta directa al ecommerce.</a:t>
+            </a:r>
+            <a:endParaRPr lang="en-US" sz="1400" dirty="0"/>
+          </a:p>
+        </p:txBody>
+      </p:sp>
+      <p:sp>
+        <p:nvSpPr>
+          <p:cNvPr id="13" name="Text 11"/>
+          <p:cNvSpPr/>
+          <p:nvPr/>
+        </p:nvSpPr>
+        <p:spPr>
+          <a:xfrm>
+            <a:off x="8259775" y="2606040"/>
+            <a:ext cx="3108960" cy="1051560"/>
           </a:xfrm>
           <a:prstGeom prst="rect">
             <a:avLst/>
@@ -1782,56 +2004,134 @@
           <a:lstStyle/>
           <a:p>
             <a:pPr indent="0" marL="0">
+              <a:buNone/>
+            </a:pPr>
+            <a:r>
+              <a:rPr lang="en-US" sz="7200" b="1" dirty="0">
+                <a:solidFill>
+                  <a:srgbClr val="EF5B25"/>
+                </a:solidFill>
+                <a:latin typeface="Arial" pitchFamily="34" charset="0"/>
+                <a:ea typeface="Arial" pitchFamily="34" charset="-122"/>
+                <a:cs typeface="Arial" pitchFamily="34" charset="-120"/>
+              </a:rPr>
+              <a:t>3</a:t>
+            </a:r>
+            <a:endParaRPr lang="en-US" sz="7200" dirty="0"/>
+          </a:p>
+        </p:txBody>
+      </p:sp>
+      <p:sp>
+        <p:nvSpPr>
+          <p:cNvPr id="14" name="Text 12"/>
+          <p:cNvSpPr/>
+          <p:nvPr/>
+        </p:nvSpPr>
+        <p:spPr>
+          <a:xfrm>
+            <a:off x="8259775" y="3767328"/>
+            <a:ext cx="3108960" cy="256032"/>
+          </a:xfrm>
+          <a:prstGeom prst="rect">
+            <a:avLst/>
+          </a:prstGeom>
+          <a:noFill/>
+          <a:ln/>
+        </p:spPr>
+        <p:txBody>
+          <a:bodyPr wrap="square" lIns="0" tIns="0" rIns="0" bIns="0" rtlCol="0" anchor="ctr"/>
+          <a:lstStyle/>
+          <a:p>
+            <a:pPr indent="0" marL="0">
+              <a:buNone/>
+            </a:pPr>
+            <a:r>
+              <a:rPr lang="en-US" sz="1050" b="1" spc="150" kern="0" dirty="0">
+                <a:solidFill>
+                  <a:srgbClr val="8A807A"/>
+                </a:solidFill>
+                <a:latin typeface="Arial" pitchFamily="34" charset="0"/>
+                <a:ea typeface="Arial" pitchFamily="34" charset="-122"/>
+                <a:cs typeface="Arial" pitchFamily="34" charset="-120"/>
+              </a:rPr>
+              <a:t>MES 5 +  ·  GOOGLE</a:t>
+            </a:r>
+            <a:endParaRPr lang="en-US" sz="1050" dirty="0"/>
+          </a:p>
+        </p:txBody>
+      </p:sp>
+      <p:sp>
+        <p:nvSpPr>
+          <p:cNvPr id="15" name="Text 13"/>
+          <p:cNvSpPr/>
+          <p:nvPr/>
+        </p:nvSpPr>
+        <p:spPr>
+          <a:xfrm>
+            <a:off x="8259775" y="4078224"/>
+            <a:ext cx="3108960" cy="1051560"/>
+          </a:xfrm>
+          <a:prstGeom prst="rect">
+            <a:avLst/>
+          </a:prstGeom>
+          <a:noFill/>
+          <a:ln/>
+        </p:spPr>
+        <p:txBody>
+          <a:bodyPr wrap="square" lIns="0" tIns="0" rIns="0" bIns="0" rtlCol="0" anchor="t"/>
+          <a:lstStyle/>
+          <a:p>
+            <a:pPr indent="0" marL="0">
               <a:lnSpc>
-                <a:spcPct val="100000"/>
+                <a:spcPct val="105000"/>
               </a:lnSpc>
               <a:buNone/>
             </a:pPr>
             <a:r>
-              <a:rPr lang="en-US" sz="2600" b="1" dirty="0">
-                <a:solidFill>
-                  <a:srgbClr val="2B1B14"/>
-                </a:solidFill>
-                <a:latin typeface="Cambria" pitchFamily="34" charset="0"/>
-                <a:ea typeface="Cambria" pitchFamily="34" charset="-122"/>
-                <a:cs typeface="Cambria" pitchFamily="34" charset="-120"/>
+              <a:rPr lang="en-US" sz="2500" b="1" dirty="0">
+                <a:solidFill>
+                  <a:srgbClr val="F2EEE9"/>
+                </a:solidFill>
+                <a:latin typeface="Arial" pitchFamily="34" charset="0"/>
+                <a:ea typeface="Arial" pitchFamily="34" charset="-122"/>
+                <a:cs typeface="Arial" pitchFamily="34" charset="-120"/>
               </a:rPr>
               <a:t>Que nos</a:t>
             </a:r>
-            <a:endParaRPr lang="en-US" sz="2600" dirty="0"/>
+            <a:endParaRPr lang="en-US" sz="2500" dirty="0"/>
           </a:p>
           <a:p>
             <a:pPr indent="0" marL="0">
               <a:lnSpc>
-                <a:spcPct val="100000"/>
+                <a:spcPct val="105000"/>
               </a:lnSpc>
               <a:buNone/>
             </a:pPr>
             <a:r>
-              <a:rPr lang="en-US" sz="2600" b="1" dirty="0">
-                <a:solidFill>
-                  <a:srgbClr val="2B1B14"/>
-                </a:solidFill>
-                <a:latin typeface="Cambria" pitchFamily="34" charset="0"/>
-                <a:ea typeface="Cambria" pitchFamily="34" charset="-122"/>
-                <a:cs typeface="Cambria" pitchFamily="34" charset="-120"/>
-              </a:rPr>
-              <a:t>conozcan</a:t>
-            </a:r>
-            <a:endParaRPr lang="en-US" sz="2600" dirty="0"/>
-          </a:p>
-        </p:txBody>
-      </p:sp>
-      <p:sp>
-        <p:nvSpPr>
-          <p:cNvPr id="9" name="Text 7"/>
-          <p:cNvSpPr/>
-          <p:nvPr/>
-        </p:nvSpPr>
-        <p:spPr>
-          <a:xfrm>
-            <a:off x="822960" y="4846320"/>
-            <a:ext cx="3108960" cy="640080"/>
+              <a:rPr lang="en-US" sz="2500" b="1" dirty="0">
+                <a:solidFill>
+                  <a:srgbClr val="F2EEE9"/>
+                </a:solidFill>
+                <a:latin typeface="Arial" pitchFamily="34" charset="0"/>
+                <a:ea typeface="Arial" pitchFamily="34" charset="-122"/>
+                <a:cs typeface="Arial" pitchFamily="34" charset="-120"/>
+              </a:rPr>
+              <a:t>encuentren</a:t>
+            </a:r>
+            <a:endParaRPr lang="en-US" sz="2500" dirty="0"/>
+          </a:p>
+        </p:txBody>
+      </p:sp>
+      <p:sp>
+        <p:nvSpPr>
+          <p:cNvPr id="16" name="Text 14"/>
+          <p:cNvSpPr/>
+          <p:nvPr/>
+        </p:nvSpPr>
+        <p:spPr>
+          <a:xfrm>
+            <a:off x="8259775" y="5230368"/>
+            <a:ext cx="3108960" cy="777240"/>
           </a:xfrm>
           <a:prstGeom prst="rect">
             <a:avLst/>
@@ -1852,411 +2152,7 @@
             <a:r>
               <a:rPr lang="en-US" sz="1400" dirty="0">
                 <a:solidFill>
-                  <a:srgbClr val="7D6A5E"/>
-                </a:solidFill>
-                <a:latin typeface="Calibri" pitchFamily="34" charset="0"/>
-                <a:ea typeface="Calibri" pitchFamily="34" charset="-122"/>
-                <a:cs typeface="Calibri" pitchFamily="34" charset="-120"/>
-              </a:rPr>
-              <a:t>Instalamos la marca y dejamos la medición andando.</a:t>
-            </a:r>
-            <a:endParaRPr lang="en-US" sz="1400" dirty="0"/>
-          </a:p>
-        </p:txBody>
-      </p:sp>
-      <p:sp>
-        <p:nvSpPr>
-          <p:cNvPr id="10" name="Shape 8"/>
-          <p:cNvSpPr/>
-          <p:nvPr/>
-        </p:nvSpPr>
-        <p:spPr>
-          <a:xfrm>
-            <a:off x="4541368" y="2514600"/>
-            <a:ext cx="713232" cy="713232"/>
-          </a:xfrm>
-          <a:prstGeom prst="ellipse">
-            <a:avLst/>
-          </a:prstGeom>
-          <a:solidFill>
-            <a:srgbClr val="C8963E"/>
-          </a:solidFill>
-          <a:ln/>
-        </p:spPr>
-      </p:sp>
-      <p:sp>
-        <p:nvSpPr>
-          <p:cNvPr id="11" name="Text 9"/>
-          <p:cNvSpPr/>
-          <p:nvPr/>
-        </p:nvSpPr>
-        <p:spPr>
-          <a:xfrm>
-            <a:off x="4541368" y="2514600"/>
-            <a:ext cx="713232" cy="713232"/>
-          </a:xfrm>
-          <a:prstGeom prst="rect">
-            <a:avLst/>
-          </a:prstGeom>
-          <a:noFill/>
-          <a:ln/>
-        </p:spPr>
-        <p:txBody>
-          <a:bodyPr wrap="square" lIns="0" tIns="0" rIns="0" bIns="0" rtlCol="0" anchor="ctr"/>
-          <a:lstStyle/>
-          <a:p>
-            <a:pPr algn="ctr" indent="0" marL="0">
-              <a:buNone/>
-            </a:pPr>
-            <a:r>
-              <a:rPr lang="en-US" sz="2600" b="1" dirty="0">
-                <a:solidFill>
-                  <a:srgbClr val="4A1220"/>
-                </a:solidFill>
-                <a:latin typeface="Cambria" pitchFamily="34" charset="0"/>
-                <a:ea typeface="Cambria" pitchFamily="34" charset="-122"/>
-                <a:cs typeface="Cambria" pitchFamily="34" charset="-120"/>
-              </a:rPr>
-              <a:t>2</a:t>
-            </a:r>
-            <a:endParaRPr lang="en-US" sz="2600" dirty="0"/>
-          </a:p>
-        </p:txBody>
-      </p:sp>
-      <p:sp>
-        <p:nvSpPr>
-          <p:cNvPr id="12" name="Text 10"/>
-          <p:cNvSpPr/>
-          <p:nvPr/>
-        </p:nvSpPr>
-        <p:spPr>
-          <a:xfrm>
-            <a:off x="4541368" y="3474720"/>
-            <a:ext cx="3108960" cy="256032"/>
-          </a:xfrm>
-          <a:prstGeom prst="rect">
-            <a:avLst/>
-          </a:prstGeom>
-          <a:noFill/>
-          <a:ln/>
-        </p:spPr>
-        <p:txBody>
-          <a:bodyPr wrap="square" lIns="0" tIns="0" rIns="0" bIns="0" rtlCol="0" anchor="ctr"/>
-          <a:lstStyle/>
-          <a:p>
-            <a:pPr indent="0" marL="0">
-              <a:buNone/>
-            </a:pPr>
-            <a:r>
-              <a:rPr lang="en-US" sz="1100" b="1" spc="150" kern="0" dirty="0">
-                <a:solidFill>
-                  <a:srgbClr val="8C2F39"/>
-                </a:solidFill>
-                <a:latin typeface="Calibri" pitchFamily="34" charset="0"/>
-                <a:ea typeface="Calibri" pitchFamily="34" charset="-122"/>
-                <a:cs typeface="Calibri" pitchFamily="34" charset="-120"/>
-              </a:rPr>
-              <a:t>MES 3 – 4  ·  META</a:t>
-            </a:r>
-            <a:endParaRPr lang="en-US" sz="1100" dirty="0"/>
-          </a:p>
-        </p:txBody>
-      </p:sp>
-      <p:sp>
-        <p:nvSpPr>
-          <p:cNvPr id="13" name="Text 11"/>
-          <p:cNvSpPr/>
-          <p:nvPr/>
-        </p:nvSpPr>
-        <p:spPr>
-          <a:xfrm>
-            <a:off x="4541368" y="3767328"/>
-            <a:ext cx="3108960" cy="1005840"/>
-          </a:xfrm>
-          <a:prstGeom prst="rect">
-            <a:avLst/>
-          </a:prstGeom>
-          <a:noFill/>
-          <a:ln/>
-        </p:spPr>
-        <p:txBody>
-          <a:bodyPr wrap="square" lIns="0" tIns="0" rIns="0" bIns="0" rtlCol="0" anchor="t"/>
-          <a:lstStyle/>
-          <a:p>
-            <a:pPr indent="0" marL="0">
-              <a:lnSpc>
-                <a:spcPct val="100000"/>
-              </a:lnSpc>
-              <a:buNone/>
-            </a:pPr>
-            <a:r>
-              <a:rPr lang="en-US" sz="2600" b="1" dirty="0">
-                <a:solidFill>
-                  <a:srgbClr val="2B1B14"/>
-                </a:solidFill>
-                <a:latin typeface="Cambria" pitchFamily="34" charset="0"/>
-                <a:ea typeface="Cambria" pitchFamily="34" charset="-122"/>
-                <a:cs typeface="Cambria" pitchFamily="34" charset="-120"/>
-              </a:rPr>
-              <a:t>Que</a:t>
-            </a:r>
-            <a:endParaRPr lang="en-US" sz="2600" dirty="0"/>
-          </a:p>
-          <a:p>
-            <a:pPr indent="0" marL="0">
-              <a:lnSpc>
-                <a:spcPct val="100000"/>
-              </a:lnSpc>
-              <a:buNone/>
-            </a:pPr>
-            <a:r>
-              <a:rPr lang="en-US" sz="2600" b="1" dirty="0">
-                <a:solidFill>
-                  <a:srgbClr val="2B1B14"/>
-                </a:solidFill>
-                <a:latin typeface="Cambria" pitchFamily="34" charset="0"/>
-                <a:ea typeface="Cambria" pitchFamily="34" charset="-122"/>
-                <a:cs typeface="Cambria" pitchFamily="34" charset="-120"/>
-              </a:rPr>
-              <a:t>compren</a:t>
-            </a:r>
-            <a:endParaRPr lang="en-US" sz="2600" dirty="0"/>
-          </a:p>
-        </p:txBody>
-      </p:sp>
-      <p:sp>
-        <p:nvSpPr>
-          <p:cNvPr id="14" name="Text 12"/>
-          <p:cNvSpPr/>
-          <p:nvPr/>
-        </p:nvSpPr>
-        <p:spPr>
-          <a:xfrm>
-            <a:off x="4541368" y="4846320"/>
-            <a:ext cx="3108960" cy="640080"/>
-          </a:xfrm>
-          <a:prstGeom prst="rect">
-            <a:avLst/>
-          </a:prstGeom>
-          <a:noFill/>
-          <a:ln/>
-        </p:spPr>
-        <p:txBody>
-          <a:bodyPr wrap="square" lIns="0" tIns="0" rIns="0" bIns="0" rtlCol="0" anchor="t"/>
-          <a:lstStyle/>
-          <a:p>
-            <a:pPr indent="0" marL="0">
-              <a:lnSpc>
-                <a:spcPct val="115000"/>
-              </a:lnSpc>
-              <a:buNone/>
-            </a:pPr>
-            <a:r>
-              <a:rPr lang="en-US" sz="1400" dirty="0">
-                <a:solidFill>
-                  <a:srgbClr val="7D6A5E"/>
-                </a:solidFill>
-                <a:latin typeface="Calibri" pitchFamily="34" charset="0"/>
-                <a:ea typeface="Calibri" pitchFamily="34" charset="-122"/>
-                <a:cs typeface="Calibri" pitchFamily="34" charset="-120"/>
-              </a:rPr>
-              <a:t>Campañas de venta directa al ecommerce.</a:t>
-            </a:r>
-            <a:endParaRPr lang="en-US" sz="1400" dirty="0"/>
-          </a:p>
-        </p:txBody>
-      </p:sp>
-      <p:sp>
-        <p:nvSpPr>
-          <p:cNvPr id="15" name="Shape 13"/>
-          <p:cNvSpPr/>
-          <p:nvPr/>
-        </p:nvSpPr>
-        <p:spPr>
-          <a:xfrm>
-            <a:off x="8259775" y="2514600"/>
-            <a:ext cx="713232" cy="713232"/>
-          </a:xfrm>
-          <a:prstGeom prst="ellipse">
-            <a:avLst/>
-          </a:prstGeom>
-          <a:solidFill>
-            <a:srgbClr val="C8963E"/>
-          </a:solidFill>
-          <a:ln/>
-        </p:spPr>
-      </p:sp>
-      <p:sp>
-        <p:nvSpPr>
-          <p:cNvPr id="16" name="Text 14"/>
-          <p:cNvSpPr/>
-          <p:nvPr/>
-        </p:nvSpPr>
-        <p:spPr>
-          <a:xfrm>
-            <a:off x="8259775" y="2514600"/>
-            <a:ext cx="713232" cy="713232"/>
-          </a:xfrm>
-          <a:prstGeom prst="rect">
-            <a:avLst/>
-          </a:prstGeom>
-          <a:noFill/>
-          <a:ln/>
-        </p:spPr>
-        <p:txBody>
-          <a:bodyPr wrap="square" lIns="0" tIns="0" rIns="0" bIns="0" rtlCol="0" anchor="ctr"/>
-          <a:lstStyle/>
-          <a:p>
-            <a:pPr algn="ctr" indent="0" marL="0">
-              <a:buNone/>
-            </a:pPr>
-            <a:r>
-              <a:rPr lang="en-US" sz="2600" b="1" dirty="0">
-                <a:solidFill>
-                  <a:srgbClr val="4A1220"/>
-                </a:solidFill>
-                <a:latin typeface="Cambria" pitchFamily="34" charset="0"/>
-                <a:ea typeface="Cambria" pitchFamily="34" charset="-122"/>
-                <a:cs typeface="Cambria" pitchFamily="34" charset="-120"/>
-              </a:rPr>
-              <a:t>3</a:t>
-            </a:r>
-            <a:endParaRPr lang="en-US" sz="2600" dirty="0"/>
-          </a:p>
-        </p:txBody>
-      </p:sp>
-      <p:sp>
-        <p:nvSpPr>
-          <p:cNvPr id="17" name="Text 15"/>
-          <p:cNvSpPr/>
-          <p:nvPr/>
-        </p:nvSpPr>
-        <p:spPr>
-          <a:xfrm>
-            <a:off x="8259775" y="3474720"/>
-            <a:ext cx="3108960" cy="256032"/>
-          </a:xfrm>
-          <a:prstGeom prst="rect">
-            <a:avLst/>
-          </a:prstGeom>
-          <a:noFill/>
-          <a:ln/>
-        </p:spPr>
-        <p:txBody>
-          <a:bodyPr wrap="square" lIns="0" tIns="0" rIns="0" bIns="0" rtlCol="0" anchor="ctr"/>
-          <a:lstStyle/>
-          <a:p>
-            <a:pPr indent="0" marL="0">
-              <a:buNone/>
-            </a:pPr>
-            <a:r>
-              <a:rPr lang="en-US" sz="1100" b="1" spc="150" kern="0" dirty="0">
-                <a:solidFill>
-                  <a:srgbClr val="8C2F39"/>
-                </a:solidFill>
-                <a:latin typeface="Calibri" pitchFamily="34" charset="0"/>
-                <a:ea typeface="Calibri" pitchFamily="34" charset="-122"/>
-                <a:cs typeface="Calibri" pitchFamily="34" charset="-120"/>
-              </a:rPr>
-              <a:t>MES 5 +  ·  GOOGLE</a:t>
-            </a:r>
-            <a:endParaRPr lang="en-US" sz="1100" dirty="0"/>
-          </a:p>
-        </p:txBody>
-      </p:sp>
-      <p:sp>
-        <p:nvSpPr>
-          <p:cNvPr id="18" name="Text 16"/>
-          <p:cNvSpPr/>
-          <p:nvPr/>
-        </p:nvSpPr>
-        <p:spPr>
-          <a:xfrm>
-            <a:off x="8259775" y="3767328"/>
-            <a:ext cx="3108960" cy="1005840"/>
-          </a:xfrm>
-          <a:prstGeom prst="rect">
-            <a:avLst/>
-          </a:prstGeom>
-          <a:noFill/>
-          <a:ln/>
-        </p:spPr>
-        <p:txBody>
-          <a:bodyPr wrap="square" lIns="0" tIns="0" rIns="0" bIns="0" rtlCol="0" anchor="t"/>
-          <a:lstStyle/>
-          <a:p>
-            <a:pPr indent="0" marL="0">
-              <a:lnSpc>
-                <a:spcPct val="100000"/>
-              </a:lnSpc>
-              <a:buNone/>
-            </a:pPr>
-            <a:r>
-              <a:rPr lang="en-US" sz="2600" b="1" dirty="0">
-                <a:solidFill>
-                  <a:srgbClr val="2B1B14"/>
-                </a:solidFill>
-                <a:latin typeface="Cambria" pitchFamily="34" charset="0"/>
-                <a:ea typeface="Cambria" pitchFamily="34" charset="-122"/>
-                <a:cs typeface="Cambria" pitchFamily="34" charset="-120"/>
-              </a:rPr>
-              <a:t>Que nos</a:t>
-            </a:r>
-            <a:endParaRPr lang="en-US" sz="2600" dirty="0"/>
-          </a:p>
-          <a:p>
-            <a:pPr indent="0" marL="0">
-              <a:lnSpc>
-                <a:spcPct val="100000"/>
-              </a:lnSpc>
-              <a:buNone/>
-            </a:pPr>
-            <a:r>
-              <a:rPr lang="en-US" sz="2600" b="1" dirty="0">
-                <a:solidFill>
-                  <a:srgbClr val="2B1B14"/>
-                </a:solidFill>
-                <a:latin typeface="Cambria" pitchFamily="34" charset="0"/>
-                <a:ea typeface="Cambria" pitchFamily="34" charset="-122"/>
-                <a:cs typeface="Cambria" pitchFamily="34" charset="-120"/>
-              </a:rPr>
-              <a:t>encuentren</a:t>
-            </a:r>
-            <a:endParaRPr lang="en-US" sz="2600" dirty="0"/>
-          </a:p>
-        </p:txBody>
-      </p:sp>
-      <p:sp>
-        <p:nvSpPr>
-          <p:cNvPr id="19" name="Text 17"/>
-          <p:cNvSpPr/>
-          <p:nvPr/>
-        </p:nvSpPr>
-        <p:spPr>
-          <a:xfrm>
-            <a:off x="8259775" y="4846320"/>
-            <a:ext cx="3108960" cy="640080"/>
-          </a:xfrm>
-          <a:prstGeom prst="rect">
-            <a:avLst/>
-          </a:prstGeom>
-          <a:noFill/>
-          <a:ln/>
-        </p:spPr>
-        <p:txBody>
-          <a:bodyPr wrap="square" lIns="0" tIns="0" rIns="0" bIns="0" rtlCol="0" anchor="t"/>
-          <a:lstStyle/>
-          <a:p>
-            <a:pPr indent="0" marL="0">
-              <a:lnSpc>
-                <a:spcPct val="115000"/>
-              </a:lnSpc>
-              <a:buNone/>
-            </a:pPr>
-            <a:r>
-              <a:rPr lang="en-US" sz="1400" dirty="0">
-                <a:solidFill>
-                  <a:srgbClr val="7D6A5E"/>
+                  <a:srgbClr val="8A807A"/>
                 </a:solidFill>
                 <a:latin typeface="Calibri" pitchFamily="34" charset="0"/>
                 <a:ea typeface="Calibri" pitchFamily="34" charset="-122"/>
@@ -2282,7 +2178,7 @@
     <p:bg>
       <p:bgPr>
         <a:solidFill>
-          <a:srgbClr val="FFFFFF"/>
+          <a:srgbClr val="0F0E0D"/>
         </a:solidFill>
       </p:bgPr>
     </p:bg>
@@ -2308,7 +2204,7 @@
         </p:nvSpPr>
         <p:spPr>
           <a:xfrm>
-            <a:off x="822960" y="658368"/>
+            <a:off x="822960" y="749808"/>
             <a:ext cx="10545775" cy="274320"/>
           </a:xfrm>
           <a:prstGeom prst="rect">
@@ -2327,113 +2223,132 @@
             <a:r>
               <a:rPr lang="en-US" sz="1100" b="1" spc="250" kern="0" dirty="0">
                 <a:solidFill>
-                  <a:srgbClr val="C8963E"/>
+                  <a:srgbClr val="EF5B25"/>
+                </a:solidFill>
+                <a:latin typeface="Arial" pitchFamily="34" charset="0"/>
+                <a:ea typeface="Arial" pitchFamily="34" charset="-122"/>
+                <a:cs typeface="Arial" pitchFamily="34" charset="-120"/>
+              </a:rPr>
+              <a:t>02  —  MI TRABAJO</a:t>
+            </a:r>
+            <a:endParaRPr lang="en-US" sz="1100" dirty="0"/>
+          </a:p>
+        </p:txBody>
+      </p:sp>
+      <p:sp>
+        <p:nvSpPr>
+          <p:cNvPr id="3" name="Text 1"/>
+          <p:cNvSpPr/>
+          <p:nvPr/>
+        </p:nvSpPr>
+        <p:spPr>
+          <a:xfrm>
+            <a:off x="822960" y="1133856"/>
+            <a:ext cx="10545775" cy="731520"/>
+          </a:xfrm>
+          <a:prstGeom prst="rect">
+            <a:avLst/>
+          </a:prstGeom>
+          <a:noFill/>
+          <a:ln/>
+        </p:spPr>
+        <p:txBody>
+          <a:bodyPr wrap="square" lIns="0" tIns="0" rIns="0" bIns="0" rtlCol="0" anchor="ctr"/>
+          <a:lstStyle/>
+          <a:p>
+            <a:pPr indent="0" marL="0">
+              <a:buNone/>
+            </a:pPr>
+            <a:r>
+              <a:rPr lang="en-US" sz="3800" b="1" dirty="0">
+                <a:solidFill>
+                  <a:srgbClr val="F2EEE9"/>
+                </a:solidFill>
+                <a:latin typeface="Arial" pitchFamily="34" charset="0"/>
+                <a:ea typeface="Arial" pitchFamily="34" charset="-122"/>
+                <a:cs typeface="Arial" pitchFamily="34" charset="-120"/>
+              </a:rPr>
+              <a:t>Qué hago cada mes</a:t>
+            </a:r>
+            <a:endParaRPr lang="en-US" sz="3800" dirty="0"/>
+          </a:p>
+        </p:txBody>
+      </p:sp>
+      <p:sp>
+        <p:nvSpPr>
+          <p:cNvPr id="4" name="Text 2"/>
+          <p:cNvSpPr/>
+          <p:nvPr/>
+        </p:nvSpPr>
+        <p:spPr>
+          <a:xfrm>
+            <a:off x="822960" y="2514600"/>
+            <a:ext cx="566928" cy="475488"/>
+          </a:xfrm>
+          <a:prstGeom prst="rect">
+            <a:avLst/>
+          </a:prstGeom>
+          <a:noFill/>
+          <a:ln/>
+        </p:spPr>
+        <p:txBody>
+          <a:bodyPr wrap="square" lIns="0" tIns="0" rIns="0" bIns="0" rtlCol="0" anchor="ctr"/>
+          <a:lstStyle/>
+          <a:p>
+            <a:pPr indent="0" marL="0">
+              <a:buNone/>
+            </a:pPr>
+            <a:r>
+              <a:rPr lang="en-US" sz="1400" b="1" dirty="0">
+                <a:solidFill>
+                  <a:srgbClr val="EF5B25"/>
+                </a:solidFill>
+                <a:latin typeface="Arial" pitchFamily="34" charset="0"/>
+                <a:ea typeface="Arial" pitchFamily="34" charset="-122"/>
+                <a:cs typeface="Arial" pitchFamily="34" charset="-120"/>
+              </a:rPr>
+              <a:t>01</a:t>
+            </a:r>
+            <a:endParaRPr lang="en-US" sz="1400" dirty="0"/>
+          </a:p>
+        </p:txBody>
+      </p:sp>
+      <p:sp>
+        <p:nvSpPr>
+          <p:cNvPr id="5" name="Text 3"/>
+          <p:cNvSpPr/>
+          <p:nvPr/>
+        </p:nvSpPr>
+        <p:spPr>
+          <a:xfrm>
+            <a:off x="1463040" y="2514600"/>
+            <a:ext cx="5760720" cy="475488"/>
+          </a:xfrm>
+          <a:prstGeom prst="rect">
+            <a:avLst/>
+          </a:prstGeom>
+          <a:noFill/>
+          <a:ln/>
+        </p:spPr>
+        <p:txBody>
+          <a:bodyPr wrap="square" lIns="0" tIns="0" rIns="0" bIns="0" rtlCol="0" anchor="ctr"/>
+          <a:lstStyle/>
+          <a:p>
+            <a:pPr indent="0" marL="0">
+              <a:buNone/>
+            </a:pPr>
+            <a:r>
+              <a:rPr lang="en-US" sz="1800" dirty="0">
+                <a:solidFill>
+                  <a:srgbClr val="F2EEE9"/>
                 </a:solidFill>
                 <a:latin typeface="Calibri" pitchFamily="34" charset="0"/>
                 <a:ea typeface="Calibri" pitchFamily="34" charset="-122"/>
                 <a:cs typeface="Calibri" pitchFamily="34" charset="-120"/>
               </a:rPr>
-              <a:t>MI TRABAJO</a:t>
-            </a:r>
-            <a:endParaRPr lang="en-US" sz="1100" dirty="0"/>
-          </a:p>
-        </p:txBody>
-      </p:sp>
-      <p:sp>
-        <p:nvSpPr>
-          <p:cNvPr id="3" name="Text 1"/>
-          <p:cNvSpPr/>
-          <p:nvPr/>
-        </p:nvSpPr>
-        <p:spPr>
-          <a:xfrm>
-            <a:off x="822960" y="987552"/>
-            <a:ext cx="10545775" cy="658368"/>
-          </a:xfrm>
-          <a:prstGeom prst="rect">
-            <a:avLst/>
-          </a:prstGeom>
-          <a:noFill/>
-          <a:ln/>
-        </p:spPr>
-        <p:txBody>
-          <a:bodyPr wrap="square" lIns="0" tIns="0" rIns="0" bIns="0" rtlCol="0" anchor="ctr"/>
-          <a:lstStyle/>
-          <a:p>
-            <a:pPr indent="0" marL="0">
-              <a:buNone/>
-            </a:pPr>
-            <a:r>
-              <a:rPr lang="en-US" sz="4000" b="1" dirty="0">
-                <a:solidFill>
-                  <a:srgbClr val="2B1B14"/>
-                </a:solidFill>
-                <a:latin typeface="Cambria" pitchFamily="34" charset="0"/>
-                <a:ea typeface="Cambria" pitchFamily="34" charset="-122"/>
-                <a:cs typeface="Cambria" pitchFamily="34" charset="-120"/>
-              </a:rPr>
-              <a:t>Qué hago cada mes</a:t>
-            </a:r>
-            <a:endParaRPr lang="en-US" sz="4000" dirty="0"/>
-          </a:p>
-        </p:txBody>
-      </p:sp>
-      <p:sp>
-        <p:nvSpPr>
-          <p:cNvPr id="4" name="Shape 2"/>
-          <p:cNvSpPr/>
-          <p:nvPr/>
-        </p:nvSpPr>
-        <p:spPr>
-          <a:xfrm>
-            <a:off x="822960" y="2386584"/>
-            <a:ext cx="384048" cy="384048"/>
-          </a:xfrm>
-          <a:prstGeom prst="ellipse">
-            <a:avLst/>
-          </a:prstGeom>
-          <a:solidFill>
-            <a:srgbClr val="C8963E"/>
-          </a:solidFill>
-          <a:ln/>
-        </p:spPr>
-      </p:sp>
-      <p:sp>
-        <p:nvSpPr>
-          <p:cNvPr id="5" name="Text 3"/>
-          <p:cNvSpPr/>
-          <p:nvPr/>
-        </p:nvSpPr>
-        <p:spPr>
-          <a:xfrm>
-            <a:off x="822960" y="2386584"/>
-            <a:ext cx="384048" cy="384048"/>
-          </a:xfrm>
-          <a:prstGeom prst="rect">
-            <a:avLst/>
-          </a:prstGeom>
-          <a:noFill/>
-          <a:ln/>
-        </p:spPr>
-        <p:txBody>
-          <a:bodyPr wrap="square" lIns="0" tIns="0" rIns="0" bIns="0" rtlCol="0" anchor="ctr"/>
-          <a:lstStyle/>
-          <a:p>
-            <a:pPr algn="ctr" indent="0" marL="0">
-              <a:buNone/>
-            </a:pPr>
-            <a:r>
-              <a:rPr lang="en-US" sz="1500" b="1" dirty="0">
-                <a:solidFill>
-                  <a:srgbClr val="4A1220"/>
-                </a:solidFill>
-                <a:latin typeface="Cambria" pitchFamily="34" charset="0"/>
-                <a:ea typeface="Cambria" pitchFamily="34" charset="-122"/>
-                <a:cs typeface="Cambria" pitchFamily="34" charset="-120"/>
-              </a:rPr>
-              <a:t>1</a:t>
-            </a:r>
-            <a:endParaRPr lang="en-US" sz="1500" dirty="0"/>
+              <a:t>El plan de medios del mes</a:t>
+            </a:r>
+            <a:endParaRPr lang="en-US" sz="1800" dirty="0"/>
           </a:p>
         </p:txBody>
       </p:sp>
@@ -2445,8 +2360,47 @@
         </p:nvSpPr>
         <p:spPr>
           <a:xfrm>
-            <a:off x="1536192" y="2331720"/>
-            <a:ext cx="5852160" cy="493776"/>
+            <a:off x="822960" y="3209544"/>
+            <a:ext cx="566928" cy="475488"/>
+          </a:xfrm>
+          <a:prstGeom prst="rect">
+            <a:avLst/>
+          </a:prstGeom>
+          <a:noFill/>
+          <a:ln/>
+        </p:spPr>
+        <p:txBody>
+          <a:bodyPr wrap="square" lIns="0" tIns="0" rIns="0" bIns="0" rtlCol="0" anchor="ctr"/>
+          <a:lstStyle/>
+          <a:p>
+            <a:pPr indent="0" marL="0">
+              <a:buNone/>
+            </a:pPr>
+            <a:r>
+              <a:rPr lang="en-US" sz="1400" b="1" dirty="0">
+                <a:solidFill>
+                  <a:srgbClr val="EF5B25"/>
+                </a:solidFill>
+                <a:latin typeface="Arial" pitchFamily="34" charset="0"/>
+                <a:ea typeface="Arial" pitchFamily="34" charset="-122"/>
+                <a:cs typeface="Arial" pitchFamily="34" charset="-120"/>
+              </a:rPr>
+              <a:t>02</a:t>
+            </a:r>
+            <a:endParaRPr lang="en-US" sz="1400" dirty="0"/>
+          </a:p>
+        </p:txBody>
+      </p:sp>
+      <p:sp>
+        <p:nvSpPr>
+          <p:cNvPr id="7" name="Text 5"/>
+          <p:cNvSpPr/>
+          <p:nvPr/>
+        </p:nvSpPr>
+        <p:spPr>
+          <a:xfrm>
+            <a:off x="1463040" y="3209544"/>
+            <a:ext cx="5760720" cy="475488"/>
           </a:xfrm>
           <a:prstGeom prst="rect">
             <a:avLst/>
@@ -2464,13 +2418,13 @@
             <a:r>
               <a:rPr lang="en-US" sz="1800" dirty="0">
                 <a:solidFill>
-                  <a:srgbClr val="2B1B14"/>
+                  <a:srgbClr val="F2EEE9"/>
                 </a:solidFill>
                 <a:latin typeface="Calibri" pitchFamily="34" charset="0"/>
                 <a:ea typeface="Calibri" pitchFamily="34" charset="-122"/>
                 <a:cs typeface="Calibri" pitchFamily="34" charset="-120"/>
               </a:rPr>
-              <a:t>El plan de medios del mes</a:t>
+              <a:t>El requerimiento de creativos al equipo creativo</a:t>
             </a:r>
             <a:endParaRPr lang="en-US" sz="1800" dirty="0"/>
           </a:p>
@@ -2478,60 +2432,40 @@
       </p:sp>
       <p:sp>
         <p:nvSpPr>
-          <p:cNvPr id="7" name="Shape 5"/>
-          <p:cNvSpPr/>
-          <p:nvPr/>
-        </p:nvSpPr>
-        <p:spPr>
-          <a:xfrm>
-            <a:off x="822960" y="3099816"/>
-            <a:ext cx="384048" cy="384048"/>
-          </a:xfrm>
-          <a:prstGeom prst="ellipse">
-            <a:avLst/>
-          </a:prstGeom>
-          <a:solidFill>
-            <a:srgbClr val="C8963E"/>
-          </a:solidFill>
-          <a:ln/>
-        </p:spPr>
-      </p:sp>
-      <p:sp>
-        <p:nvSpPr>
           <p:cNvPr id="8" name="Text 6"/>
           <p:cNvSpPr/>
           <p:nvPr/>
         </p:nvSpPr>
         <p:spPr>
           <a:xfrm>
-            <a:off x="822960" y="3099816"/>
-            <a:ext cx="384048" cy="384048"/>
-          </a:xfrm>
-          <a:prstGeom prst="rect">
-            <a:avLst/>
-          </a:prstGeom>
-          <a:noFill/>
-          <a:ln/>
-        </p:spPr>
-        <p:txBody>
-          <a:bodyPr wrap="square" lIns="0" tIns="0" rIns="0" bIns="0" rtlCol="0" anchor="ctr"/>
-          <a:lstStyle/>
-          <a:p>
-            <a:pPr algn="ctr" indent="0" marL="0">
-              <a:buNone/>
-            </a:pPr>
-            <a:r>
-              <a:rPr lang="en-US" sz="1500" b="1" dirty="0">
-                <a:solidFill>
-                  <a:srgbClr val="4A1220"/>
-                </a:solidFill>
-                <a:latin typeface="Cambria" pitchFamily="34" charset="0"/>
-                <a:ea typeface="Cambria" pitchFamily="34" charset="-122"/>
-                <a:cs typeface="Cambria" pitchFamily="34" charset="-120"/>
-              </a:rPr>
-              <a:t>2</a:t>
-            </a:r>
-            <a:endParaRPr lang="en-US" sz="1500" dirty="0"/>
+            <a:off x="822960" y="3904488"/>
+            <a:ext cx="566928" cy="475488"/>
+          </a:xfrm>
+          <a:prstGeom prst="rect">
+            <a:avLst/>
+          </a:prstGeom>
+          <a:noFill/>
+          <a:ln/>
+        </p:spPr>
+        <p:txBody>
+          <a:bodyPr wrap="square" lIns="0" tIns="0" rIns="0" bIns="0" rtlCol="0" anchor="ctr"/>
+          <a:lstStyle/>
+          <a:p>
+            <a:pPr indent="0" marL="0">
+              <a:buNone/>
+            </a:pPr>
+            <a:r>
+              <a:rPr lang="en-US" sz="1400" b="1" dirty="0">
+                <a:solidFill>
+                  <a:srgbClr val="EF5B25"/>
+                </a:solidFill>
+                <a:latin typeface="Arial" pitchFamily="34" charset="0"/>
+                <a:ea typeface="Arial" pitchFamily="34" charset="-122"/>
+                <a:cs typeface="Arial" pitchFamily="34" charset="-120"/>
+              </a:rPr>
+              <a:t>03</a:t>
+            </a:r>
+            <a:endParaRPr lang="en-US" sz="1400" dirty="0"/>
           </a:p>
         </p:txBody>
       </p:sp>
@@ -2543,8 +2477,8 @@
         </p:nvSpPr>
         <p:spPr>
           <a:xfrm>
-            <a:off x="1536192" y="3044952"/>
-            <a:ext cx="5852160" cy="493776"/>
+            <a:off x="1463040" y="3904488"/>
+            <a:ext cx="5760720" cy="475488"/>
           </a:xfrm>
           <a:prstGeom prst="rect">
             <a:avLst/>
@@ -2562,13 +2496,13 @@
             <a:r>
               <a:rPr lang="en-US" sz="1800" dirty="0">
                 <a:solidFill>
-                  <a:srgbClr val="2B1B14"/>
+                  <a:srgbClr val="F2EEE9"/>
                 </a:solidFill>
                 <a:latin typeface="Calibri" pitchFamily="34" charset="0"/>
                 <a:ea typeface="Calibri" pitchFamily="34" charset="-122"/>
                 <a:cs typeface="Calibri" pitchFamily="34" charset="-120"/>
               </a:rPr>
-              <a:t>El requerimiento de creativos al equipo creativo</a:t>
+              <a:t>Configuración de campañas, píxel y catálogo</a:t>
             </a:r>
             <a:endParaRPr lang="en-US" sz="1800" dirty="0"/>
           </a:p>
@@ -2576,23 +2510,42 @@
       </p:sp>
       <p:sp>
         <p:nvSpPr>
-          <p:cNvPr id="10" name="Shape 8"/>
-          <p:cNvSpPr/>
-          <p:nvPr/>
-        </p:nvSpPr>
-        <p:spPr>
-          <a:xfrm>
-            <a:off x="822960" y="3813048"/>
-            <a:ext cx="384048" cy="384048"/>
-          </a:xfrm>
-          <a:prstGeom prst="ellipse">
-            <a:avLst/>
-          </a:prstGeom>
-          <a:solidFill>
-            <a:srgbClr val="C8963E"/>
-          </a:solidFill>
-          <a:ln/>
-        </p:spPr>
+          <p:cNvPr id="10" name="Text 8"/>
+          <p:cNvSpPr/>
+          <p:nvPr/>
+        </p:nvSpPr>
+        <p:spPr>
+          <a:xfrm>
+            <a:off x="822960" y="4599432"/>
+            <a:ext cx="566928" cy="475488"/>
+          </a:xfrm>
+          <a:prstGeom prst="rect">
+            <a:avLst/>
+          </a:prstGeom>
+          <a:noFill/>
+          <a:ln/>
+        </p:spPr>
+        <p:txBody>
+          <a:bodyPr wrap="square" lIns="0" tIns="0" rIns="0" bIns="0" rtlCol="0" anchor="ctr"/>
+          <a:lstStyle/>
+          <a:p>
+            <a:pPr indent="0" marL="0">
+              <a:buNone/>
+            </a:pPr>
+            <a:r>
+              <a:rPr lang="en-US" sz="1400" b="1" dirty="0">
+                <a:solidFill>
+                  <a:srgbClr val="EF5B25"/>
+                </a:solidFill>
+                <a:latin typeface="Arial" pitchFamily="34" charset="0"/>
+                <a:ea typeface="Arial" pitchFamily="34" charset="-122"/>
+                <a:cs typeface="Arial" pitchFamily="34" charset="-120"/>
+              </a:rPr>
+              <a:t>04</a:t>
+            </a:r>
+            <a:endParaRPr lang="en-US" sz="1400" dirty="0"/>
+          </a:p>
+        </p:txBody>
       </p:sp>
       <p:sp>
         <p:nvSpPr>
@@ -2602,47 +2555,8 @@
         </p:nvSpPr>
         <p:spPr>
           <a:xfrm>
-            <a:off x="822960" y="3813048"/>
-            <a:ext cx="384048" cy="384048"/>
-          </a:xfrm>
-          <a:prstGeom prst="rect">
-            <a:avLst/>
-          </a:prstGeom>
-          <a:noFill/>
-          <a:ln/>
-        </p:spPr>
-        <p:txBody>
-          <a:bodyPr wrap="square" lIns="0" tIns="0" rIns="0" bIns="0" rtlCol="0" anchor="ctr"/>
-          <a:lstStyle/>
-          <a:p>
-            <a:pPr algn="ctr" indent="0" marL="0">
-              <a:buNone/>
-            </a:pPr>
-            <a:r>
-              <a:rPr lang="en-US" sz="1500" b="1" dirty="0">
-                <a:solidFill>
-                  <a:srgbClr val="4A1220"/>
-                </a:solidFill>
-                <a:latin typeface="Cambria" pitchFamily="34" charset="0"/>
-                <a:ea typeface="Cambria" pitchFamily="34" charset="-122"/>
-                <a:cs typeface="Cambria" pitchFamily="34" charset="-120"/>
-              </a:rPr>
-              <a:t>3</a:t>
-            </a:r>
-            <a:endParaRPr lang="en-US" sz="1500" dirty="0"/>
-          </a:p>
-        </p:txBody>
-      </p:sp>
-      <p:sp>
-        <p:nvSpPr>
-          <p:cNvPr id="12" name="Text 10"/>
-          <p:cNvSpPr/>
-          <p:nvPr/>
-        </p:nvSpPr>
-        <p:spPr>
-          <a:xfrm>
-            <a:off x="1536192" y="3758184"/>
-            <a:ext cx="5852160" cy="493776"/>
+            <a:off x="1463040" y="4599432"/>
+            <a:ext cx="5760720" cy="475488"/>
           </a:xfrm>
           <a:prstGeom prst="rect">
             <a:avLst/>
@@ -2660,13 +2574,13 @@
             <a:r>
               <a:rPr lang="en-US" sz="1800" dirty="0">
                 <a:solidFill>
-                  <a:srgbClr val="2B1B14"/>
+                  <a:srgbClr val="F2EEE9"/>
                 </a:solidFill>
                 <a:latin typeface="Calibri" pitchFamily="34" charset="0"/>
                 <a:ea typeface="Calibri" pitchFamily="34" charset="-122"/>
                 <a:cs typeface="Calibri" pitchFamily="34" charset="-120"/>
               </a:rPr>
-              <a:t>Configuración de campañas, píxel y catálogo</a:t>
+              <a:t>Optimización durante todo el mes</a:t>
             </a:r>
             <a:endParaRPr lang="en-US" sz="1800" dirty="0"/>
           </a:p>
@@ -2674,73 +2588,53 @@
       </p:sp>
       <p:sp>
         <p:nvSpPr>
-          <p:cNvPr id="13" name="Shape 11"/>
-          <p:cNvSpPr/>
-          <p:nvPr/>
-        </p:nvSpPr>
-        <p:spPr>
-          <a:xfrm>
-            <a:off x="822960" y="4526280"/>
-            <a:ext cx="384048" cy="384048"/>
-          </a:xfrm>
-          <a:prstGeom prst="ellipse">
-            <a:avLst/>
-          </a:prstGeom>
-          <a:solidFill>
-            <a:srgbClr val="C8963E"/>
-          </a:solidFill>
-          <a:ln/>
-        </p:spPr>
-      </p:sp>
-      <p:sp>
-        <p:nvSpPr>
-          <p:cNvPr id="14" name="Text 12"/>
-          <p:cNvSpPr/>
-          <p:nvPr/>
-        </p:nvSpPr>
-        <p:spPr>
-          <a:xfrm>
-            <a:off x="822960" y="4526280"/>
-            <a:ext cx="384048" cy="384048"/>
-          </a:xfrm>
-          <a:prstGeom prst="rect">
-            <a:avLst/>
-          </a:prstGeom>
-          <a:noFill/>
-          <a:ln/>
-        </p:spPr>
-        <p:txBody>
-          <a:bodyPr wrap="square" lIns="0" tIns="0" rIns="0" bIns="0" rtlCol="0" anchor="ctr"/>
-          <a:lstStyle/>
-          <a:p>
-            <a:pPr algn="ctr" indent="0" marL="0">
-              <a:buNone/>
-            </a:pPr>
-            <a:r>
-              <a:rPr lang="en-US" sz="1500" b="1" dirty="0">
-                <a:solidFill>
-                  <a:srgbClr val="4A1220"/>
-                </a:solidFill>
-                <a:latin typeface="Cambria" pitchFamily="34" charset="0"/>
-                <a:ea typeface="Cambria" pitchFamily="34" charset="-122"/>
-                <a:cs typeface="Cambria" pitchFamily="34" charset="-120"/>
-              </a:rPr>
-              <a:t>4</a:t>
-            </a:r>
-            <a:endParaRPr lang="en-US" sz="1500" dirty="0"/>
-          </a:p>
-        </p:txBody>
-      </p:sp>
-      <p:sp>
-        <p:nvSpPr>
-          <p:cNvPr id="15" name="Text 13"/>
-          <p:cNvSpPr/>
-          <p:nvPr/>
-        </p:nvSpPr>
-        <p:spPr>
-          <a:xfrm>
-            <a:off x="1536192" y="4471416"/>
-            <a:ext cx="5852160" cy="493776"/>
+          <p:cNvPr id="12" name="Text 10"/>
+          <p:cNvSpPr/>
+          <p:nvPr/>
+        </p:nvSpPr>
+        <p:spPr>
+          <a:xfrm>
+            <a:off x="822960" y="5294376"/>
+            <a:ext cx="566928" cy="475488"/>
+          </a:xfrm>
+          <a:prstGeom prst="rect">
+            <a:avLst/>
+          </a:prstGeom>
+          <a:noFill/>
+          <a:ln/>
+        </p:spPr>
+        <p:txBody>
+          <a:bodyPr wrap="square" lIns="0" tIns="0" rIns="0" bIns="0" rtlCol="0" anchor="ctr"/>
+          <a:lstStyle/>
+          <a:p>
+            <a:pPr indent="0" marL="0">
+              <a:buNone/>
+            </a:pPr>
+            <a:r>
+              <a:rPr lang="en-US" sz="1400" b="1" dirty="0">
+                <a:solidFill>
+                  <a:srgbClr val="EF5B25"/>
+                </a:solidFill>
+                <a:latin typeface="Arial" pitchFamily="34" charset="0"/>
+                <a:ea typeface="Arial" pitchFamily="34" charset="-122"/>
+                <a:cs typeface="Arial" pitchFamily="34" charset="-120"/>
+              </a:rPr>
+              <a:t>05</a:t>
+            </a:r>
+            <a:endParaRPr lang="en-US" sz="1400" dirty="0"/>
+          </a:p>
+        </p:txBody>
+      </p:sp>
+      <p:sp>
+        <p:nvSpPr>
+          <p:cNvPr id="13" name="Text 11"/>
+          <p:cNvSpPr/>
+          <p:nvPr/>
+        </p:nvSpPr>
+        <p:spPr>
+          <a:xfrm>
+            <a:off x="1463040" y="5294376"/>
+            <a:ext cx="5760720" cy="475488"/>
           </a:xfrm>
           <a:prstGeom prst="rect">
             <a:avLst/>
@@ -2758,13 +2652,13 @@
             <a:r>
               <a:rPr lang="en-US" sz="1800" dirty="0">
                 <a:solidFill>
-                  <a:srgbClr val="2B1B14"/>
+                  <a:srgbClr val="F2EEE9"/>
                 </a:solidFill>
                 <a:latin typeface="Calibri" pitchFamily="34" charset="0"/>
                 <a:ea typeface="Calibri" pitchFamily="34" charset="-122"/>
                 <a:cs typeface="Calibri" pitchFamily="34" charset="-120"/>
               </a:rPr>
-              <a:t>Optimización durante todo el mes</a:t>
+              <a:t>Reporte mensual con ventas, no con likes</a:t>
             </a:r>
             <a:endParaRPr lang="en-US" sz="1800" dirty="0"/>
           </a:p>
@@ -2772,171 +2666,191 @@
       </p:sp>
       <p:sp>
         <p:nvSpPr>
-          <p:cNvPr id="16" name="Shape 14"/>
-          <p:cNvSpPr/>
-          <p:nvPr/>
-        </p:nvSpPr>
-        <p:spPr>
-          <a:xfrm>
-            <a:off x="822960" y="5239512"/>
-            <a:ext cx="384048" cy="384048"/>
+          <p:cNvPr id="14" name="Text 12"/>
+          <p:cNvSpPr/>
+          <p:nvPr/>
+        </p:nvSpPr>
+        <p:spPr>
+          <a:xfrm>
+            <a:off x="7589520" y="2542032"/>
+            <a:ext cx="3779215" cy="274320"/>
+          </a:xfrm>
+          <a:prstGeom prst="rect">
+            <a:avLst/>
+          </a:prstGeom>
+          <a:noFill/>
+          <a:ln/>
+        </p:spPr>
+        <p:txBody>
+          <a:bodyPr wrap="square" lIns="0" tIns="0" rIns="0" bIns="0" rtlCol="0" anchor="ctr"/>
+          <a:lstStyle/>
+          <a:p>
+            <a:pPr indent="0" marL="0">
+              <a:buNone/>
+            </a:pPr>
+            <a:r>
+              <a:rPr lang="en-US" sz="1050" b="1" spc="250" kern="0" dirty="0">
+                <a:solidFill>
+                  <a:srgbClr val="EF5B25"/>
+                </a:solidFill>
+                <a:latin typeface="Arial" pitchFamily="34" charset="0"/>
+                <a:ea typeface="Arial" pitchFamily="34" charset="-122"/>
+                <a:cs typeface="Arial" pitchFamily="34" charset="-120"/>
+              </a:rPr>
+              <a:t>NO INCLUYE</a:t>
+            </a:r>
+            <a:endParaRPr lang="en-US" sz="1050" dirty="0"/>
+          </a:p>
+        </p:txBody>
+      </p:sp>
+      <p:sp>
+        <p:nvSpPr>
+          <p:cNvPr id="15" name="Shape 13"/>
+          <p:cNvSpPr/>
+          <p:nvPr/>
+        </p:nvSpPr>
+        <p:spPr>
+          <a:xfrm>
+            <a:off x="7589520" y="3236976"/>
+            <a:ext cx="128016" cy="128016"/>
           </a:xfrm>
           <a:prstGeom prst="ellipse">
             <a:avLst/>
           </a:prstGeom>
           <a:solidFill>
-            <a:srgbClr val="C8963E"/>
+            <a:srgbClr val="8A807A"/>
           </a:solidFill>
           <a:ln/>
         </p:spPr>
       </p:sp>
       <p:sp>
         <p:nvSpPr>
-          <p:cNvPr id="17" name="Text 15"/>
-          <p:cNvSpPr/>
-          <p:nvPr/>
-        </p:nvSpPr>
-        <p:spPr>
-          <a:xfrm>
-            <a:off x="822960" y="5239512"/>
-            <a:ext cx="384048" cy="384048"/>
-          </a:xfrm>
-          <a:prstGeom prst="rect">
-            <a:avLst/>
-          </a:prstGeom>
-          <a:noFill/>
-          <a:ln/>
-        </p:spPr>
-        <p:txBody>
-          <a:bodyPr wrap="square" lIns="0" tIns="0" rIns="0" bIns="0" rtlCol="0" anchor="ctr"/>
-          <a:lstStyle/>
-          <a:p>
-            <a:pPr algn="ctr" indent="0" marL="0">
-              <a:buNone/>
-            </a:pPr>
-            <a:r>
-              <a:rPr lang="en-US" sz="1500" b="1" dirty="0">
-                <a:solidFill>
-                  <a:srgbClr val="4A1220"/>
-                </a:solidFill>
-                <a:latin typeface="Cambria" pitchFamily="34" charset="0"/>
-                <a:ea typeface="Cambria" pitchFamily="34" charset="-122"/>
-                <a:cs typeface="Cambria" pitchFamily="34" charset="-120"/>
-              </a:rPr>
-              <a:t>5</a:t>
-            </a:r>
-            <a:endParaRPr lang="en-US" sz="1500" dirty="0"/>
-          </a:p>
-        </p:txBody>
-      </p:sp>
-      <p:sp>
-        <p:nvSpPr>
-          <p:cNvPr id="18" name="Text 16"/>
-          <p:cNvSpPr/>
-          <p:nvPr/>
-        </p:nvSpPr>
-        <p:spPr>
-          <a:xfrm>
-            <a:off x="1536192" y="5184648"/>
-            <a:ext cx="5852160" cy="493776"/>
-          </a:xfrm>
-          <a:prstGeom prst="rect">
-            <a:avLst/>
-          </a:prstGeom>
-          <a:noFill/>
-          <a:ln/>
-        </p:spPr>
-        <p:txBody>
-          <a:bodyPr wrap="square" lIns="0" tIns="0" rIns="0" bIns="0" rtlCol="0" anchor="ctr"/>
-          <a:lstStyle/>
-          <a:p>
-            <a:pPr indent="0" marL="0">
-              <a:buNone/>
-            </a:pPr>
-            <a:r>
-              <a:rPr lang="en-US" sz="1800" dirty="0">
-                <a:solidFill>
-                  <a:srgbClr val="2B1B14"/>
+          <p:cNvPr id="16" name="Text 14"/>
+          <p:cNvSpPr/>
+          <p:nvPr/>
+        </p:nvSpPr>
+        <p:spPr>
+          <a:xfrm>
+            <a:off x="7955280" y="3063240"/>
+            <a:ext cx="3413455" cy="457200"/>
+          </a:xfrm>
+          <a:prstGeom prst="rect">
+            <a:avLst/>
+          </a:prstGeom>
+          <a:noFill/>
+          <a:ln/>
+        </p:spPr>
+        <p:txBody>
+          <a:bodyPr wrap="square" lIns="0" tIns="0" rIns="0" bIns="0" rtlCol="0" anchor="ctr"/>
+          <a:lstStyle/>
+          <a:p>
+            <a:pPr indent="0" marL="0">
+              <a:buNone/>
+            </a:pPr>
+            <a:r>
+              <a:rPr lang="en-US" sz="1600" dirty="0">
+                <a:solidFill>
+                  <a:srgbClr val="8A807A"/>
                 </a:solidFill>
                 <a:latin typeface="Calibri" pitchFamily="34" charset="0"/>
                 <a:ea typeface="Calibri" pitchFamily="34" charset="-122"/>
                 <a:cs typeface="Calibri" pitchFamily="34" charset="-120"/>
               </a:rPr>
-              <a:t>Reporte mensual con ventas, no con likes</a:t>
-            </a:r>
-            <a:endParaRPr lang="en-US" sz="1800" dirty="0"/>
-          </a:p>
-        </p:txBody>
-      </p:sp>
-      <p:sp>
-        <p:nvSpPr>
-          <p:cNvPr id="19" name="Text 17"/>
-          <p:cNvSpPr/>
-          <p:nvPr/>
-        </p:nvSpPr>
-        <p:spPr>
-          <a:xfrm>
-            <a:off x="7452360" y="2359152"/>
-            <a:ext cx="3916375" cy="274320"/>
-          </a:xfrm>
-          <a:prstGeom prst="rect">
-            <a:avLst/>
-          </a:prstGeom>
-          <a:noFill/>
-          <a:ln/>
-        </p:spPr>
-        <p:txBody>
-          <a:bodyPr wrap="square" lIns="0" tIns="0" rIns="0" bIns="0" rtlCol="0" anchor="ctr"/>
-          <a:lstStyle/>
-          <a:p>
-            <a:pPr indent="0" marL="0">
-              <a:buNone/>
-            </a:pPr>
-            <a:r>
-              <a:rPr lang="en-US" sz="1100" b="1" spc="200" kern="0" dirty="0">
-                <a:solidFill>
-                  <a:srgbClr val="8C2F39"/>
+              <a:t>Producción de creativos</a:t>
+            </a:r>
+            <a:endParaRPr lang="en-US" sz="1600" dirty="0"/>
+          </a:p>
+        </p:txBody>
+      </p:sp>
+      <p:sp>
+        <p:nvSpPr>
+          <p:cNvPr id="17" name="Shape 15"/>
+          <p:cNvSpPr/>
+          <p:nvPr/>
+        </p:nvSpPr>
+        <p:spPr>
+          <a:xfrm>
+            <a:off x="7589520" y="3803904"/>
+            <a:ext cx="128016" cy="128016"/>
+          </a:xfrm>
+          <a:prstGeom prst="ellipse">
+            <a:avLst/>
+          </a:prstGeom>
+          <a:solidFill>
+            <a:srgbClr val="8A807A"/>
+          </a:solidFill>
+          <a:ln/>
+        </p:spPr>
+      </p:sp>
+      <p:sp>
+        <p:nvSpPr>
+          <p:cNvPr id="18" name="Text 16"/>
+          <p:cNvSpPr/>
+          <p:nvPr/>
+        </p:nvSpPr>
+        <p:spPr>
+          <a:xfrm>
+            <a:off x="7955280" y="3630168"/>
+            <a:ext cx="3413455" cy="457200"/>
+          </a:xfrm>
+          <a:prstGeom prst="rect">
+            <a:avLst/>
+          </a:prstGeom>
+          <a:noFill/>
+          <a:ln/>
+        </p:spPr>
+        <p:txBody>
+          <a:bodyPr wrap="square" lIns="0" tIns="0" rIns="0" bIns="0" rtlCol="0" anchor="ctr"/>
+          <a:lstStyle/>
+          <a:p>
+            <a:pPr indent="0" marL="0">
+              <a:buNone/>
+            </a:pPr>
+            <a:r>
+              <a:rPr lang="en-US" sz="1600" dirty="0">
+                <a:solidFill>
+                  <a:srgbClr val="8A807A"/>
                 </a:solidFill>
                 <a:latin typeface="Calibri" pitchFamily="34" charset="0"/>
                 <a:ea typeface="Calibri" pitchFamily="34" charset="-122"/>
                 <a:cs typeface="Calibri" pitchFamily="34" charset="-120"/>
               </a:rPr>
-              <a:t>NO INCLUYE</a:t>
-            </a:r>
-            <a:endParaRPr lang="en-US" sz="1100" dirty="0"/>
-          </a:p>
-        </p:txBody>
-      </p:sp>
-      <p:sp>
-        <p:nvSpPr>
-          <p:cNvPr id="20" name="Shape 18"/>
-          <p:cNvSpPr/>
-          <p:nvPr/>
-        </p:nvSpPr>
-        <p:spPr>
-          <a:xfrm>
-            <a:off x="7452360" y="3035808"/>
-            <a:ext cx="146304" cy="146304"/>
+              <a:t>Community management</a:t>
+            </a:r>
+            <a:endParaRPr lang="en-US" sz="1600" dirty="0"/>
+          </a:p>
+        </p:txBody>
+      </p:sp>
+      <p:sp>
+        <p:nvSpPr>
+          <p:cNvPr id="19" name="Shape 17"/>
+          <p:cNvSpPr/>
+          <p:nvPr/>
+        </p:nvSpPr>
+        <p:spPr>
+          <a:xfrm>
+            <a:off x="7589520" y="4370832"/>
+            <a:ext cx="128016" cy="128016"/>
           </a:xfrm>
           <a:prstGeom prst="ellipse">
             <a:avLst/>
           </a:prstGeom>
           <a:solidFill>
-            <a:srgbClr val="D8CCC3"/>
+            <a:srgbClr val="8A807A"/>
           </a:solidFill>
           <a:ln/>
         </p:spPr>
       </p:sp>
       <p:sp>
         <p:nvSpPr>
-          <p:cNvPr id="21" name="Text 19"/>
-          <p:cNvSpPr/>
-          <p:nvPr/>
-        </p:nvSpPr>
-        <p:spPr>
-          <a:xfrm>
-            <a:off x="7836408" y="2880360"/>
-            <a:ext cx="3532327" cy="457200"/>
+          <p:cNvPr id="20" name="Text 18"/>
+          <p:cNvSpPr/>
+          <p:nvPr/>
+        </p:nvSpPr>
+        <p:spPr>
+          <a:xfrm>
+            <a:off x="7955280" y="4197096"/>
+            <a:ext cx="3413455" cy="457200"/>
           </a:xfrm>
           <a:prstGeom prst="rect">
             <a:avLst/>
@@ -2954,125 +2868,7 @@
             <a:r>
               <a:rPr lang="en-US" sz="1600" dirty="0">
                 <a:solidFill>
-                  <a:srgbClr val="7D6A5E"/>
-                </a:solidFill>
-                <a:latin typeface="Calibri" pitchFamily="34" charset="0"/>
-                <a:ea typeface="Calibri" pitchFamily="34" charset="-122"/>
-                <a:cs typeface="Calibri" pitchFamily="34" charset="-120"/>
-              </a:rPr>
-              <a:t>Producción de creativos</a:t>
-            </a:r>
-            <a:endParaRPr lang="en-US" sz="1600" dirty="0"/>
-          </a:p>
-        </p:txBody>
-      </p:sp>
-      <p:sp>
-        <p:nvSpPr>
-          <p:cNvPr id="22" name="Shape 20"/>
-          <p:cNvSpPr/>
-          <p:nvPr/>
-        </p:nvSpPr>
-        <p:spPr>
-          <a:xfrm>
-            <a:off x="7452360" y="3602736"/>
-            <a:ext cx="146304" cy="146304"/>
-          </a:xfrm>
-          <a:prstGeom prst="ellipse">
-            <a:avLst/>
-          </a:prstGeom>
-          <a:solidFill>
-            <a:srgbClr val="D8CCC3"/>
-          </a:solidFill>
-          <a:ln/>
-        </p:spPr>
-      </p:sp>
-      <p:sp>
-        <p:nvSpPr>
-          <p:cNvPr id="23" name="Text 21"/>
-          <p:cNvSpPr/>
-          <p:nvPr/>
-        </p:nvSpPr>
-        <p:spPr>
-          <a:xfrm>
-            <a:off x="7836408" y="3447288"/>
-            <a:ext cx="3532327" cy="457200"/>
-          </a:xfrm>
-          <a:prstGeom prst="rect">
-            <a:avLst/>
-          </a:prstGeom>
-          <a:noFill/>
-          <a:ln/>
-        </p:spPr>
-        <p:txBody>
-          <a:bodyPr wrap="square" lIns="0" tIns="0" rIns="0" bIns="0" rtlCol="0" anchor="ctr"/>
-          <a:lstStyle/>
-          <a:p>
-            <a:pPr indent="0" marL="0">
-              <a:buNone/>
-            </a:pPr>
-            <a:r>
-              <a:rPr lang="en-US" sz="1600" dirty="0">
-                <a:solidFill>
-                  <a:srgbClr val="7D6A5E"/>
-                </a:solidFill>
-                <a:latin typeface="Calibri" pitchFamily="34" charset="0"/>
-                <a:ea typeface="Calibri" pitchFamily="34" charset="-122"/>
-                <a:cs typeface="Calibri" pitchFamily="34" charset="-120"/>
-              </a:rPr>
-              <a:t>Community management</a:t>
-            </a:r>
-            <a:endParaRPr lang="en-US" sz="1600" dirty="0"/>
-          </a:p>
-        </p:txBody>
-      </p:sp>
-      <p:sp>
-        <p:nvSpPr>
-          <p:cNvPr id="24" name="Shape 22"/>
-          <p:cNvSpPr/>
-          <p:nvPr/>
-        </p:nvSpPr>
-        <p:spPr>
-          <a:xfrm>
-            <a:off x="7452360" y="4169664"/>
-            <a:ext cx="146304" cy="146304"/>
-          </a:xfrm>
-          <a:prstGeom prst="ellipse">
-            <a:avLst/>
-          </a:prstGeom>
-          <a:solidFill>
-            <a:srgbClr val="D8CCC3"/>
-          </a:solidFill>
-          <a:ln/>
-        </p:spPr>
-      </p:sp>
-      <p:sp>
-        <p:nvSpPr>
-          <p:cNvPr id="25" name="Text 23"/>
-          <p:cNvSpPr/>
-          <p:nvPr/>
-        </p:nvSpPr>
-        <p:spPr>
-          <a:xfrm>
-            <a:off x="7836408" y="4014216"/>
-            <a:ext cx="3532327" cy="457200"/>
-          </a:xfrm>
-          <a:prstGeom prst="rect">
-            <a:avLst/>
-          </a:prstGeom>
-          <a:noFill/>
-          <a:ln/>
-        </p:spPr>
-        <p:txBody>
-          <a:bodyPr wrap="square" lIns="0" tIns="0" rIns="0" bIns="0" rtlCol="0" anchor="ctr"/>
-          <a:lstStyle/>
-          <a:p>
-            <a:pPr indent="0" marL="0">
-              <a:buNone/>
-            </a:pPr>
-            <a:r>
-              <a:rPr lang="en-US" sz="1600" dirty="0">
-                <a:solidFill>
-                  <a:srgbClr val="7D6A5E"/>
+                  <a:srgbClr val="8A807A"/>
                 </a:solidFill>
                 <a:latin typeface="Calibri" pitchFamily="34" charset="0"/>
                 <a:ea typeface="Calibri" pitchFamily="34" charset="-122"/>
@@ -3098,7 +2894,7 @@
     <p:bg>
       <p:bgPr>
         <a:solidFill>
-          <a:srgbClr val="4A1220"/>
+          <a:srgbClr val="EF5B25"/>
         </a:solidFill>
       </p:bgPr>
     </p:bg>
@@ -3124,7 +2920,7 @@
         </p:nvSpPr>
         <p:spPr>
           <a:xfrm>
-            <a:off x="822960" y="658368"/>
+            <a:off x="822960" y="749808"/>
             <a:ext cx="10545775" cy="274320"/>
           </a:xfrm>
           <a:prstGeom prst="rect">
@@ -3143,130 +2939,169 @@
             <a:r>
               <a:rPr lang="en-US" sz="1100" b="1" spc="250" kern="0" dirty="0">
                 <a:solidFill>
-                  <a:srgbClr val="C8963E"/>
+                  <a:srgbClr val="140C07"/>
+                </a:solidFill>
+                <a:latin typeface="Arial" pitchFamily="34" charset="0"/>
+                <a:ea typeface="Arial" pitchFamily="34" charset="-122"/>
+                <a:cs typeface="Arial" pitchFamily="34" charset="-120"/>
+              </a:rPr>
+              <a:t>03  —  HONORARIO</a:t>
+            </a:r>
+            <a:endParaRPr lang="en-US" sz="1100" dirty="0"/>
+          </a:p>
+        </p:txBody>
+      </p:sp>
+      <p:sp>
+        <p:nvSpPr>
+          <p:cNvPr id="3" name="Text 1"/>
+          <p:cNvSpPr/>
+          <p:nvPr/>
+        </p:nvSpPr>
+        <p:spPr>
+          <a:xfrm>
+            <a:off x="822960" y="1645920"/>
+            <a:ext cx="5852160" cy="1417320"/>
+          </a:xfrm>
+          <a:prstGeom prst="rect">
+            <a:avLst/>
+          </a:prstGeom>
+          <a:noFill/>
+          <a:ln/>
+        </p:spPr>
+        <p:txBody>
+          <a:bodyPr wrap="square" lIns="0" tIns="0" rIns="0" bIns="0" rtlCol="0" anchor="ctr"/>
+          <a:lstStyle/>
+          <a:p>
+            <a:pPr indent="0" marL="0">
+              <a:buNone/>
+            </a:pPr>
+            <a:r>
+              <a:rPr lang="en-US" sz="7800" b="1" dirty="0">
+                <a:solidFill>
+                  <a:srgbClr val="140C07"/>
+                </a:solidFill>
+                <a:latin typeface="Arial" pitchFamily="34" charset="0"/>
+                <a:ea typeface="Arial" pitchFamily="34" charset="-122"/>
+                <a:cs typeface="Arial" pitchFamily="34" charset="-120"/>
+              </a:rPr>
+              <a:t>$350.000</a:t>
+            </a:r>
+            <a:endParaRPr lang="en-US" sz="7800" dirty="0"/>
+          </a:p>
+        </p:txBody>
+      </p:sp>
+      <p:sp>
+        <p:nvSpPr>
+          <p:cNvPr id="4" name="Text 2"/>
+          <p:cNvSpPr/>
+          <p:nvPr/>
+        </p:nvSpPr>
+        <p:spPr>
+          <a:xfrm>
+            <a:off x="822960" y="3090672"/>
+            <a:ext cx="5852160" cy="384048"/>
+          </a:xfrm>
+          <a:prstGeom prst="rect">
+            <a:avLst/>
+          </a:prstGeom>
+          <a:noFill/>
+          <a:ln/>
+        </p:spPr>
+        <p:txBody>
+          <a:bodyPr wrap="square" lIns="0" tIns="0" rIns="0" bIns="0" rtlCol="0" anchor="ctr"/>
+          <a:lstStyle/>
+          <a:p>
+            <a:pPr indent="0" marL="0">
+              <a:buNone/>
+            </a:pPr>
+            <a:r>
+              <a:rPr lang="en-US" sz="2000" dirty="0">
+                <a:solidFill>
+                  <a:srgbClr val="140C07"/>
                 </a:solidFill>
                 <a:latin typeface="Calibri" pitchFamily="34" charset="0"/>
                 <a:ea typeface="Calibri" pitchFamily="34" charset="-122"/>
                 <a:cs typeface="Calibri" pitchFamily="34" charset="-120"/>
               </a:rPr>
-              <a:t>HONORARIO</a:t>
-            </a:r>
-            <a:endParaRPr lang="en-US" sz="1100" dirty="0"/>
-          </a:p>
-        </p:txBody>
-      </p:sp>
-      <p:sp>
-        <p:nvSpPr>
-          <p:cNvPr id="3" name="Text 1"/>
-          <p:cNvSpPr/>
-          <p:nvPr/>
-        </p:nvSpPr>
-        <p:spPr>
-          <a:xfrm>
-            <a:off x="822960" y="1371600"/>
-            <a:ext cx="5669280" cy="1371600"/>
-          </a:xfrm>
-          <a:prstGeom prst="rect">
-            <a:avLst/>
-          </a:prstGeom>
-          <a:noFill/>
-          <a:ln/>
-        </p:spPr>
-        <p:txBody>
-          <a:bodyPr wrap="square" lIns="0" tIns="0" rIns="0" bIns="0" rtlCol="0" anchor="ctr"/>
-          <a:lstStyle/>
-          <a:p>
-            <a:pPr indent="0" marL="0">
-              <a:buNone/>
-            </a:pPr>
-            <a:r>
-              <a:rPr lang="en-US" sz="7600" b="1" dirty="0">
-                <a:solidFill>
-                  <a:srgbClr val="FFFFFF"/>
-                </a:solidFill>
-                <a:latin typeface="Cambria" pitchFamily="34" charset="0"/>
-                <a:ea typeface="Cambria" pitchFamily="34" charset="-122"/>
-                <a:cs typeface="Cambria" pitchFamily="34" charset="-120"/>
-              </a:rPr>
-              <a:t>$350.000</a:t>
-            </a:r>
-            <a:endParaRPr lang="en-US" sz="7600" dirty="0"/>
-          </a:p>
-        </p:txBody>
-      </p:sp>
-      <p:sp>
-        <p:nvSpPr>
-          <p:cNvPr id="4" name="Text 2"/>
-          <p:cNvSpPr/>
-          <p:nvPr/>
-        </p:nvSpPr>
-        <p:spPr>
-          <a:xfrm>
-            <a:off x="822960" y="2761488"/>
-            <a:ext cx="5669280" cy="384048"/>
-          </a:xfrm>
-          <a:prstGeom prst="rect">
-            <a:avLst/>
-          </a:prstGeom>
-          <a:noFill/>
-          <a:ln/>
-        </p:spPr>
-        <p:txBody>
-          <a:bodyPr wrap="square" lIns="0" tIns="0" rIns="0" bIns="0" rtlCol="0" anchor="ctr"/>
-          <a:lstStyle/>
-          <a:p>
-            <a:pPr indent="0" marL="0">
-              <a:buNone/>
-            </a:pPr>
-            <a:r>
-              <a:rPr lang="en-US" sz="1900" dirty="0">
-                <a:solidFill>
-                  <a:srgbClr val="C4AEA1"/>
+              <a:t>líquidos al mes</a:t>
+            </a:r>
+            <a:endParaRPr lang="en-US" sz="2000" dirty="0"/>
+          </a:p>
+        </p:txBody>
+      </p:sp>
+      <p:sp>
+        <p:nvSpPr>
+          <p:cNvPr id="5" name="Text 3"/>
+          <p:cNvSpPr/>
+          <p:nvPr/>
+        </p:nvSpPr>
+        <p:spPr>
+          <a:xfrm>
+            <a:off x="822960" y="4069080"/>
+            <a:ext cx="3108960" cy="384048"/>
+          </a:xfrm>
+          <a:prstGeom prst="rect">
+            <a:avLst/>
+          </a:prstGeom>
+          <a:noFill/>
+          <a:ln/>
+        </p:spPr>
+        <p:txBody>
+          <a:bodyPr wrap="square" lIns="0" tIns="0" rIns="0" bIns="0" rtlCol="0" anchor="ctr"/>
+          <a:lstStyle/>
+          <a:p>
+            <a:pPr indent="0" marL="0">
+              <a:buNone/>
+            </a:pPr>
+            <a:r>
+              <a:rPr lang="en-US" sz="1400" dirty="0">
+                <a:solidFill>
+                  <a:srgbClr val="140C07"/>
                 </a:solidFill>
                 <a:latin typeface="Calibri" pitchFamily="34" charset="0"/>
                 <a:ea typeface="Calibri" pitchFamily="34" charset="-122"/>
                 <a:cs typeface="Calibri" pitchFamily="34" charset="-120"/>
               </a:rPr>
-              <a:t>líquidos al mes</a:t>
-            </a:r>
-            <a:endParaRPr lang="en-US" sz="1900" dirty="0"/>
-          </a:p>
-        </p:txBody>
-      </p:sp>
-      <p:sp>
-        <p:nvSpPr>
-          <p:cNvPr id="5" name="Text 3"/>
-          <p:cNvSpPr/>
-          <p:nvPr/>
-        </p:nvSpPr>
-        <p:spPr>
-          <a:xfrm>
-            <a:off x="822960" y="3703320"/>
-            <a:ext cx="3108960" cy="384048"/>
-          </a:xfrm>
-          <a:prstGeom prst="rect">
-            <a:avLst/>
-          </a:prstGeom>
-          <a:noFill/>
-          <a:ln/>
-        </p:spPr>
-        <p:txBody>
-          <a:bodyPr wrap="square" lIns="0" tIns="0" rIns="0" bIns="0" rtlCol="0" anchor="ctr"/>
-          <a:lstStyle/>
-          <a:p>
-            <a:pPr indent="0" marL="0">
+              <a:t>Honorario bruto</a:t>
+            </a:r>
+            <a:endParaRPr lang="en-US" sz="1400" dirty="0"/>
+          </a:p>
+        </p:txBody>
+      </p:sp>
+      <p:sp>
+        <p:nvSpPr>
+          <p:cNvPr id="6" name="Text 4"/>
+          <p:cNvSpPr/>
+          <p:nvPr/>
+        </p:nvSpPr>
+        <p:spPr>
+          <a:xfrm>
+            <a:off x="3931920" y="4069080"/>
+            <a:ext cx="2011680" cy="384048"/>
+          </a:xfrm>
+          <a:prstGeom prst="rect">
+            <a:avLst/>
+          </a:prstGeom>
+          <a:noFill/>
+          <a:ln/>
+        </p:spPr>
+        <p:txBody>
+          <a:bodyPr wrap="square" lIns="0" tIns="0" rIns="0" bIns="0" rtlCol="0" anchor="ctr"/>
+          <a:lstStyle/>
+          <a:p>
+            <a:pPr algn="r" indent="0" marL="0">
               <a:buNone/>
             </a:pPr>
             <a:r>
               <a:rPr lang="en-US" sz="1400" dirty="0">
                 <a:solidFill>
-                  <a:srgbClr val="C4AEA1"/>
+                  <a:srgbClr val="140C07"/>
                 </a:solidFill>
                 <a:latin typeface="Calibri" pitchFamily="34" charset="0"/>
                 <a:ea typeface="Calibri" pitchFamily="34" charset="-122"/>
                 <a:cs typeface="Calibri" pitchFamily="34" charset="-120"/>
               </a:rPr>
-              <a:t>Honorario bruto</a:t>
+              <a:t>$412.979</a:t>
             </a:r>
             <a:endParaRPr lang="en-US" sz="1400" dirty="0"/>
           </a:p>
@@ -3274,38 +3109,38 @@
       </p:sp>
       <p:sp>
         <p:nvSpPr>
-          <p:cNvPr id="6" name="Text 4"/>
-          <p:cNvSpPr/>
-          <p:nvPr/>
-        </p:nvSpPr>
-        <p:spPr>
-          <a:xfrm>
-            <a:off x="3931920" y="3703320"/>
-            <a:ext cx="2011680" cy="384048"/>
-          </a:xfrm>
-          <a:prstGeom prst="rect">
-            <a:avLst/>
-          </a:prstGeom>
-          <a:noFill/>
-          <a:ln/>
-        </p:spPr>
-        <p:txBody>
-          <a:bodyPr wrap="square" lIns="0" tIns="0" rIns="0" bIns="0" rtlCol="0" anchor="ctr"/>
-          <a:lstStyle/>
-          <a:p>
-            <a:pPr algn="r" indent="0" marL="0">
+          <p:cNvPr id="7" name="Text 5"/>
+          <p:cNvSpPr/>
+          <p:nvPr/>
+        </p:nvSpPr>
+        <p:spPr>
+          <a:xfrm>
+            <a:off x="822960" y="4544568"/>
+            <a:ext cx="3108960" cy="384048"/>
+          </a:xfrm>
+          <a:prstGeom prst="rect">
+            <a:avLst/>
+          </a:prstGeom>
+          <a:noFill/>
+          <a:ln/>
+        </p:spPr>
+        <p:txBody>
+          <a:bodyPr wrap="square" lIns="0" tIns="0" rIns="0" bIns="0" rtlCol="0" anchor="ctr"/>
+          <a:lstStyle/>
+          <a:p>
+            <a:pPr indent="0" marL="0">
               <a:buNone/>
             </a:pPr>
             <a:r>
               <a:rPr lang="en-US" sz="1400" dirty="0">
                 <a:solidFill>
-                  <a:srgbClr val="C4AEA1"/>
+                  <a:srgbClr val="140C07"/>
                 </a:solidFill>
                 <a:latin typeface="Calibri" pitchFamily="34" charset="0"/>
                 <a:ea typeface="Calibri" pitchFamily="34" charset="-122"/>
                 <a:cs typeface="Calibri" pitchFamily="34" charset="-120"/>
               </a:rPr>
-              <a:t>$412.979</a:t>
+              <a:t>Retención 15,25%</a:t>
             </a:r>
             <a:endParaRPr lang="en-US" sz="1400" dirty="0"/>
           </a:p>
@@ -3313,38 +3148,38 @@
       </p:sp>
       <p:sp>
         <p:nvSpPr>
-          <p:cNvPr id="7" name="Text 5"/>
-          <p:cNvSpPr/>
-          <p:nvPr/>
-        </p:nvSpPr>
-        <p:spPr>
-          <a:xfrm>
-            <a:off x="822960" y="4160520"/>
-            <a:ext cx="3108960" cy="384048"/>
-          </a:xfrm>
-          <a:prstGeom prst="rect">
-            <a:avLst/>
-          </a:prstGeom>
-          <a:noFill/>
-          <a:ln/>
-        </p:spPr>
-        <p:txBody>
-          <a:bodyPr wrap="square" lIns="0" tIns="0" rIns="0" bIns="0" rtlCol="0" anchor="ctr"/>
-          <a:lstStyle/>
-          <a:p>
-            <a:pPr indent="0" marL="0">
+          <p:cNvPr id="8" name="Text 6"/>
+          <p:cNvSpPr/>
+          <p:nvPr/>
+        </p:nvSpPr>
+        <p:spPr>
+          <a:xfrm>
+            <a:off x="3931920" y="4544568"/>
+            <a:ext cx="2011680" cy="384048"/>
+          </a:xfrm>
+          <a:prstGeom prst="rect">
+            <a:avLst/>
+          </a:prstGeom>
+          <a:noFill/>
+          <a:ln/>
+        </p:spPr>
+        <p:txBody>
+          <a:bodyPr wrap="square" lIns="0" tIns="0" rIns="0" bIns="0" rtlCol="0" anchor="ctr"/>
+          <a:lstStyle/>
+          <a:p>
+            <a:pPr algn="r" indent="0" marL="0">
               <a:buNone/>
             </a:pPr>
             <a:r>
               <a:rPr lang="en-US" sz="1400" dirty="0">
                 <a:solidFill>
-                  <a:srgbClr val="C4AEA1"/>
+                  <a:srgbClr val="140C07"/>
                 </a:solidFill>
                 <a:latin typeface="Calibri" pitchFamily="34" charset="0"/>
                 <a:ea typeface="Calibri" pitchFamily="34" charset="-122"/>
                 <a:cs typeface="Calibri" pitchFamily="34" charset="-120"/>
               </a:rPr>
-              <a:t>Retención 15,25%</a:t>
+              <a:t>– $62.979</a:t>
             </a:r>
             <a:endParaRPr lang="en-US" sz="1400" dirty="0"/>
           </a:p>
@@ -3352,38 +3187,38 @@
       </p:sp>
       <p:sp>
         <p:nvSpPr>
-          <p:cNvPr id="8" name="Text 6"/>
-          <p:cNvSpPr/>
-          <p:nvPr/>
-        </p:nvSpPr>
-        <p:spPr>
-          <a:xfrm>
-            <a:off x="3931920" y="4160520"/>
-            <a:ext cx="2011680" cy="384048"/>
-          </a:xfrm>
-          <a:prstGeom prst="rect">
-            <a:avLst/>
-          </a:prstGeom>
-          <a:noFill/>
-          <a:ln/>
-        </p:spPr>
-        <p:txBody>
-          <a:bodyPr wrap="square" lIns="0" tIns="0" rIns="0" bIns="0" rtlCol="0" anchor="ctr"/>
-          <a:lstStyle/>
-          <a:p>
-            <a:pPr algn="r" indent="0" marL="0">
-              <a:buNone/>
-            </a:pPr>
-            <a:r>
-              <a:rPr lang="en-US" sz="1400" dirty="0">
-                <a:solidFill>
-                  <a:srgbClr val="C4AEA1"/>
+          <p:cNvPr id="9" name="Text 7"/>
+          <p:cNvSpPr/>
+          <p:nvPr/>
+        </p:nvSpPr>
+        <p:spPr>
+          <a:xfrm>
+            <a:off x="822960" y="5020056"/>
+            <a:ext cx="3108960" cy="384048"/>
+          </a:xfrm>
+          <a:prstGeom prst="rect">
+            <a:avLst/>
+          </a:prstGeom>
+          <a:noFill/>
+          <a:ln/>
+        </p:spPr>
+        <p:txBody>
+          <a:bodyPr wrap="square" lIns="0" tIns="0" rIns="0" bIns="0" rtlCol="0" anchor="ctr"/>
+          <a:lstStyle/>
+          <a:p>
+            <a:pPr indent="0" marL="0">
+              <a:buNone/>
+            </a:pPr>
+            <a:r>
+              <a:rPr lang="en-US" sz="1400" b="1" dirty="0">
+                <a:solidFill>
+                  <a:srgbClr val="140C07"/>
                 </a:solidFill>
                 <a:latin typeface="Calibri" pitchFamily="34" charset="0"/>
                 <a:ea typeface="Calibri" pitchFamily="34" charset="-122"/>
                 <a:cs typeface="Calibri" pitchFamily="34" charset="-120"/>
               </a:rPr>
-              <a:t>– $62.979</a:t>
+              <a:t>Lo que recibo</a:t>
             </a:r>
             <a:endParaRPr lang="en-US" sz="1400" dirty="0"/>
           </a:p>
@@ -3391,38 +3226,38 @@
       </p:sp>
       <p:sp>
         <p:nvSpPr>
-          <p:cNvPr id="9" name="Text 7"/>
-          <p:cNvSpPr/>
-          <p:nvPr/>
-        </p:nvSpPr>
-        <p:spPr>
-          <a:xfrm>
-            <a:off x="822960" y="4617720"/>
-            <a:ext cx="3108960" cy="384048"/>
-          </a:xfrm>
-          <a:prstGeom prst="rect">
-            <a:avLst/>
-          </a:prstGeom>
-          <a:noFill/>
-          <a:ln/>
-        </p:spPr>
-        <p:txBody>
-          <a:bodyPr wrap="square" lIns="0" tIns="0" rIns="0" bIns="0" rtlCol="0" anchor="ctr"/>
-          <a:lstStyle/>
-          <a:p>
-            <a:pPr indent="0" marL="0">
+          <p:cNvPr id="10" name="Text 8"/>
+          <p:cNvSpPr/>
+          <p:nvPr/>
+        </p:nvSpPr>
+        <p:spPr>
+          <a:xfrm>
+            <a:off x="3931920" y="5020056"/>
+            <a:ext cx="2011680" cy="384048"/>
+          </a:xfrm>
+          <a:prstGeom prst="rect">
+            <a:avLst/>
+          </a:prstGeom>
+          <a:noFill/>
+          <a:ln/>
+        </p:spPr>
+        <p:txBody>
+          <a:bodyPr wrap="square" lIns="0" tIns="0" rIns="0" bIns="0" rtlCol="0" anchor="ctr"/>
+          <a:lstStyle/>
+          <a:p>
+            <a:pPr algn="r" indent="0" marL="0">
               <a:buNone/>
             </a:pPr>
             <a:r>
               <a:rPr lang="en-US" sz="1400" b="1" dirty="0">
                 <a:solidFill>
-                  <a:srgbClr val="F6F1EA"/>
+                  <a:srgbClr val="140C07"/>
                 </a:solidFill>
                 <a:latin typeface="Calibri" pitchFamily="34" charset="0"/>
                 <a:ea typeface="Calibri" pitchFamily="34" charset="-122"/>
                 <a:cs typeface="Calibri" pitchFamily="34" charset="-120"/>
               </a:rPr>
-              <a:t>Lo que recibo</a:t>
+              <a:t>$350.000</a:t>
             </a:r>
             <a:endParaRPr lang="en-US" sz="1400" dirty="0"/>
           </a:p>
@@ -3430,79 +3265,40 @@
       </p:sp>
       <p:sp>
         <p:nvSpPr>
-          <p:cNvPr id="10" name="Text 8"/>
-          <p:cNvSpPr/>
-          <p:nvPr/>
-        </p:nvSpPr>
-        <p:spPr>
-          <a:xfrm>
-            <a:off x="3931920" y="4617720"/>
-            <a:ext cx="2011680" cy="384048"/>
-          </a:xfrm>
-          <a:prstGeom prst="rect">
-            <a:avLst/>
-          </a:prstGeom>
-          <a:noFill/>
-          <a:ln/>
-        </p:spPr>
-        <p:txBody>
-          <a:bodyPr wrap="square" lIns="0" tIns="0" rIns="0" bIns="0" rtlCol="0" anchor="ctr"/>
-          <a:lstStyle/>
-          <a:p>
-            <a:pPr algn="r" indent="0" marL="0">
-              <a:buNone/>
-            </a:pPr>
-            <a:r>
-              <a:rPr lang="en-US" sz="1400" b="1" dirty="0">
-                <a:solidFill>
-                  <a:srgbClr val="C8963E"/>
+          <p:cNvPr id="11" name="Text 9"/>
+          <p:cNvSpPr/>
+          <p:nvPr/>
+        </p:nvSpPr>
+        <p:spPr>
+          <a:xfrm>
+            <a:off x="822960" y="5596128"/>
+            <a:ext cx="5852160" cy="310896"/>
+          </a:xfrm>
+          <a:prstGeom prst="rect">
+            <a:avLst/>
+          </a:prstGeom>
+          <a:noFill/>
+          <a:ln/>
+        </p:spPr>
+        <p:txBody>
+          <a:bodyPr wrap="square" lIns="0" tIns="0" rIns="0" bIns="0" rtlCol="0" anchor="ctr"/>
+          <a:lstStyle/>
+          <a:p>
+            <a:pPr indent="0" marL="0">
+              <a:buNone/>
+            </a:pPr>
+            <a:r>
+              <a:rPr lang="en-US" sz="1250" i="1" dirty="0">
+                <a:solidFill>
+                  <a:srgbClr val="140C07"/>
                 </a:solidFill>
                 <a:latin typeface="Calibri" pitchFamily="34" charset="0"/>
                 <a:ea typeface="Calibri" pitchFamily="34" charset="-122"/>
                 <a:cs typeface="Calibri" pitchFamily="34" charset="-120"/>
               </a:rPr>
-              <a:t>$350.000</a:t>
-            </a:r>
-            <a:endParaRPr lang="en-US" sz="1400" dirty="0"/>
-          </a:p>
-        </p:txBody>
-      </p:sp>
-      <p:sp>
-        <p:nvSpPr>
-          <p:cNvPr id="11" name="Text 9"/>
-          <p:cNvSpPr/>
-          <p:nvPr/>
-        </p:nvSpPr>
-        <p:spPr>
-          <a:xfrm>
-            <a:off x="822960" y="5175504"/>
-            <a:ext cx="5669280" cy="310896"/>
-          </a:xfrm>
-          <a:prstGeom prst="rect">
-            <a:avLst/>
-          </a:prstGeom>
-          <a:noFill/>
-          <a:ln/>
-        </p:spPr>
-        <p:txBody>
-          <a:bodyPr wrap="square" lIns="0" tIns="0" rIns="0" bIns="0" rtlCol="0" anchor="ctr"/>
-          <a:lstStyle/>
-          <a:p>
-            <a:pPr indent="0" marL="0">
-              <a:buNone/>
-            </a:pPr>
-            <a:r>
-              <a:rPr lang="en-US" sz="1200" i="1" dirty="0">
-                <a:solidFill>
-                  <a:srgbClr val="9C8377"/>
-                </a:solidFill>
-                <a:latin typeface="Calibri" pitchFamily="34" charset="0"/>
-                <a:ea typeface="Calibri" pitchFamily="34" charset="-122"/>
-                <a:cs typeface="Calibri" pitchFamily="34" charset="-120"/>
-              </a:rPr>
               <a:t>Boleta de honorarios. La retención la declara PobreVermut.</a:t>
             </a:r>
-            <a:endParaRPr lang="en-US" sz="1200" dirty="0"/>
+            <a:endParaRPr lang="en-US" sz="1250" dirty="0"/>
           </a:p>
         </p:txBody>
       </p:sp>
@@ -3514,34 +3310,34 @@
         </p:nvSpPr>
         <p:spPr>
           <a:xfrm>
-            <a:off x="6903720" y="1600200"/>
-            <a:ext cx="4465015" cy="274320"/>
-          </a:xfrm>
-          <a:prstGeom prst="rect">
-            <a:avLst/>
-          </a:prstGeom>
-          <a:noFill/>
-          <a:ln/>
-        </p:spPr>
-        <p:txBody>
-          <a:bodyPr wrap="square" lIns="0" tIns="0" rIns="0" bIns="0" rtlCol="0" anchor="ctr"/>
-          <a:lstStyle/>
-          <a:p>
-            <a:pPr indent="0" marL="0">
-              <a:buNone/>
-            </a:pPr>
-            <a:r>
-              <a:rPr lang="en-US" sz="1100" b="1" spc="150" kern="0" dirty="0">
-                <a:solidFill>
-                  <a:srgbClr val="C8963E"/>
-                </a:solidFill>
-                <a:latin typeface="Calibri" pitchFamily="34" charset="0"/>
-                <a:ea typeface="Calibri" pitchFamily="34" charset="-122"/>
-                <a:cs typeface="Calibri" pitchFamily="34" charset="-120"/>
+            <a:off x="7086600" y="1783080"/>
+            <a:ext cx="4282135" cy="274320"/>
+          </a:xfrm>
+          <a:prstGeom prst="rect">
+            <a:avLst/>
+          </a:prstGeom>
+          <a:noFill/>
+          <a:ln/>
+        </p:spPr>
+        <p:txBody>
+          <a:bodyPr wrap="square" lIns="0" tIns="0" rIns="0" bIns="0" rtlCol="0" anchor="ctr"/>
+          <a:lstStyle/>
+          <a:p>
+            <a:pPr indent="0" marL="0">
+              <a:buNone/>
+            </a:pPr>
+            <a:r>
+              <a:rPr lang="en-US" sz="1050" b="1" spc="200" kern="0" dirty="0">
+                <a:solidFill>
+                  <a:srgbClr val="140C07"/>
+                </a:solidFill>
+                <a:latin typeface="Arial" pitchFamily="34" charset="0"/>
+                <a:ea typeface="Arial" pitchFamily="34" charset="-122"/>
+                <a:cs typeface="Arial" pitchFamily="34" charset="-120"/>
               </a:rPr>
               <a:t>LA PAUTA VA APARTE</a:t>
             </a:r>
-            <a:endParaRPr lang="en-US" sz="1100" dirty="0"/>
+            <a:endParaRPr lang="en-US" sz="1050" dirty="0"/>
           </a:p>
         </p:txBody>
       </p:sp>
@@ -3553,8 +3349,8 @@
         </p:nvSpPr>
         <p:spPr>
           <a:xfrm>
-            <a:off x="6903720" y="1984248"/>
-            <a:ext cx="4465015" cy="1280160"/>
+            <a:off x="7086600" y="2185416"/>
+            <a:ext cx="4282135" cy="1371600"/>
           </a:xfrm>
           <a:prstGeom prst="rect">
             <a:avLst/>
@@ -3568,22 +3364,22 @@
           <a:p>
             <a:pPr indent="0" marL="0">
               <a:lnSpc>
-                <a:spcPct val="115000"/>
+                <a:spcPct val="118000"/>
               </a:lnSpc>
               <a:buNone/>
             </a:pPr>
             <a:r>
-              <a:rPr lang="en-US" sz="2000" dirty="0">
-                <a:solidFill>
-                  <a:srgbClr val="FFFFFF"/>
-                </a:solidFill>
-                <a:latin typeface="Cambria" pitchFamily="34" charset="0"/>
-                <a:ea typeface="Cambria" pitchFamily="34" charset="-122"/>
-                <a:cs typeface="Cambria" pitchFamily="34" charset="-120"/>
+              <a:rPr lang="en-US" sz="1900" b="1" dirty="0">
+                <a:solidFill>
+                  <a:srgbClr val="140C07"/>
+                </a:solidFill>
+                <a:latin typeface="Arial" pitchFamily="34" charset="0"/>
+                <a:ea typeface="Arial" pitchFamily="34" charset="-122"/>
+                <a:cs typeface="Arial" pitchFamily="34" charset="-120"/>
               </a:rPr>
               <a:t>Entre $200.000 y $450.000 al mes según la fase, a nombre de PobreVermut.</a:t>
             </a:r>
-            <a:endParaRPr lang="en-US" sz="2000" dirty="0"/>
+            <a:endParaRPr lang="en-US" sz="1900" dirty="0"/>
           </a:p>
         </p:txBody>
       </p:sp>
@@ -3595,34 +3391,34 @@
         </p:nvSpPr>
         <p:spPr>
           <a:xfrm>
-            <a:off x="6903720" y="3566160"/>
-            <a:ext cx="4465015" cy="274320"/>
-          </a:xfrm>
-          <a:prstGeom prst="rect">
-            <a:avLst/>
-          </a:prstGeom>
-          <a:noFill/>
-          <a:ln/>
-        </p:spPr>
-        <p:txBody>
-          <a:bodyPr wrap="square" lIns="0" tIns="0" rIns="0" bIns="0" rtlCol="0" anchor="ctr"/>
-          <a:lstStyle/>
-          <a:p>
-            <a:pPr indent="0" marL="0">
-              <a:buNone/>
-            </a:pPr>
-            <a:r>
-              <a:rPr lang="en-US" sz="1100" b="1" spc="150" kern="0" dirty="0">
-                <a:solidFill>
-                  <a:srgbClr val="C8963E"/>
-                </a:solidFill>
-                <a:latin typeface="Calibri" pitchFamily="34" charset="0"/>
-                <a:ea typeface="Calibri" pitchFamily="34" charset="-122"/>
-                <a:cs typeface="Calibri" pitchFamily="34" charset="-120"/>
+            <a:off x="7086600" y="4160520"/>
+            <a:ext cx="4282135" cy="274320"/>
+          </a:xfrm>
+          <a:prstGeom prst="rect">
+            <a:avLst/>
+          </a:prstGeom>
+          <a:noFill/>
+          <a:ln/>
+        </p:spPr>
+        <p:txBody>
+          <a:bodyPr wrap="square" lIns="0" tIns="0" rIns="0" bIns="0" rtlCol="0" anchor="ctr"/>
+          <a:lstStyle/>
+          <a:p>
+            <a:pPr indent="0" marL="0">
+              <a:buNone/>
+            </a:pPr>
+            <a:r>
+              <a:rPr lang="en-US" sz="1050" b="1" spc="200" kern="0" dirty="0">
+                <a:solidFill>
+                  <a:srgbClr val="140C07"/>
+                </a:solidFill>
+                <a:latin typeface="Arial" pitchFamily="34" charset="0"/>
+                <a:ea typeface="Arial" pitchFamily="34" charset="-122"/>
+                <a:cs typeface="Arial" pitchFamily="34" charset="-120"/>
               </a:rPr>
               <a:t>LOS PRIMEROS 3 MESES, FIJO</a:t>
             </a:r>
-            <a:endParaRPr lang="en-US" sz="1100" dirty="0"/>
+            <a:endParaRPr lang="en-US" sz="1050" dirty="0"/>
           </a:p>
         </p:txBody>
       </p:sp>
@@ -3634,8 +3430,8 @@
         </p:nvSpPr>
         <p:spPr>
           <a:xfrm>
-            <a:off x="6903720" y="3950208"/>
-            <a:ext cx="4465015" cy="1280160"/>
+            <a:off x="7086600" y="4562856"/>
+            <a:ext cx="4282135" cy="1371600"/>
           </a:xfrm>
           <a:prstGeom prst="rect">
             <a:avLst/>
@@ -3649,22 +3445,22 @@
           <a:p>
             <a:pPr indent="0" marL="0">
               <a:lnSpc>
-                <a:spcPct val="115000"/>
+                <a:spcPct val="118000"/>
               </a:lnSpc>
               <a:buNone/>
             </a:pPr>
             <a:r>
-              <a:rPr lang="en-US" sz="2000" dirty="0">
-                <a:solidFill>
-                  <a:srgbClr val="FFFFFF"/>
-                </a:solidFill>
-                <a:latin typeface="Cambria" pitchFamily="34" charset="0"/>
-                <a:ea typeface="Cambria" pitchFamily="34" charset="-122"/>
-                <a:cs typeface="Cambria" pitchFamily="34" charset="-120"/>
+              <a:rPr lang="en-US" sz="1900" b="1" dirty="0">
+                <a:solidFill>
+                  <a:srgbClr val="140C07"/>
+                </a:solidFill>
+                <a:latin typeface="Arial" pitchFamily="34" charset="0"/>
+                <a:ea typeface="Arial" pitchFamily="34" charset="-122"/>
+                <a:cs typeface="Arial" pitchFamily="34" charset="-120"/>
               </a:rPr>
               <a:t>Al mes 3 revisamos el modelo y evaluamos sumar un variable sobre las ventas del ecommerce.</a:t>
             </a:r>
-            <a:endParaRPr lang="en-US" sz="2000" dirty="0"/>
+            <a:endParaRPr lang="en-US" sz="1900" dirty="0"/>
           </a:p>
         </p:txBody>
       </p:sp>
@@ -3682,7 +3478,7 @@
     <p:bg>
       <p:bgPr>
         <a:solidFill>
-          <a:srgbClr val="FFFFFF"/>
+          <a:srgbClr val="0F0E0D"/>
         </a:solidFill>
       </p:bgPr>
     </p:bg>
@@ -3708,7 +3504,7 @@
         </p:nvSpPr>
         <p:spPr>
           <a:xfrm>
-            <a:off x="822960" y="658368"/>
+            <a:off x="822960" y="749808"/>
             <a:ext cx="10545775" cy="274320"/>
           </a:xfrm>
           <a:prstGeom prst="rect">
@@ -3727,87 +3523,146 @@
             <a:r>
               <a:rPr lang="en-US" sz="1100" b="1" spc="250" kern="0" dirty="0">
                 <a:solidFill>
-                  <a:srgbClr val="C8963E"/>
+                  <a:srgbClr val="EF5B25"/>
+                </a:solidFill>
+                <a:latin typeface="Arial" pitchFamily="34" charset="0"/>
+                <a:ea typeface="Arial" pitchFamily="34" charset="-122"/>
+                <a:cs typeface="Arial" pitchFamily="34" charset="-120"/>
+              </a:rPr>
+              <a:t>04  —  PARA PARTIR</a:t>
+            </a:r>
+            <a:endParaRPr lang="en-US" sz="1100" dirty="0"/>
+          </a:p>
+        </p:txBody>
+      </p:sp>
+      <p:sp>
+        <p:nvSpPr>
+          <p:cNvPr id="3" name="Text 1"/>
+          <p:cNvSpPr/>
+          <p:nvPr/>
+        </p:nvSpPr>
+        <p:spPr>
+          <a:xfrm>
+            <a:off x="822960" y="1133856"/>
+            <a:ext cx="10545775" cy="731520"/>
+          </a:xfrm>
+          <a:prstGeom prst="rect">
+            <a:avLst/>
+          </a:prstGeom>
+          <a:noFill/>
+          <a:ln/>
+        </p:spPr>
+        <p:txBody>
+          <a:bodyPr wrap="square" lIns="0" tIns="0" rIns="0" bIns="0" rtlCol="0" anchor="ctr"/>
+          <a:lstStyle/>
+          <a:p>
+            <a:pPr indent="0" marL="0">
+              <a:buNone/>
+            </a:pPr>
+            <a:r>
+              <a:rPr lang="en-US" sz="3800" b="1" dirty="0">
+                <a:solidFill>
+                  <a:srgbClr val="F2EEE9"/>
+                </a:solidFill>
+                <a:latin typeface="Arial" pitchFamily="34" charset="0"/>
+                <a:ea typeface="Arial" pitchFamily="34" charset="-122"/>
+                <a:cs typeface="Arial" pitchFamily="34" charset="-120"/>
+              </a:rPr>
+              <a:t>Qué necesito</a:t>
+            </a:r>
+            <a:endParaRPr lang="en-US" sz="3800" dirty="0"/>
+          </a:p>
+        </p:txBody>
+      </p:sp>
+      <p:sp>
+        <p:nvSpPr>
+          <p:cNvPr id="4" name="Shape 2"/>
+          <p:cNvSpPr/>
+          <p:nvPr/>
+        </p:nvSpPr>
+        <p:spPr>
+          <a:xfrm>
+            <a:off x="822960" y="2688336"/>
+            <a:ext cx="146304" cy="146304"/>
+          </a:xfrm>
+          <a:prstGeom prst="ellipse">
+            <a:avLst/>
+          </a:prstGeom>
+          <a:solidFill>
+            <a:srgbClr val="EF5B25"/>
+          </a:solidFill>
+          <a:ln/>
+        </p:spPr>
+      </p:sp>
+      <p:sp>
+        <p:nvSpPr>
+          <p:cNvPr id="5" name="Text 3"/>
+          <p:cNvSpPr/>
+          <p:nvPr/>
+        </p:nvSpPr>
+        <p:spPr>
+          <a:xfrm>
+            <a:off x="1261872" y="2514600"/>
+            <a:ext cx="5943600" cy="475488"/>
+          </a:xfrm>
+          <a:prstGeom prst="rect">
+            <a:avLst/>
+          </a:prstGeom>
+          <a:noFill/>
+          <a:ln/>
+        </p:spPr>
+        <p:txBody>
+          <a:bodyPr wrap="square" lIns="0" tIns="0" rIns="0" bIns="0" rtlCol="0" anchor="ctr"/>
+          <a:lstStyle/>
+          <a:p>
+            <a:pPr indent="0" marL="0">
+              <a:buNone/>
+            </a:pPr>
+            <a:r>
+              <a:rPr lang="en-US" sz="1700" dirty="0">
+                <a:solidFill>
+                  <a:srgbClr val="F2EEE9"/>
                 </a:solidFill>
                 <a:latin typeface="Calibri" pitchFamily="34" charset="0"/>
                 <a:ea typeface="Calibri" pitchFamily="34" charset="-122"/>
                 <a:cs typeface="Calibri" pitchFamily="34" charset="-120"/>
               </a:rPr>
-              <a:t>PARA PARTIR</a:t>
-            </a:r>
-            <a:endParaRPr lang="en-US" sz="1100" dirty="0"/>
-          </a:p>
-        </p:txBody>
-      </p:sp>
-      <p:sp>
-        <p:nvSpPr>
-          <p:cNvPr id="3" name="Text 1"/>
-          <p:cNvSpPr/>
-          <p:nvPr/>
-        </p:nvSpPr>
-        <p:spPr>
-          <a:xfrm>
-            <a:off x="822960" y="987552"/>
-            <a:ext cx="10545775" cy="658368"/>
-          </a:xfrm>
-          <a:prstGeom prst="rect">
-            <a:avLst/>
-          </a:prstGeom>
-          <a:noFill/>
-          <a:ln/>
-        </p:spPr>
-        <p:txBody>
-          <a:bodyPr wrap="square" lIns="0" tIns="0" rIns="0" bIns="0" rtlCol="0" anchor="ctr"/>
-          <a:lstStyle/>
-          <a:p>
-            <a:pPr indent="0" marL="0">
-              <a:buNone/>
-            </a:pPr>
-            <a:r>
-              <a:rPr lang="en-US" sz="4000" b="1" dirty="0">
-                <a:solidFill>
-                  <a:srgbClr val="2B1B14"/>
-                </a:solidFill>
-                <a:latin typeface="Cambria" pitchFamily="34" charset="0"/>
-                <a:ea typeface="Cambria" pitchFamily="34" charset="-122"/>
-                <a:cs typeface="Cambria" pitchFamily="34" charset="-120"/>
-              </a:rPr>
-              <a:t>Qué necesito</a:t>
-            </a:r>
-            <a:endParaRPr lang="en-US" sz="4000" dirty="0"/>
-          </a:p>
-        </p:txBody>
-      </p:sp>
-      <p:sp>
-        <p:nvSpPr>
-          <p:cNvPr id="4" name="Shape 2"/>
-          <p:cNvSpPr/>
-          <p:nvPr/>
-        </p:nvSpPr>
-        <p:spPr>
-          <a:xfrm>
-            <a:off x="822960" y="2523744"/>
-            <a:ext cx="182880" cy="182880"/>
+              <a:t>Accesos a Meta, Instagram y Facebook</a:t>
+            </a:r>
+            <a:endParaRPr lang="en-US" sz="1700" dirty="0"/>
+          </a:p>
+        </p:txBody>
+      </p:sp>
+      <p:sp>
+        <p:nvSpPr>
+          <p:cNvPr id="6" name="Shape 4"/>
+          <p:cNvSpPr/>
+          <p:nvPr/>
+        </p:nvSpPr>
+        <p:spPr>
+          <a:xfrm>
+            <a:off x="822960" y="3383280"/>
+            <a:ext cx="146304" cy="146304"/>
           </a:xfrm>
           <a:prstGeom prst="ellipse">
             <a:avLst/>
           </a:prstGeom>
           <a:solidFill>
-            <a:srgbClr val="C8963E"/>
+            <a:srgbClr val="EF5B25"/>
           </a:solidFill>
           <a:ln/>
         </p:spPr>
       </p:sp>
       <p:sp>
         <p:nvSpPr>
-          <p:cNvPr id="5" name="Text 3"/>
-          <p:cNvSpPr/>
-          <p:nvPr/>
-        </p:nvSpPr>
-        <p:spPr>
-          <a:xfrm>
-            <a:off x="1325880" y="2377440"/>
-            <a:ext cx="5577840" cy="475488"/>
+          <p:cNvPr id="7" name="Text 5"/>
+          <p:cNvSpPr/>
+          <p:nvPr/>
+        </p:nvSpPr>
+        <p:spPr>
+          <a:xfrm>
+            <a:off x="1261872" y="3209544"/>
+            <a:ext cx="5943600" cy="475488"/>
           </a:xfrm>
           <a:prstGeom prst="rect">
             <a:avLst/>
@@ -3825,13 +3680,13 @@
             <a:r>
               <a:rPr lang="en-US" sz="1700" dirty="0">
                 <a:solidFill>
-                  <a:srgbClr val="2B1B14"/>
+                  <a:srgbClr val="F2EEE9"/>
                 </a:solidFill>
                 <a:latin typeface="Calibri" pitchFamily="34" charset="0"/>
                 <a:ea typeface="Calibri" pitchFamily="34" charset="-122"/>
                 <a:cs typeface="Calibri" pitchFamily="34" charset="-120"/>
               </a:rPr>
-              <a:t>Accesos a Meta, Instagram y Facebook</a:t>
+              <a:t>Acceso al ecommerce para píxel y catálogo</a:t>
             </a:r>
             <a:endParaRPr lang="en-US" sz="1700" dirty="0"/>
           </a:p>
@@ -3839,34 +3694,34 @@
       </p:sp>
       <p:sp>
         <p:nvSpPr>
-          <p:cNvPr id="6" name="Shape 4"/>
-          <p:cNvSpPr/>
-          <p:nvPr/>
-        </p:nvSpPr>
-        <p:spPr>
-          <a:xfrm>
-            <a:off x="822960" y="3182112"/>
-            <a:ext cx="182880" cy="182880"/>
+          <p:cNvPr id="8" name="Shape 6"/>
+          <p:cNvSpPr/>
+          <p:nvPr/>
+        </p:nvSpPr>
+        <p:spPr>
+          <a:xfrm>
+            <a:off x="822960" y="4078224"/>
+            <a:ext cx="146304" cy="146304"/>
           </a:xfrm>
           <a:prstGeom prst="ellipse">
             <a:avLst/>
           </a:prstGeom>
           <a:solidFill>
-            <a:srgbClr val="C8963E"/>
+            <a:srgbClr val="EF5B25"/>
           </a:solidFill>
           <a:ln/>
         </p:spPr>
       </p:sp>
       <p:sp>
         <p:nvSpPr>
-          <p:cNvPr id="7" name="Text 5"/>
-          <p:cNvSpPr/>
-          <p:nvPr/>
-        </p:nvSpPr>
-        <p:spPr>
-          <a:xfrm>
-            <a:off x="1325880" y="3035808"/>
-            <a:ext cx="5577840" cy="475488"/>
+          <p:cNvPr id="9" name="Text 7"/>
+          <p:cNvSpPr/>
+          <p:nvPr/>
+        </p:nvSpPr>
+        <p:spPr>
+          <a:xfrm>
+            <a:off x="1261872" y="3904488"/>
+            <a:ext cx="5943600" cy="475488"/>
           </a:xfrm>
           <a:prstGeom prst="rect">
             <a:avLst/>
@@ -3884,13 +3739,13 @@
             <a:r>
               <a:rPr lang="en-US" sz="1700" dirty="0">
                 <a:solidFill>
-                  <a:srgbClr val="2B1B14"/>
+                  <a:srgbClr val="F2EEE9"/>
                 </a:solidFill>
                 <a:latin typeface="Calibri" pitchFamily="34" charset="0"/>
                 <a:ea typeface="Calibri" pitchFamily="34" charset="-122"/>
                 <a:cs typeface="Calibri" pitchFamily="34" charset="-120"/>
               </a:rPr>
-              <a:t>Acceso al ecommerce para píxel y catálogo</a:t>
+              <a:t>Presupuesto de pauta confirmado</a:t>
             </a:r>
             <a:endParaRPr lang="en-US" sz="1700" dirty="0"/>
           </a:p>
@@ -3898,34 +3753,34 @@
       </p:sp>
       <p:sp>
         <p:nvSpPr>
-          <p:cNvPr id="8" name="Shape 6"/>
-          <p:cNvSpPr/>
-          <p:nvPr/>
-        </p:nvSpPr>
-        <p:spPr>
-          <a:xfrm>
-            <a:off x="822960" y="3840480"/>
-            <a:ext cx="182880" cy="182880"/>
+          <p:cNvPr id="10" name="Shape 8"/>
+          <p:cNvSpPr/>
+          <p:nvPr/>
+        </p:nvSpPr>
+        <p:spPr>
+          <a:xfrm>
+            <a:off x="822960" y="4773168"/>
+            <a:ext cx="146304" cy="146304"/>
           </a:xfrm>
           <a:prstGeom prst="ellipse">
             <a:avLst/>
           </a:prstGeom>
           <a:solidFill>
-            <a:srgbClr val="C8963E"/>
+            <a:srgbClr val="EF5B25"/>
           </a:solidFill>
           <a:ln/>
         </p:spPr>
       </p:sp>
       <p:sp>
         <p:nvSpPr>
-          <p:cNvPr id="9" name="Text 7"/>
-          <p:cNvSpPr/>
-          <p:nvPr/>
-        </p:nvSpPr>
-        <p:spPr>
-          <a:xfrm>
-            <a:off x="1325880" y="3694176"/>
-            <a:ext cx="5577840" cy="475488"/>
+          <p:cNvPr id="11" name="Text 9"/>
+          <p:cNvSpPr/>
+          <p:nvPr/>
+        </p:nvSpPr>
+        <p:spPr>
+          <a:xfrm>
+            <a:off x="1261872" y="4599432"/>
+            <a:ext cx="5943600" cy="475488"/>
           </a:xfrm>
           <a:prstGeom prst="rect">
             <a:avLst/>
@@ -3943,13 +3798,13 @@
             <a:r>
               <a:rPr lang="en-US" sz="1700" dirty="0">
                 <a:solidFill>
-                  <a:srgbClr val="2B1B14"/>
+                  <a:srgbClr val="F2EEE9"/>
                 </a:solidFill>
                 <a:latin typeface="Calibri" pitchFamily="34" charset="0"/>
                 <a:ea typeface="Calibri" pitchFamily="34" charset="-122"/>
                 <a:cs typeface="Calibri" pitchFamily="34" charset="-120"/>
               </a:rPr>
-              <a:t>Presupuesto de pauta confirmado</a:t>
+              <a:t>Creativos del equipo creativo</a:t>
             </a:r>
             <a:endParaRPr lang="en-US" sz="1700" dirty="0"/>
           </a:p>
@@ -3957,34 +3812,34 @@
       </p:sp>
       <p:sp>
         <p:nvSpPr>
-          <p:cNvPr id="10" name="Shape 8"/>
-          <p:cNvSpPr/>
-          <p:nvPr/>
-        </p:nvSpPr>
-        <p:spPr>
-          <a:xfrm>
-            <a:off x="822960" y="4498848"/>
-            <a:ext cx="182880" cy="182880"/>
+          <p:cNvPr id="12" name="Shape 10"/>
+          <p:cNvSpPr/>
+          <p:nvPr/>
+        </p:nvSpPr>
+        <p:spPr>
+          <a:xfrm>
+            <a:off x="822960" y="5468112"/>
+            <a:ext cx="146304" cy="146304"/>
           </a:xfrm>
           <a:prstGeom prst="ellipse">
             <a:avLst/>
           </a:prstGeom>
           <a:solidFill>
-            <a:srgbClr val="C8963E"/>
+            <a:srgbClr val="EF5B25"/>
           </a:solidFill>
           <a:ln/>
         </p:spPr>
       </p:sp>
       <p:sp>
         <p:nvSpPr>
-          <p:cNvPr id="11" name="Text 9"/>
-          <p:cNvSpPr/>
-          <p:nvPr/>
-        </p:nvSpPr>
-        <p:spPr>
-          <a:xfrm>
-            <a:off x="1325880" y="4352544"/>
-            <a:ext cx="5577840" cy="475488"/>
+          <p:cNvPr id="13" name="Text 11"/>
+          <p:cNvSpPr/>
+          <p:nvPr/>
+        </p:nvSpPr>
+        <p:spPr>
+          <a:xfrm>
+            <a:off x="1261872" y="5294376"/>
+            <a:ext cx="5943600" cy="475488"/>
           </a:xfrm>
           <a:prstGeom prst="rect">
             <a:avLst/>
@@ -4002,13 +3857,13 @@
             <a:r>
               <a:rPr lang="en-US" sz="1700" dirty="0">
                 <a:solidFill>
-                  <a:srgbClr val="2B1B14"/>
+                  <a:srgbClr val="F2EEE9"/>
                 </a:solidFill>
                 <a:latin typeface="Calibri" pitchFamily="34" charset="0"/>
                 <a:ea typeface="Calibri" pitchFamily="34" charset="-122"/>
                 <a:cs typeface="Calibri" pitchFamily="34" charset="-120"/>
               </a:rPr>
-              <a:t>Creativos del equipo creativo</a:t>
+              <a:t>Un kickoff de 45 minutos</a:t>
             </a:r>
             <a:endParaRPr lang="en-US" sz="1700" dirty="0"/>
           </a:p>
@@ -4016,225 +3871,164 @@
       </p:sp>
       <p:sp>
         <p:nvSpPr>
-          <p:cNvPr id="12" name="Shape 10"/>
-          <p:cNvSpPr/>
-          <p:nvPr/>
-        </p:nvSpPr>
-        <p:spPr>
-          <a:xfrm>
-            <a:off x="822960" y="5157216"/>
-            <a:ext cx="182880" cy="182880"/>
-          </a:xfrm>
-          <a:prstGeom prst="ellipse">
-            <a:avLst/>
-          </a:prstGeom>
-          <a:solidFill>
-            <a:srgbClr val="C8963E"/>
-          </a:solidFill>
-          <a:ln/>
-        </p:spPr>
-      </p:sp>
-      <p:sp>
-        <p:nvSpPr>
-          <p:cNvPr id="13" name="Text 11"/>
-          <p:cNvSpPr/>
-          <p:nvPr/>
-        </p:nvSpPr>
-        <p:spPr>
-          <a:xfrm>
-            <a:off x="1325880" y="5010912"/>
-            <a:ext cx="5577840" cy="475488"/>
-          </a:xfrm>
-          <a:prstGeom prst="rect">
-            <a:avLst/>
-          </a:prstGeom>
-          <a:noFill/>
-          <a:ln/>
-        </p:spPr>
-        <p:txBody>
-          <a:bodyPr wrap="square" lIns="0" tIns="0" rIns="0" bIns="0" rtlCol="0" anchor="ctr"/>
-          <a:lstStyle/>
-          <a:p>
-            <a:pPr indent="0" marL="0">
-              <a:buNone/>
-            </a:pPr>
-            <a:r>
-              <a:rPr lang="en-US" sz="1700" dirty="0">
-                <a:solidFill>
-                  <a:srgbClr val="2B1B14"/>
+          <p:cNvPr id="14" name="Text 12"/>
+          <p:cNvSpPr/>
+          <p:nvPr/>
+        </p:nvSpPr>
+        <p:spPr>
+          <a:xfrm>
+            <a:off x="7589520" y="2468880"/>
+            <a:ext cx="3779215" cy="1554480"/>
+          </a:xfrm>
+          <a:prstGeom prst="rect">
+            <a:avLst/>
+          </a:prstGeom>
+          <a:noFill/>
+          <a:ln/>
+        </p:spPr>
+        <p:txBody>
+          <a:bodyPr wrap="square" lIns="0" tIns="0" rIns="0" bIns="0" rtlCol="0" anchor="t"/>
+          <a:lstStyle/>
+          <a:p>
+            <a:pPr indent="0" marL="0">
+              <a:lnSpc>
+                <a:spcPct val="108000"/>
+              </a:lnSpc>
+              <a:buNone/>
+            </a:pPr>
+            <a:r>
+              <a:rPr lang="en-US" sz="3000" b="1" dirty="0">
+                <a:solidFill>
+                  <a:srgbClr val="EF5B25"/>
+                </a:solidFill>
+                <a:latin typeface="Arial" pitchFamily="34" charset="0"/>
+                <a:ea typeface="Arial" pitchFamily="34" charset="-122"/>
+                <a:cs typeface="Arial" pitchFamily="34" charset="-120"/>
+              </a:rPr>
+              <a:t>Campañas activas</a:t>
+            </a:r>
+            <a:endParaRPr lang="en-US" sz="3000" dirty="0"/>
+          </a:p>
+          <a:p>
+            <a:pPr indent="0" marL="0">
+              <a:lnSpc>
+                <a:spcPct val="108000"/>
+              </a:lnSpc>
+              <a:buNone/>
+            </a:pPr>
+            <a:r>
+              <a:rPr lang="en-US" sz="3000" b="1" dirty="0">
+                <a:solidFill>
+                  <a:srgbClr val="EF5B25"/>
+                </a:solidFill>
+                <a:latin typeface="Arial" pitchFamily="34" charset="0"/>
+                <a:ea typeface="Arial" pitchFamily="34" charset="-122"/>
+                <a:cs typeface="Arial" pitchFamily="34" charset="-120"/>
+              </a:rPr>
+              <a:t>en dos semanas.</a:t>
+            </a:r>
+            <a:endParaRPr lang="en-US" sz="3000" dirty="0"/>
+          </a:p>
+        </p:txBody>
+      </p:sp>
+      <p:sp>
+        <p:nvSpPr>
+          <p:cNvPr id="15" name="Text 13"/>
+          <p:cNvSpPr/>
+          <p:nvPr/>
+        </p:nvSpPr>
+        <p:spPr>
+          <a:xfrm>
+            <a:off x="7589520" y="4160520"/>
+            <a:ext cx="3779215" cy="310896"/>
+          </a:xfrm>
+          <a:prstGeom prst="rect">
+            <a:avLst/>
+          </a:prstGeom>
+          <a:noFill/>
+          <a:ln/>
+        </p:spPr>
+        <p:txBody>
+          <a:bodyPr wrap="square" lIns="0" tIns="0" rIns="0" bIns="0" rtlCol="0" anchor="ctr"/>
+          <a:lstStyle/>
+          <a:p>
+            <a:pPr indent="0" marL="0">
+              <a:buNone/>
+            </a:pPr>
+            <a:r>
+              <a:rPr lang="en-US" sz="1500" b="1" dirty="0">
+                <a:solidFill>
+                  <a:srgbClr val="F2EEE9"/>
+                </a:solidFill>
+                <a:latin typeface="Arial" pitchFamily="34" charset="0"/>
+                <a:ea typeface="Arial" pitchFamily="34" charset="-122"/>
+                <a:cs typeface="Arial" pitchFamily="34" charset="-120"/>
+              </a:rPr>
+              <a:t>Nicolás</a:t>
+            </a:r>
+            <a:endParaRPr lang="en-US" sz="1500" dirty="0"/>
+          </a:p>
+        </p:txBody>
+      </p:sp>
+      <p:sp>
+        <p:nvSpPr>
+          <p:cNvPr id="16" name="Text 14"/>
+          <p:cNvSpPr/>
+          <p:nvPr/>
+        </p:nvSpPr>
+        <p:spPr>
+          <a:xfrm>
+            <a:off x="7589520" y="4498848"/>
+            <a:ext cx="3779215" cy="621792"/>
+          </a:xfrm>
+          <a:prstGeom prst="rect">
+            <a:avLst/>
+          </a:prstGeom>
+          <a:noFill/>
+          <a:ln/>
+        </p:spPr>
+        <p:txBody>
+          <a:bodyPr wrap="square" lIns="0" tIns="0" rIns="0" bIns="0" rtlCol="0" anchor="ctr"/>
+          <a:lstStyle/>
+          <a:p>
+            <a:pPr indent="0" marL="0">
+              <a:lnSpc>
+                <a:spcPct val="125000"/>
+              </a:lnSpc>
+              <a:buNone/>
+            </a:pPr>
+            <a:r>
+              <a:rPr lang="en-US" sz="1400" dirty="0">
+                <a:solidFill>
+                  <a:srgbClr val="8A807A"/>
                 </a:solidFill>
                 <a:latin typeface="Calibri" pitchFamily="34" charset="0"/>
                 <a:ea typeface="Calibri" pitchFamily="34" charset="-122"/>
                 <a:cs typeface="Calibri" pitchFamily="34" charset="-120"/>
               </a:rPr>
-              <a:t>Un kickoff de 45 minutos</a:t>
-            </a:r>
-            <a:endParaRPr lang="en-US" sz="1700" dirty="0"/>
-          </a:p>
-        </p:txBody>
-      </p:sp>
-      <p:sp>
-        <p:nvSpPr>
-          <p:cNvPr id="14" name="Shape 12"/>
-          <p:cNvSpPr/>
-          <p:nvPr/>
-        </p:nvSpPr>
-        <p:spPr>
-          <a:xfrm>
-            <a:off x="7178040" y="2286000"/>
-            <a:ext cx="4190695" cy="3200400"/>
-          </a:xfrm>
-          <a:prstGeom prst="roundRect">
-            <a:avLst>
-              <a:gd name="adj" fmla="val 2286"/>
-            </a:avLst>
-          </a:prstGeom>
-          <a:solidFill>
-            <a:srgbClr val="4A1220"/>
-          </a:solidFill>
-          <a:ln/>
-        </p:spPr>
-      </p:sp>
-      <p:sp>
-        <p:nvSpPr>
-          <p:cNvPr id="15" name="Text 13"/>
-          <p:cNvSpPr/>
-          <p:nvPr/>
-        </p:nvSpPr>
-        <p:spPr>
-          <a:xfrm>
-            <a:off x="7635240" y="2697480"/>
-            <a:ext cx="3276295" cy="1371600"/>
-          </a:xfrm>
-          <a:prstGeom prst="rect">
-            <a:avLst/>
-          </a:prstGeom>
-          <a:noFill/>
-          <a:ln/>
-        </p:spPr>
-        <p:txBody>
-          <a:bodyPr wrap="square" lIns="0" tIns="0" rIns="0" bIns="0" rtlCol="0" anchor="t"/>
-          <a:lstStyle/>
+              <a:t>nicolas@sherpasstudio.cl</a:t>
+            </a:r>
+            <a:endParaRPr lang="en-US" sz="1400" dirty="0"/>
+          </a:p>
           <a:p>
             <a:pPr indent="0" marL="0">
               <a:lnSpc>
-                <a:spcPct val="110000"/>
+                <a:spcPct val="125000"/>
               </a:lnSpc>
               <a:buNone/>
             </a:pPr>
             <a:r>
-              <a:rPr lang="en-US" sz="2800" b="1" dirty="0">
-                <a:solidFill>
-                  <a:srgbClr val="FFFFFF"/>
-                </a:solidFill>
-                <a:latin typeface="Cambria" pitchFamily="34" charset="0"/>
-                <a:ea typeface="Cambria" pitchFamily="34" charset="-122"/>
-                <a:cs typeface="Cambria" pitchFamily="34" charset="-120"/>
-              </a:rPr>
-              <a:t>Campañas activas en dos semanas.</a:t>
-            </a:r>
-            <a:endParaRPr lang="en-US" sz="2800" dirty="0"/>
-          </a:p>
-        </p:txBody>
-      </p:sp>
-      <p:sp>
-        <p:nvSpPr>
-          <p:cNvPr id="16" name="Text 14"/>
-          <p:cNvSpPr/>
-          <p:nvPr/>
-        </p:nvSpPr>
-        <p:spPr>
-          <a:xfrm>
-            <a:off x="7635240" y="4434840"/>
-            <a:ext cx="3276295" cy="292608"/>
-          </a:xfrm>
-          <a:prstGeom prst="rect">
-            <a:avLst/>
-          </a:prstGeom>
-          <a:noFill/>
-          <a:ln/>
-        </p:spPr>
-        <p:txBody>
-          <a:bodyPr wrap="square" lIns="0" tIns="0" rIns="0" bIns="0" rtlCol="0" anchor="ctr"/>
-          <a:lstStyle/>
-          <a:p>
-            <a:pPr indent="0" marL="0">
-              <a:buNone/>
-            </a:pPr>
-            <a:r>
-              <a:rPr lang="en-US" sz="1400" b="1" dirty="0">
-                <a:solidFill>
-                  <a:srgbClr val="C8963E"/>
+              <a:rPr lang="en-US" sz="1400" dirty="0">
+                <a:solidFill>
+                  <a:srgbClr val="8A807A"/>
                 </a:solidFill>
                 <a:latin typeface="Calibri" pitchFamily="34" charset="0"/>
                 <a:ea typeface="Calibri" pitchFamily="34" charset="-122"/>
                 <a:cs typeface="Calibri" pitchFamily="34" charset="-120"/>
               </a:rPr>
-              <a:t>Nicolás  ·  Sherpas Studio</a:t>
+              <a:t>+56 9 3125 6539</a:t>
             </a:r>
             <a:endParaRPr lang="en-US" sz="1400" dirty="0"/>
-          </a:p>
-        </p:txBody>
-      </p:sp>
-      <p:sp>
-        <p:nvSpPr>
-          <p:cNvPr id="17" name="Text 15"/>
-          <p:cNvSpPr/>
-          <p:nvPr/>
-        </p:nvSpPr>
-        <p:spPr>
-          <a:xfrm>
-            <a:off x="7635240" y="4736592"/>
-            <a:ext cx="3276295" cy="566928"/>
-          </a:xfrm>
-          <a:prstGeom prst="rect">
-            <a:avLst/>
-          </a:prstGeom>
-          <a:noFill/>
-          <a:ln/>
-        </p:spPr>
-        <p:txBody>
-          <a:bodyPr wrap="square" lIns="0" tIns="0" rIns="0" bIns="0" rtlCol="0" anchor="ctr"/>
-          <a:lstStyle/>
-          <a:p>
-            <a:pPr indent="0" marL="0">
-              <a:lnSpc>
-                <a:spcPct val="120000"/>
-              </a:lnSpc>
-              <a:buNone/>
-            </a:pPr>
-            <a:r>
-              <a:rPr lang="en-US" sz="1300" dirty="0">
-                <a:solidFill>
-                  <a:srgbClr val="C4AEA1"/>
-                </a:solidFill>
-                <a:latin typeface="Calibri" pitchFamily="34" charset="0"/>
-                <a:ea typeface="Calibri" pitchFamily="34" charset="-122"/>
-                <a:cs typeface="Calibri" pitchFamily="34" charset="-120"/>
-              </a:rPr>
-              <a:t>nicolas@sherpasstudio.cl</a:t>
-            </a:r>
-            <a:endParaRPr lang="en-US" sz="1300" dirty="0"/>
-          </a:p>
-          <a:p>
-            <a:pPr indent="0" marL="0">
-              <a:lnSpc>
-                <a:spcPct val="120000"/>
-              </a:lnSpc>
-              <a:buNone/>
-            </a:pPr>
-            <a:r>
-              <a:rPr lang="en-US" sz="1300" dirty="0">
-                <a:solidFill>
-                  <a:srgbClr val="C4AEA1"/>
-                </a:solidFill>
-                <a:latin typeface="Calibri" pitchFamily="34" charset="0"/>
-                <a:ea typeface="Calibri" pitchFamily="34" charset="-122"/>
-                <a:cs typeface="Calibri" pitchFamily="34" charset="-120"/>
-              </a:rPr>
-              <a:t>+56 9 3125 6539</a:t>
-            </a:r>
-            <a:endParaRPr lang="en-US" sz="1300" dirty="0"/>
           </a:p>
         </p:txBody>
       </p:sp>

--- a/propuestas/pobrevermut/PobreVermut - Propuesta Campanas 2026.pptx
+++ b/propuestas/pobrevermut/PobreVermut - Propuesta Campanas 2026.pptx
@@ -1682,7 +1682,7 @@
               <a:buNone/>
             </a:pPr>
             <a:r>
-              <a:rPr lang="en-US" sz="1050" b="1" spc="150" kern="0" dirty="0">
+              <a:rPr lang="en-US" sz="1050" b="1" spc="250" kern="0" dirty="0">
                 <a:solidFill>
                   <a:srgbClr val="8A807A"/>
                 </a:solidFill>
@@ -1690,7 +1690,7 @@
                 <a:ea typeface="Arial" pitchFamily="34" charset="-122"/>
                 <a:cs typeface="Arial" pitchFamily="34" charset="-120"/>
               </a:rPr>
-              <a:t>MES 1 – 2  ·  META</a:t>
+              <a:t>META</a:t>
             </a:r>
             <a:endParaRPr lang="en-US" sz="1050" dirty="0"/>
           </a:p>
@@ -1864,7 +1864,7 @@
               <a:buNone/>
             </a:pPr>
             <a:r>
-              <a:rPr lang="en-US" sz="1050" b="1" spc="150" kern="0" dirty="0">
+              <a:rPr lang="en-US" sz="1050" b="1" spc="250" kern="0" dirty="0">
                 <a:solidFill>
                   <a:srgbClr val="8A807A"/>
                 </a:solidFill>
@@ -1872,7 +1872,7 @@
                 <a:ea typeface="Arial" pitchFamily="34" charset="-122"/>
                 <a:cs typeface="Arial" pitchFamily="34" charset="-120"/>
               </a:rPr>
-              <a:t>MES 3 – 4  ·  META</a:t>
+              <a:t>META</a:t>
             </a:r>
             <a:endParaRPr lang="en-US" sz="1050" dirty="0"/>
           </a:p>
@@ -2046,7 +2046,7 @@
               <a:buNone/>
             </a:pPr>
             <a:r>
-              <a:rPr lang="en-US" sz="1050" b="1" spc="150" kern="0" dirty="0">
+              <a:rPr lang="en-US" sz="1050" b="1" spc="250" kern="0" dirty="0">
                 <a:solidFill>
                   <a:srgbClr val="8A807A"/>
                 </a:solidFill>
@@ -2054,7 +2054,7 @@
                 <a:ea typeface="Arial" pitchFamily="34" charset="-122"/>
                 <a:cs typeface="Arial" pitchFamily="34" charset="-120"/>
               </a:rPr>
-              <a:t>MES 5 +  ·  GOOGLE</a:t>
+              <a:t>GOOGLE</a:t>
             </a:r>
             <a:endParaRPr lang="en-US" sz="1050" dirty="0"/>
           </a:p>
@@ -2282,8 +2282,8 @@
         </p:nvSpPr>
         <p:spPr>
           <a:xfrm>
-            <a:off x="822960" y="2514600"/>
-            <a:ext cx="566928" cy="475488"/>
+            <a:off x="822960" y="2578608"/>
+            <a:ext cx="658368" cy="530352"/>
           </a:xfrm>
           <a:prstGeom prst="rect">
             <a:avLst/>
@@ -2299,7 +2299,7 @@
               <a:buNone/>
             </a:pPr>
             <a:r>
-              <a:rPr lang="en-US" sz="1400" b="1" dirty="0">
+              <a:rPr lang="en-US" sz="1600" b="1" dirty="0">
                 <a:solidFill>
                   <a:srgbClr val="EF5B25"/>
                 </a:solidFill>
@@ -2309,7 +2309,7 @@
               </a:rPr>
               <a:t>01</a:t>
             </a:r>
-            <a:endParaRPr lang="en-US" sz="1400" dirty="0"/>
+            <a:endParaRPr lang="en-US" sz="1600" dirty="0"/>
           </a:p>
         </p:txBody>
       </p:sp>
@@ -2321,8 +2321,8 @@
         </p:nvSpPr>
         <p:spPr>
           <a:xfrm>
-            <a:off x="1463040" y="2514600"/>
-            <a:ext cx="5760720" cy="475488"/>
+            <a:off x="1664208" y="2578608"/>
+            <a:ext cx="9704527" cy="530352"/>
           </a:xfrm>
           <a:prstGeom prst="rect">
             <a:avLst/>
@@ -2338,7 +2338,7 @@
               <a:buNone/>
             </a:pPr>
             <a:r>
-              <a:rPr lang="en-US" sz="1800" dirty="0">
+              <a:rPr lang="en-US" sz="2100" dirty="0">
                 <a:solidFill>
                   <a:srgbClr val="F2EEE9"/>
                 </a:solidFill>
@@ -2348,7 +2348,7 @@
               </a:rPr>
               <a:t>El plan de medios del mes</a:t>
             </a:r>
-            <a:endParaRPr lang="en-US" sz="1800" dirty="0"/>
+            <a:endParaRPr lang="en-US" sz="2100" dirty="0"/>
           </a:p>
         </p:txBody>
       </p:sp>
@@ -2360,8 +2360,8 @@
         </p:nvSpPr>
         <p:spPr>
           <a:xfrm>
-            <a:off x="822960" y="3209544"/>
-            <a:ext cx="566928" cy="475488"/>
+            <a:off x="822960" y="3310128"/>
+            <a:ext cx="658368" cy="530352"/>
           </a:xfrm>
           <a:prstGeom prst="rect">
             <a:avLst/>
@@ -2377,7 +2377,7 @@
               <a:buNone/>
             </a:pPr>
             <a:r>
-              <a:rPr lang="en-US" sz="1400" b="1" dirty="0">
+              <a:rPr lang="en-US" sz="1600" b="1" dirty="0">
                 <a:solidFill>
                   <a:srgbClr val="EF5B25"/>
                 </a:solidFill>
@@ -2387,7 +2387,7 @@
               </a:rPr>
               <a:t>02</a:t>
             </a:r>
-            <a:endParaRPr lang="en-US" sz="1400" dirty="0"/>
+            <a:endParaRPr lang="en-US" sz="1600" dirty="0"/>
           </a:p>
         </p:txBody>
       </p:sp>
@@ -2399,8 +2399,8 @@
         </p:nvSpPr>
         <p:spPr>
           <a:xfrm>
-            <a:off x="1463040" y="3209544"/>
-            <a:ext cx="5760720" cy="475488"/>
+            <a:off x="1664208" y="3310128"/>
+            <a:ext cx="9704527" cy="530352"/>
           </a:xfrm>
           <a:prstGeom prst="rect">
             <a:avLst/>
@@ -2416,7 +2416,7 @@
               <a:buNone/>
             </a:pPr>
             <a:r>
-              <a:rPr lang="en-US" sz="1800" dirty="0">
+              <a:rPr lang="en-US" sz="2100" dirty="0">
                 <a:solidFill>
                   <a:srgbClr val="F2EEE9"/>
                 </a:solidFill>
@@ -2426,7 +2426,7 @@
               </a:rPr>
               <a:t>El requerimiento de creativos al equipo creativo</a:t>
             </a:r>
-            <a:endParaRPr lang="en-US" sz="1800" dirty="0"/>
+            <a:endParaRPr lang="en-US" sz="2100" dirty="0"/>
           </a:p>
         </p:txBody>
       </p:sp>
@@ -2438,8 +2438,8 @@
         </p:nvSpPr>
         <p:spPr>
           <a:xfrm>
-            <a:off x="822960" y="3904488"/>
-            <a:ext cx="566928" cy="475488"/>
+            <a:off x="822960" y="4041648"/>
+            <a:ext cx="658368" cy="530352"/>
           </a:xfrm>
           <a:prstGeom prst="rect">
             <a:avLst/>
@@ -2455,7 +2455,7 @@
               <a:buNone/>
             </a:pPr>
             <a:r>
-              <a:rPr lang="en-US" sz="1400" b="1" dirty="0">
+              <a:rPr lang="en-US" sz="1600" b="1" dirty="0">
                 <a:solidFill>
                   <a:srgbClr val="EF5B25"/>
                 </a:solidFill>
@@ -2465,7 +2465,7 @@
               </a:rPr>
               <a:t>03</a:t>
             </a:r>
-            <a:endParaRPr lang="en-US" sz="1400" dirty="0"/>
+            <a:endParaRPr lang="en-US" sz="1600" dirty="0"/>
           </a:p>
         </p:txBody>
       </p:sp>
@@ -2477,8 +2477,8 @@
         </p:nvSpPr>
         <p:spPr>
           <a:xfrm>
-            <a:off x="1463040" y="3904488"/>
-            <a:ext cx="5760720" cy="475488"/>
+            <a:off x="1664208" y="4041648"/>
+            <a:ext cx="9704527" cy="530352"/>
           </a:xfrm>
           <a:prstGeom prst="rect">
             <a:avLst/>
@@ -2494,7 +2494,7 @@
               <a:buNone/>
             </a:pPr>
             <a:r>
-              <a:rPr lang="en-US" sz="1800" dirty="0">
+              <a:rPr lang="en-US" sz="2100" dirty="0">
                 <a:solidFill>
                   <a:srgbClr val="F2EEE9"/>
                 </a:solidFill>
@@ -2504,7 +2504,7 @@
               </a:rPr>
               <a:t>Configuración de campañas, píxel y catálogo</a:t>
             </a:r>
-            <a:endParaRPr lang="en-US" sz="1800" dirty="0"/>
+            <a:endParaRPr lang="en-US" sz="2100" dirty="0"/>
           </a:p>
         </p:txBody>
       </p:sp>
@@ -2516,8 +2516,8 @@
         </p:nvSpPr>
         <p:spPr>
           <a:xfrm>
-            <a:off x="822960" y="4599432"/>
-            <a:ext cx="566928" cy="475488"/>
+            <a:off x="822960" y="4773168"/>
+            <a:ext cx="658368" cy="530352"/>
           </a:xfrm>
           <a:prstGeom prst="rect">
             <a:avLst/>
@@ -2533,7 +2533,7 @@
               <a:buNone/>
             </a:pPr>
             <a:r>
-              <a:rPr lang="en-US" sz="1400" b="1" dirty="0">
+              <a:rPr lang="en-US" sz="1600" b="1" dirty="0">
                 <a:solidFill>
                   <a:srgbClr val="EF5B25"/>
                 </a:solidFill>
@@ -2543,7 +2543,7 @@
               </a:rPr>
               <a:t>04</a:t>
             </a:r>
-            <a:endParaRPr lang="en-US" sz="1400" dirty="0"/>
+            <a:endParaRPr lang="en-US" sz="1600" dirty="0"/>
           </a:p>
         </p:txBody>
       </p:sp>
@@ -2555,8 +2555,8 @@
         </p:nvSpPr>
         <p:spPr>
           <a:xfrm>
-            <a:off x="1463040" y="4599432"/>
-            <a:ext cx="5760720" cy="475488"/>
+            <a:off x="1664208" y="4773168"/>
+            <a:ext cx="9704527" cy="530352"/>
           </a:xfrm>
           <a:prstGeom prst="rect">
             <a:avLst/>
@@ -2572,7 +2572,7 @@
               <a:buNone/>
             </a:pPr>
             <a:r>
-              <a:rPr lang="en-US" sz="1800" dirty="0">
+              <a:rPr lang="en-US" sz="2100" dirty="0">
                 <a:solidFill>
                   <a:srgbClr val="F2EEE9"/>
                 </a:solidFill>
@@ -2582,7 +2582,7 @@
               </a:rPr>
               <a:t>Optimización durante todo el mes</a:t>
             </a:r>
-            <a:endParaRPr lang="en-US" sz="1800" dirty="0"/>
+            <a:endParaRPr lang="en-US" sz="2100" dirty="0"/>
           </a:p>
         </p:txBody>
       </p:sp>
@@ -2594,8 +2594,8 @@
         </p:nvSpPr>
         <p:spPr>
           <a:xfrm>
-            <a:off x="822960" y="5294376"/>
-            <a:ext cx="566928" cy="475488"/>
+            <a:off x="822960" y="5504688"/>
+            <a:ext cx="658368" cy="530352"/>
           </a:xfrm>
           <a:prstGeom prst="rect">
             <a:avLst/>
@@ -2611,7 +2611,7 @@
               <a:buNone/>
             </a:pPr>
             <a:r>
-              <a:rPr lang="en-US" sz="1400" b="1" dirty="0">
+              <a:rPr lang="en-US" sz="1600" b="1" dirty="0">
                 <a:solidFill>
                   <a:srgbClr val="EF5B25"/>
                 </a:solidFill>
@@ -2621,7 +2621,7 @@
               </a:rPr>
               <a:t>05</a:t>
             </a:r>
-            <a:endParaRPr lang="en-US" sz="1400" dirty="0"/>
+            <a:endParaRPr lang="en-US" sz="1600" dirty="0"/>
           </a:p>
         </p:txBody>
       </p:sp>
@@ -2633,8 +2633,8 @@
         </p:nvSpPr>
         <p:spPr>
           <a:xfrm>
-            <a:off x="1463040" y="5294376"/>
-            <a:ext cx="5760720" cy="475488"/>
+            <a:off x="1664208" y="5504688"/>
+            <a:ext cx="9704527" cy="530352"/>
           </a:xfrm>
           <a:prstGeom prst="rect">
             <a:avLst/>
@@ -2650,7 +2650,7 @@
               <a:buNone/>
             </a:pPr>
             <a:r>
-              <a:rPr lang="en-US" sz="1800" dirty="0">
+              <a:rPr lang="en-US" sz="2100" dirty="0">
                 <a:solidFill>
                   <a:srgbClr val="F2EEE9"/>
                 </a:solidFill>
@@ -2660,223 +2660,7 @@
               </a:rPr>
               <a:t>Reporte mensual con ventas, no con likes</a:t>
             </a:r>
-            <a:endParaRPr lang="en-US" sz="1800" dirty="0"/>
-          </a:p>
-        </p:txBody>
-      </p:sp>
-      <p:sp>
-        <p:nvSpPr>
-          <p:cNvPr id="14" name="Text 12"/>
-          <p:cNvSpPr/>
-          <p:nvPr/>
-        </p:nvSpPr>
-        <p:spPr>
-          <a:xfrm>
-            <a:off x="7589520" y="2542032"/>
-            <a:ext cx="3779215" cy="274320"/>
-          </a:xfrm>
-          <a:prstGeom prst="rect">
-            <a:avLst/>
-          </a:prstGeom>
-          <a:noFill/>
-          <a:ln/>
-        </p:spPr>
-        <p:txBody>
-          <a:bodyPr wrap="square" lIns="0" tIns="0" rIns="0" bIns="0" rtlCol="0" anchor="ctr"/>
-          <a:lstStyle/>
-          <a:p>
-            <a:pPr indent="0" marL="0">
-              <a:buNone/>
-            </a:pPr>
-            <a:r>
-              <a:rPr lang="en-US" sz="1050" b="1" spc="250" kern="0" dirty="0">
-                <a:solidFill>
-                  <a:srgbClr val="EF5B25"/>
-                </a:solidFill>
-                <a:latin typeface="Arial" pitchFamily="34" charset="0"/>
-                <a:ea typeface="Arial" pitchFamily="34" charset="-122"/>
-                <a:cs typeface="Arial" pitchFamily="34" charset="-120"/>
-              </a:rPr>
-              <a:t>NO INCLUYE</a:t>
-            </a:r>
-            <a:endParaRPr lang="en-US" sz="1050" dirty="0"/>
-          </a:p>
-        </p:txBody>
-      </p:sp>
-      <p:sp>
-        <p:nvSpPr>
-          <p:cNvPr id="15" name="Shape 13"/>
-          <p:cNvSpPr/>
-          <p:nvPr/>
-        </p:nvSpPr>
-        <p:spPr>
-          <a:xfrm>
-            <a:off x="7589520" y="3236976"/>
-            <a:ext cx="128016" cy="128016"/>
-          </a:xfrm>
-          <a:prstGeom prst="ellipse">
-            <a:avLst/>
-          </a:prstGeom>
-          <a:solidFill>
-            <a:srgbClr val="8A807A"/>
-          </a:solidFill>
-          <a:ln/>
-        </p:spPr>
-      </p:sp>
-      <p:sp>
-        <p:nvSpPr>
-          <p:cNvPr id="16" name="Text 14"/>
-          <p:cNvSpPr/>
-          <p:nvPr/>
-        </p:nvSpPr>
-        <p:spPr>
-          <a:xfrm>
-            <a:off x="7955280" y="3063240"/>
-            <a:ext cx="3413455" cy="457200"/>
-          </a:xfrm>
-          <a:prstGeom prst="rect">
-            <a:avLst/>
-          </a:prstGeom>
-          <a:noFill/>
-          <a:ln/>
-        </p:spPr>
-        <p:txBody>
-          <a:bodyPr wrap="square" lIns="0" tIns="0" rIns="0" bIns="0" rtlCol="0" anchor="ctr"/>
-          <a:lstStyle/>
-          <a:p>
-            <a:pPr indent="0" marL="0">
-              <a:buNone/>
-            </a:pPr>
-            <a:r>
-              <a:rPr lang="en-US" sz="1600" dirty="0">
-                <a:solidFill>
-                  <a:srgbClr val="8A807A"/>
-                </a:solidFill>
-                <a:latin typeface="Calibri" pitchFamily="34" charset="0"/>
-                <a:ea typeface="Calibri" pitchFamily="34" charset="-122"/>
-                <a:cs typeface="Calibri" pitchFamily="34" charset="-120"/>
-              </a:rPr>
-              <a:t>Producción de creativos</a:t>
-            </a:r>
-            <a:endParaRPr lang="en-US" sz="1600" dirty="0"/>
-          </a:p>
-        </p:txBody>
-      </p:sp>
-      <p:sp>
-        <p:nvSpPr>
-          <p:cNvPr id="17" name="Shape 15"/>
-          <p:cNvSpPr/>
-          <p:nvPr/>
-        </p:nvSpPr>
-        <p:spPr>
-          <a:xfrm>
-            <a:off x="7589520" y="3803904"/>
-            <a:ext cx="128016" cy="128016"/>
-          </a:xfrm>
-          <a:prstGeom prst="ellipse">
-            <a:avLst/>
-          </a:prstGeom>
-          <a:solidFill>
-            <a:srgbClr val="8A807A"/>
-          </a:solidFill>
-          <a:ln/>
-        </p:spPr>
-      </p:sp>
-      <p:sp>
-        <p:nvSpPr>
-          <p:cNvPr id="18" name="Text 16"/>
-          <p:cNvSpPr/>
-          <p:nvPr/>
-        </p:nvSpPr>
-        <p:spPr>
-          <a:xfrm>
-            <a:off x="7955280" y="3630168"/>
-            <a:ext cx="3413455" cy="457200"/>
-          </a:xfrm>
-          <a:prstGeom prst="rect">
-            <a:avLst/>
-          </a:prstGeom>
-          <a:noFill/>
-          <a:ln/>
-        </p:spPr>
-        <p:txBody>
-          <a:bodyPr wrap="square" lIns="0" tIns="0" rIns="0" bIns="0" rtlCol="0" anchor="ctr"/>
-          <a:lstStyle/>
-          <a:p>
-            <a:pPr indent="0" marL="0">
-              <a:buNone/>
-            </a:pPr>
-            <a:r>
-              <a:rPr lang="en-US" sz="1600" dirty="0">
-                <a:solidFill>
-                  <a:srgbClr val="8A807A"/>
-                </a:solidFill>
-                <a:latin typeface="Calibri" pitchFamily="34" charset="0"/>
-                <a:ea typeface="Calibri" pitchFamily="34" charset="-122"/>
-                <a:cs typeface="Calibri" pitchFamily="34" charset="-120"/>
-              </a:rPr>
-              <a:t>Community management</a:t>
-            </a:r>
-            <a:endParaRPr lang="en-US" sz="1600" dirty="0"/>
-          </a:p>
-        </p:txBody>
-      </p:sp>
-      <p:sp>
-        <p:nvSpPr>
-          <p:cNvPr id="19" name="Shape 17"/>
-          <p:cNvSpPr/>
-          <p:nvPr/>
-        </p:nvSpPr>
-        <p:spPr>
-          <a:xfrm>
-            <a:off x="7589520" y="4370832"/>
-            <a:ext cx="128016" cy="128016"/>
-          </a:xfrm>
-          <a:prstGeom prst="ellipse">
-            <a:avLst/>
-          </a:prstGeom>
-          <a:solidFill>
-            <a:srgbClr val="8A807A"/>
-          </a:solidFill>
-          <a:ln/>
-        </p:spPr>
-      </p:sp>
-      <p:sp>
-        <p:nvSpPr>
-          <p:cNvPr id="20" name="Text 18"/>
-          <p:cNvSpPr/>
-          <p:nvPr/>
-        </p:nvSpPr>
-        <p:spPr>
-          <a:xfrm>
-            <a:off x="7955280" y="4197096"/>
-            <a:ext cx="3413455" cy="457200"/>
-          </a:xfrm>
-          <a:prstGeom prst="rect">
-            <a:avLst/>
-          </a:prstGeom>
-          <a:noFill/>
-          <a:ln/>
-        </p:spPr>
-        <p:txBody>
-          <a:bodyPr wrap="square" lIns="0" tIns="0" rIns="0" bIns="0" rtlCol="0" anchor="ctr"/>
-          <a:lstStyle/>
-          <a:p>
-            <a:pPr indent="0" marL="0">
-              <a:buNone/>
-            </a:pPr>
-            <a:r>
-              <a:rPr lang="en-US" sz="1600" dirty="0">
-                <a:solidFill>
-                  <a:srgbClr val="8A807A"/>
-                </a:solidFill>
-                <a:latin typeface="Calibri" pitchFamily="34" charset="0"/>
-                <a:ea typeface="Calibri" pitchFamily="34" charset="-122"/>
-                <a:cs typeface="Calibri" pitchFamily="34" charset="-120"/>
-              </a:rPr>
-              <a:t>La inversión en pauta</a:t>
-            </a:r>
-            <a:endParaRPr lang="en-US" sz="1600" dirty="0"/>
+            <a:endParaRPr lang="en-US" sz="2100" dirty="0"/>
           </a:p>
         </p:txBody>
       </p:sp>
@@ -2959,8 +2743,8 @@
         </p:nvSpPr>
         <p:spPr>
           <a:xfrm>
-            <a:off x="822960" y="1645920"/>
-            <a:ext cx="5852160" cy="1417320"/>
+            <a:off x="822960" y="1600200"/>
+            <a:ext cx="8686800" cy="1600200"/>
           </a:xfrm>
           <a:prstGeom prst="rect">
             <a:avLst/>
@@ -2976,7 +2760,7 @@
               <a:buNone/>
             </a:pPr>
             <a:r>
-              <a:rPr lang="en-US" sz="7800" b="1" dirty="0">
+              <a:rPr lang="en-US" sz="9600" b="1" dirty="0">
                 <a:solidFill>
                   <a:srgbClr val="140C07"/>
                 </a:solidFill>
@@ -2986,7 +2770,7 @@
               </a:rPr>
               <a:t>$350.000</a:t>
             </a:r>
-            <a:endParaRPr lang="en-US" sz="7800" dirty="0"/>
+            <a:endParaRPr lang="en-US" sz="9600" dirty="0"/>
           </a:p>
         </p:txBody>
       </p:sp>
@@ -2998,8 +2782,8 @@
         </p:nvSpPr>
         <p:spPr>
           <a:xfrm>
-            <a:off x="822960" y="3090672"/>
-            <a:ext cx="5852160" cy="384048"/>
+            <a:off x="822960" y="3310128"/>
+            <a:ext cx="7315200" cy="457200"/>
           </a:xfrm>
           <a:prstGeom prst="rect">
             <a:avLst/>
@@ -3015,7 +2799,7 @@
               <a:buNone/>
             </a:pPr>
             <a:r>
-              <a:rPr lang="en-US" sz="2000" dirty="0">
+              <a:rPr lang="en-US" sz="2400" dirty="0">
                 <a:solidFill>
                   <a:srgbClr val="140C07"/>
                 </a:solidFill>
@@ -3025,7 +2809,7 @@
               </a:rPr>
               <a:t>líquidos al mes</a:t>
             </a:r>
-            <a:endParaRPr lang="en-US" sz="2000" dirty="0"/>
+            <a:endParaRPr lang="en-US" sz="2400" dirty="0"/>
           </a:p>
         </p:txBody>
       </p:sp>
@@ -3037,281 +2821,8 @@
         </p:nvSpPr>
         <p:spPr>
           <a:xfrm>
-            <a:off x="822960" y="4069080"/>
-            <a:ext cx="3108960" cy="384048"/>
-          </a:xfrm>
-          <a:prstGeom prst="rect">
-            <a:avLst/>
-          </a:prstGeom>
-          <a:noFill/>
-          <a:ln/>
-        </p:spPr>
-        <p:txBody>
-          <a:bodyPr wrap="square" lIns="0" tIns="0" rIns="0" bIns="0" rtlCol="0" anchor="ctr"/>
-          <a:lstStyle/>
-          <a:p>
-            <a:pPr indent="0" marL="0">
-              <a:buNone/>
-            </a:pPr>
-            <a:r>
-              <a:rPr lang="en-US" sz="1400" dirty="0">
-                <a:solidFill>
-                  <a:srgbClr val="140C07"/>
-                </a:solidFill>
-                <a:latin typeface="Calibri" pitchFamily="34" charset="0"/>
-                <a:ea typeface="Calibri" pitchFamily="34" charset="-122"/>
-                <a:cs typeface="Calibri" pitchFamily="34" charset="-120"/>
-              </a:rPr>
-              <a:t>Honorario bruto</a:t>
-            </a:r>
-            <a:endParaRPr lang="en-US" sz="1400" dirty="0"/>
-          </a:p>
-        </p:txBody>
-      </p:sp>
-      <p:sp>
-        <p:nvSpPr>
-          <p:cNvPr id="6" name="Text 4"/>
-          <p:cNvSpPr/>
-          <p:nvPr/>
-        </p:nvSpPr>
-        <p:spPr>
-          <a:xfrm>
-            <a:off x="3931920" y="4069080"/>
-            <a:ext cx="2011680" cy="384048"/>
-          </a:xfrm>
-          <a:prstGeom prst="rect">
-            <a:avLst/>
-          </a:prstGeom>
-          <a:noFill/>
-          <a:ln/>
-        </p:spPr>
-        <p:txBody>
-          <a:bodyPr wrap="square" lIns="0" tIns="0" rIns="0" bIns="0" rtlCol="0" anchor="ctr"/>
-          <a:lstStyle/>
-          <a:p>
-            <a:pPr algn="r" indent="0" marL="0">
-              <a:buNone/>
-            </a:pPr>
-            <a:r>
-              <a:rPr lang="en-US" sz="1400" dirty="0">
-                <a:solidFill>
-                  <a:srgbClr val="140C07"/>
-                </a:solidFill>
-                <a:latin typeface="Calibri" pitchFamily="34" charset="0"/>
-                <a:ea typeface="Calibri" pitchFamily="34" charset="-122"/>
-                <a:cs typeface="Calibri" pitchFamily="34" charset="-120"/>
-              </a:rPr>
-              <a:t>$412.979</a:t>
-            </a:r>
-            <a:endParaRPr lang="en-US" sz="1400" dirty="0"/>
-          </a:p>
-        </p:txBody>
-      </p:sp>
-      <p:sp>
-        <p:nvSpPr>
-          <p:cNvPr id="7" name="Text 5"/>
-          <p:cNvSpPr/>
-          <p:nvPr/>
-        </p:nvSpPr>
-        <p:spPr>
-          <a:xfrm>
-            <a:off x="822960" y="4544568"/>
-            <a:ext cx="3108960" cy="384048"/>
-          </a:xfrm>
-          <a:prstGeom prst="rect">
-            <a:avLst/>
-          </a:prstGeom>
-          <a:noFill/>
-          <a:ln/>
-        </p:spPr>
-        <p:txBody>
-          <a:bodyPr wrap="square" lIns="0" tIns="0" rIns="0" bIns="0" rtlCol="0" anchor="ctr"/>
-          <a:lstStyle/>
-          <a:p>
-            <a:pPr indent="0" marL="0">
-              <a:buNone/>
-            </a:pPr>
-            <a:r>
-              <a:rPr lang="en-US" sz="1400" dirty="0">
-                <a:solidFill>
-                  <a:srgbClr val="140C07"/>
-                </a:solidFill>
-                <a:latin typeface="Calibri" pitchFamily="34" charset="0"/>
-                <a:ea typeface="Calibri" pitchFamily="34" charset="-122"/>
-                <a:cs typeface="Calibri" pitchFamily="34" charset="-120"/>
-              </a:rPr>
-              <a:t>Retención 15,25%</a:t>
-            </a:r>
-            <a:endParaRPr lang="en-US" sz="1400" dirty="0"/>
-          </a:p>
-        </p:txBody>
-      </p:sp>
-      <p:sp>
-        <p:nvSpPr>
-          <p:cNvPr id="8" name="Text 6"/>
-          <p:cNvSpPr/>
-          <p:nvPr/>
-        </p:nvSpPr>
-        <p:spPr>
-          <a:xfrm>
-            <a:off x="3931920" y="4544568"/>
-            <a:ext cx="2011680" cy="384048"/>
-          </a:xfrm>
-          <a:prstGeom prst="rect">
-            <a:avLst/>
-          </a:prstGeom>
-          <a:noFill/>
-          <a:ln/>
-        </p:spPr>
-        <p:txBody>
-          <a:bodyPr wrap="square" lIns="0" tIns="0" rIns="0" bIns="0" rtlCol="0" anchor="ctr"/>
-          <a:lstStyle/>
-          <a:p>
-            <a:pPr algn="r" indent="0" marL="0">
-              <a:buNone/>
-            </a:pPr>
-            <a:r>
-              <a:rPr lang="en-US" sz="1400" dirty="0">
-                <a:solidFill>
-                  <a:srgbClr val="140C07"/>
-                </a:solidFill>
-                <a:latin typeface="Calibri" pitchFamily="34" charset="0"/>
-                <a:ea typeface="Calibri" pitchFamily="34" charset="-122"/>
-                <a:cs typeface="Calibri" pitchFamily="34" charset="-120"/>
-              </a:rPr>
-              <a:t>– $62.979</a:t>
-            </a:r>
-            <a:endParaRPr lang="en-US" sz="1400" dirty="0"/>
-          </a:p>
-        </p:txBody>
-      </p:sp>
-      <p:sp>
-        <p:nvSpPr>
-          <p:cNvPr id="9" name="Text 7"/>
-          <p:cNvSpPr/>
-          <p:nvPr/>
-        </p:nvSpPr>
-        <p:spPr>
-          <a:xfrm>
-            <a:off x="822960" y="5020056"/>
-            <a:ext cx="3108960" cy="384048"/>
-          </a:xfrm>
-          <a:prstGeom prst="rect">
-            <a:avLst/>
-          </a:prstGeom>
-          <a:noFill/>
-          <a:ln/>
-        </p:spPr>
-        <p:txBody>
-          <a:bodyPr wrap="square" lIns="0" tIns="0" rIns="0" bIns="0" rtlCol="0" anchor="ctr"/>
-          <a:lstStyle/>
-          <a:p>
-            <a:pPr indent="0" marL="0">
-              <a:buNone/>
-            </a:pPr>
-            <a:r>
-              <a:rPr lang="en-US" sz="1400" b="1" dirty="0">
-                <a:solidFill>
-                  <a:srgbClr val="140C07"/>
-                </a:solidFill>
-                <a:latin typeface="Calibri" pitchFamily="34" charset="0"/>
-                <a:ea typeface="Calibri" pitchFamily="34" charset="-122"/>
-                <a:cs typeface="Calibri" pitchFamily="34" charset="-120"/>
-              </a:rPr>
-              <a:t>Lo que recibo</a:t>
-            </a:r>
-            <a:endParaRPr lang="en-US" sz="1400" dirty="0"/>
-          </a:p>
-        </p:txBody>
-      </p:sp>
-      <p:sp>
-        <p:nvSpPr>
-          <p:cNvPr id="10" name="Text 8"/>
-          <p:cNvSpPr/>
-          <p:nvPr/>
-        </p:nvSpPr>
-        <p:spPr>
-          <a:xfrm>
-            <a:off x="3931920" y="5020056"/>
-            <a:ext cx="2011680" cy="384048"/>
-          </a:xfrm>
-          <a:prstGeom prst="rect">
-            <a:avLst/>
-          </a:prstGeom>
-          <a:noFill/>
-          <a:ln/>
-        </p:spPr>
-        <p:txBody>
-          <a:bodyPr wrap="square" lIns="0" tIns="0" rIns="0" bIns="0" rtlCol="0" anchor="ctr"/>
-          <a:lstStyle/>
-          <a:p>
-            <a:pPr algn="r" indent="0" marL="0">
-              <a:buNone/>
-            </a:pPr>
-            <a:r>
-              <a:rPr lang="en-US" sz="1400" b="1" dirty="0">
-                <a:solidFill>
-                  <a:srgbClr val="140C07"/>
-                </a:solidFill>
-                <a:latin typeface="Calibri" pitchFamily="34" charset="0"/>
-                <a:ea typeface="Calibri" pitchFamily="34" charset="-122"/>
-                <a:cs typeface="Calibri" pitchFamily="34" charset="-120"/>
-              </a:rPr>
-              <a:t>$350.000</a:t>
-            </a:r>
-            <a:endParaRPr lang="en-US" sz="1400" dirty="0"/>
-          </a:p>
-        </p:txBody>
-      </p:sp>
-      <p:sp>
-        <p:nvSpPr>
-          <p:cNvPr id="11" name="Text 9"/>
-          <p:cNvSpPr/>
-          <p:nvPr/>
-        </p:nvSpPr>
-        <p:spPr>
-          <a:xfrm>
-            <a:off x="822960" y="5596128"/>
-            <a:ext cx="5852160" cy="310896"/>
-          </a:xfrm>
-          <a:prstGeom prst="rect">
-            <a:avLst/>
-          </a:prstGeom>
-          <a:noFill/>
-          <a:ln/>
-        </p:spPr>
-        <p:txBody>
-          <a:bodyPr wrap="square" lIns="0" tIns="0" rIns="0" bIns="0" rtlCol="0" anchor="ctr"/>
-          <a:lstStyle/>
-          <a:p>
-            <a:pPr indent="0" marL="0">
-              <a:buNone/>
-            </a:pPr>
-            <a:r>
-              <a:rPr lang="en-US" sz="1250" i="1" dirty="0">
-                <a:solidFill>
-                  <a:srgbClr val="140C07"/>
-                </a:solidFill>
-                <a:latin typeface="Calibri" pitchFamily="34" charset="0"/>
-                <a:ea typeface="Calibri" pitchFamily="34" charset="-122"/>
-                <a:cs typeface="Calibri" pitchFamily="34" charset="-120"/>
-              </a:rPr>
-              <a:t>Boleta de honorarios. La retención la declara PobreVermut.</a:t>
-            </a:r>
-            <a:endParaRPr lang="en-US" sz="1250" dirty="0"/>
-          </a:p>
-        </p:txBody>
-      </p:sp>
-      <p:sp>
-        <p:nvSpPr>
-          <p:cNvPr id="12" name="Text 10"/>
-          <p:cNvSpPr/>
-          <p:nvPr/>
-        </p:nvSpPr>
-        <p:spPr>
-          <a:xfrm>
-            <a:off x="7086600" y="1783080"/>
-            <a:ext cx="4282135" cy="274320"/>
+            <a:off x="822960" y="4617720"/>
+            <a:ext cx="4846320" cy="274320"/>
           </a:xfrm>
           <a:prstGeom prst="rect">
             <a:avLst/>
@@ -3343,14 +2854,14 @@
       </p:sp>
       <p:sp>
         <p:nvSpPr>
-          <p:cNvPr id="13" name="Text 11"/>
-          <p:cNvSpPr/>
-          <p:nvPr/>
-        </p:nvSpPr>
-        <p:spPr>
-          <a:xfrm>
-            <a:off x="7086600" y="2185416"/>
-            <a:ext cx="4282135" cy="1371600"/>
+          <p:cNvPr id="6" name="Text 4"/>
+          <p:cNvSpPr/>
+          <p:nvPr/>
+        </p:nvSpPr>
+        <p:spPr>
+          <a:xfrm>
+            <a:off x="822960" y="5010912"/>
+            <a:ext cx="4846320" cy="1234440"/>
           </a:xfrm>
           <a:prstGeom prst="rect">
             <a:avLst/>
@@ -3364,12 +2875,12 @@
           <a:p>
             <a:pPr indent="0" marL="0">
               <a:lnSpc>
-                <a:spcPct val="118000"/>
+                <a:spcPct val="120000"/>
               </a:lnSpc>
               <a:buNone/>
             </a:pPr>
             <a:r>
-              <a:rPr lang="en-US" sz="1900" b="1" dirty="0">
+              <a:rPr lang="en-US" sz="1600" b="1" dirty="0">
                 <a:solidFill>
                   <a:srgbClr val="140C07"/>
                 </a:solidFill>
@@ -3379,20 +2890,20 @@
               </a:rPr>
               <a:t>Entre $200.000 y $450.000 al mes según la fase, a nombre de PobreVermut.</a:t>
             </a:r>
-            <a:endParaRPr lang="en-US" sz="1900" dirty="0"/>
-          </a:p>
-        </p:txBody>
-      </p:sp>
-      <p:sp>
-        <p:nvSpPr>
-          <p:cNvPr id="14" name="Text 12"/>
-          <p:cNvSpPr/>
-          <p:nvPr/>
-        </p:nvSpPr>
-        <p:spPr>
-          <a:xfrm>
-            <a:off x="7086600" y="4160520"/>
-            <a:ext cx="4282135" cy="274320"/>
+            <a:endParaRPr lang="en-US" sz="1600" dirty="0"/>
+          </a:p>
+        </p:txBody>
+      </p:sp>
+      <p:sp>
+        <p:nvSpPr>
+          <p:cNvPr id="7" name="Text 5"/>
+          <p:cNvSpPr/>
+          <p:nvPr/>
+        </p:nvSpPr>
+        <p:spPr>
+          <a:xfrm>
+            <a:off x="6245352" y="4617720"/>
+            <a:ext cx="4846320" cy="274320"/>
           </a:xfrm>
           <a:prstGeom prst="rect">
             <a:avLst/>
@@ -3416,7 +2927,7 @@
                 <a:ea typeface="Arial" pitchFamily="34" charset="-122"/>
                 <a:cs typeface="Arial" pitchFamily="34" charset="-120"/>
               </a:rPr>
-              <a:t>LOS PRIMEROS 3 MESES, FIJO</a:t>
+              <a:t>UN PRIMER CICLO DE TRES MESES</a:t>
             </a:r>
             <a:endParaRPr lang="en-US" sz="1050" dirty="0"/>
           </a:p>
@@ -3424,14 +2935,14 @@
       </p:sp>
       <p:sp>
         <p:nvSpPr>
-          <p:cNvPr id="15" name="Text 13"/>
-          <p:cNvSpPr/>
-          <p:nvPr/>
-        </p:nvSpPr>
-        <p:spPr>
-          <a:xfrm>
-            <a:off x="7086600" y="4562856"/>
-            <a:ext cx="4282135" cy="1371600"/>
+          <p:cNvPr id="8" name="Text 6"/>
+          <p:cNvSpPr/>
+          <p:nvPr/>
+        </p:nvSpPr>
+        <p:spPr>
+          <a:xfrm>
+            <a:off x="6245352" y="5010912"/>
+            <a:ext cx="4846320" cy="1234440"/>
           </a:xfrm>
           <a:prstGeom prst="rect">
             <a:avLst/>
@@ -3445,12 +2956,12 @@
           <a:p>
             <a:pPr indent="0" marL="0">
               <a:lnSpc>
-                <a:spcPct val="118000"/>
+                <a:spcPct val="120000"/>
               </a:lnSpc>
               <a:buNone/>
             </a:pPr>
             <a:r>
-              <a:rPr lang="en-US" sz="1900" b="1" dirty="0">
+              <a:rPr lang="en-US" sz="1600" b="1" dirty="0">
                 <a:solidFill>
                   <a:srgbClr val="140C07"/>
                 </a:solidFill>
@@ -3458,9 +2969,9 @@
                 <a:ea typeface="Arial" pitchFamily="34" charset="-122"/>
                 <a:cs typeface="Arial" pitchFamily="34" charset="-120"/>
               </a:rPr>
-              <a:t>Al mes 3 revisamos el modelo y evaluamos sumar un variable sobre las ventas del ecommerce.</a:t>
-            </a:r>
-            <a:endParaRPr lang="en-US" sz="1900" dirty="0"/>
+              <a:t>Partimos con tres meses de trabajo. Al cierre revisamos juntos los resultados y definimos cómo seguir.</a:t>
+            </a:r>
+            <a:endParaRPr lang="en-US" sz="1600" dirty="0"/>
           </a:p>
         </p:txBody>
       </p:sp>
@@ -3498,14 +3009,34 @@
       </p:grpSpPr>
       <p:sp>
         <p:nvSpPr>
-          <p:cNvPr id="2" name="Text 0"/>
-          <p:cNvSpPr/>
-          <p:nvPr/>
-        </p:nvSpPr>
-        <p:spPr>
-          <a:xfrm>
-            <a:off x="822960" y="749808"/>
-            <a:ext cx="10545775" cy="274320"/>
+          <p:cNvPr id="2" name="Shape 0"/>
+          <p:cNvSpPr/>
+          <p:nvPr/>
+        </p:nvSpPr>
+        <p:spPr>
+          <a:xfrm>
+            <a:off x="5687568" y="1691640"/>
+            <a:ext cx="822960" cy="822960"/>
+          </a:xfrm>
+          <a:prstGeom prst="ellipse">
+            <a:avLst/>
+          </a:prstGeom>
+          <a:solidFill>
+            <a:srgbClr val="EF5B25"/>
+          </a:solidFill>
+          <a:ln/>
+        </p:spPr>
+      </p:sp>
+      <p:sp>
+        <p:nvSpPr>
+          <p:cNvPr id="3" name="Text 1"/>
+          <p:cNvSpPr/>
+          <p:nvPr/>
+        </p:nvSpPr>
+        <p:spPr>
+          <a:xfrm>
+            <a:off x="1371600" y="2999232"/>
+            <a:ext cx="9445752" cy="1005840"/>
           </a:xfrm>
           <a:prstGeom prst="rect">
             <a:avLst/>
@@ -3517,82 +3048,76 @@
           <a:bodyPr wrap="square" lIns="0" tIns="0" rIns="0" bIns="0" rtlCol="0" anchor="ctr"/>
           <a:lstStyle/>
           <a:p>
-            <a:pPr indent="0" marL="0">
-              <a:buNone/>
-            </a:pPr>
-            <a:r>
-              <a:rPr lang="en-US" sz="1100" b="1" spc="250" kern="0" dirty="0">
-                <a:solidFill>
-                  <a:srgbClr val="EF5B25"/>
+            <a:pPr algn="ctr" indent="0" marL="0">
+              <a:buNone/>
+            </a:pPr>
+            <a:r>
+              <a:rPr lang="en-US" sz="5200" b="1" dirty="0">
+                <a:solidFill>
+                  <a:srgbClr val="F2EEE9"/>
                 </a:solidFill>
                 <a:latin typeface="Arial" pitchFamily="34" charset="0"/>
                 <a:ea typeface="Arial" pitchFamily="34" charset="-122"/>
                 <a:cs typeface="Arial" pitchFamily="34" charset="-120"/>
               </a:rPr>
-              <a:t>04  —  PARA PARTIR</a:t>
-            </a:r>
-            <a:endParaRPr lang="en-US" sz="1100" dirty="0"/>
-          </a:p>
-        </p:txBody>
-      </p:sp>
-      <p:sp>
-        <p:nvSpPr>
-          <p:cNvPr id="3" name="Text 1"/>
-          <p:cNvSpPr/>
-          <p:nvPr/>
-        </p:nvSpPr>
-        <p:spPr>
-          <a:xfrm>
-            <a:off x="822960" y="1133856"/>
-            <a:ext cx="10545775" cy="731520"/>
-          </a:xfrm>
-          <a:prstGeom prst="rect">
-            <a:avLst/>
-          </a:prstGeom>
-          <a:noFill/>
-          <a:ln/>
-        </p:spPr>
-        <p:txBody>
-          <a:bodyPr wrap="square" lIns="0" tIns="0" rIns="0" bIns="0" rtlCol="0" anchor="ctr"/>
-          <a:lstStyle/>
-          <a:p>
-            <a:pPr indent="0" marL="0">
-              <a:buNone/>
-            </a:pPr>
-            <a:r>
-              <a:rPr lang="en-US" sz="3800" b="1" dirty="0">
-                <a:solidFill>
-                  <a:srgbClr val="F2EEE9"/>
+              <a:t>Trabajemos </a:t>
+            </a:r>
+            <a:pPr algn="ctr" indent="0" marL="0">
+              <a:buNone/>
+            </a:pPr>
+            <a:r>
+              <a:rPr lang="en-US" sz="5200" b="1" dirty="0">
+                <a:solidFill>
+                  <a:srgbClr val="EF5B25"/>
                 </a:solidFill>
                 <a:latin typeface="Arial" pitchFamily="34" charset="0"/>
                 <a:ea typeface="Arial" pitchFamily="34" charset="-122"/>
                 <a:cs typeface="Arial" pitchFamily="34" charset="-120"/>
               </a:rPr>
-              <a:t>Qué necesito</a:t>
-            </a:r>
-            <a:endParaRPr lang="en-US" sz="3800" dirty="0"/>
-          </a:p>
-        </p:txBody>
-      </p:sp>
-      <p:sp>
-        <p:nvSpPr>
-          <p:cNvPr id="4" name="Shape 2"/>
-          <p:cNvSpPr/>
-          <p:nvPr/>
-        </p:nvSpPr>
-        <p:spPr>
-          <a:xfrm>
-            <a:off x="822960" y="2688336"/>
-            <a:ext cx="146304" cy="146304"/>
-          </a:xfrm>
-          <a:prstGeom prst="ellipse">
-            <a:avLst/>
-          </a:prstGeom>
-          <a:solidFill>
-            <a:srgbClr val="EF5B25"/>
-          </a:solidFill>
-          <a:ln/>
-        </p:spPr>
+              <a:t>juntos.</a:t>
+            </a:r>
+            <a:endParaRPr lang="en-US" sz="5200" dirty="0"/>
+          </a:p>
+        </p:txBody>
+      </p:sp>
+      <p:sp>
+        <p:nvSpPr>
+          <p:cNvPr id="4" name="Text 2"/>
+          <p:cNvSpPr/>
+          <p:nvPr/>
+        </p:nvSpPr>
+        <p:spPr>
+          <a:xfrm>
+            <a:off x="1371600" y="4709160"/>
+            <a:ext cx="9445752" cy="329184"/>
+          </a:xfrm>
+          <a:prstGeom prst="rect">
+            <a:avLst/>
+          </a:prstGeom>
+          <a:noFill/>
+          <a:ln/>
+        </p:spPr>
+        <p:txBody>
+          <a:bodyPr wrap="square" lIns="0" tIns="0" rIns="0" bIns="0" rtlCol="0" anchor="ctr"/>
+          <a:lstStyle/>
+          <a:p>
+            <a:pPr algn="ctr" indent="0" marL="0">
+              <a:buNone/>
+            </a:pPr>
+            <a:r>
+              <a:rPr lang="en-US" sz="1600" b="1" dirty="0">
+                <a:solidFill>
+                  <a:srgbClr val="F2EEE9"/>
+                </a:solidFill>
+                <a:latin typeface="Arial" pitchFamily="34" charset="0"/>
+                <a:ea typeface="Arial" pitchFamily="34" charset="-122"/>
+                <a:cs typeface="Arial" pitchFamily="34" charset="-120"/>
+              </a:rPr>
+              <a:t>Nicolás</a:t>
+            </a:r>
+            <a:endParaRPr lang="en-US" sz="1600" dirty="0"/>
+          </a:p>
+        </p:txBody>
       </p:sp>
       <p:sp>
         <p:nvSpPr>
@@ -3602,8 +3127,8 @@
         </p:nvSpPr>
         <p:spPr>
           <a:xfrm>
-            <a:off x="1261872" y="2514600"/>
-            <a:ext cx="5943600" cy="475488"/>
+            <a:off x="1371600" y="5065776"/>
+            <a:ext cx="9445752" cy="329184"/>
           </a:xfrm>
           <a:prstGeom prst="rect">
             <a:avLst/>
@@ -3615,420 +3140,21 @@
           <a:bodyPr wrap="square" lIns="0" tIns="0" rIns="0" bIns="0" rtlCol="0" anchor="ctr"/>
           <a:lstStyle/>
           <a:p>
-            <a:pPr indent="0" marL="0">
-              <a:buNone/>
-            </a:pPr>
-            <a:r>
-              <a:rPr lang="en-US" sz="1700" dirty="0">
-                <a:solidFill>
-                  <a:srgbClr val="F2EEE9"/>
+            <a:pPr algn="ctr" indent="0" marL="0">
+              <a:buNone/>
+            </a:pPr>
+            <a:r>
+              <a:rPr lang="en-US" sz="1500" dirty="0">
+                <a:solidFill>
+                  <a:srgbClr val="8A807A"/>
                 </a:solidFill>
                 <a:latin typeface="Calibri" pitchFamily="34" charset="0"/>
                 <a:ea typeface="Calibri" pitchFamily="34" charset="-122"/>
                 <a:cs typeface="Calibri" pitchFamily="34" charset="-120"/>
               </a:rPr>
-              <a:t>Accesos a Meta, Instagram y Facebook</a:t>
-            </a:r>
-            <a:endParaRPr lang="en-US" sz="1700" dirty="0"/>
-          </a:p>
-        </p:txBody>
-      </p:sp>
-      <p:sp>
-        <p:nvSpPr>
-          <p:cNvPr id="6" name="Shape 4"/>
-          <p:cNvSpPr/>
-          <p:nvPr/>
-        </p:nvSpPr>
-        <p:spPr>
-          <a:xfrm>
-            <a:off x="822960" y="3383280"/>
-            <a:ext cx="146304" cy="146304"/>
-          </a:xfrm>
-          <a:prstGeom prst="ellipse">
-            <a:avLst/>
-          </a:prstGeom>
-          <a:solidFill>
-            <a:srgbClr val="EF5B25"/>
-          </a:solidFill>
-          <a:ln/>
-        </p:spPr>
-      </p:sp>
-      <p:sp>
-        <p:nvSpPr>
-          <p:cNvPr id="7" name="Text 5"/>
-          <p:cNvSpPr/>
-          <p:nvPr/>
-        </p:nvSpPr>
-        <p:spPr>
-          <a:xfrm>
-            <a:off x="1261872" y="3209544"/>
-            <a:ext cx="5943600" cy="475488"/>
-          </a:xfrm>
-          <a:prstGeom prst="rect">
-            <a:avLst/>
-          </a:prstGeom>
-          <a:noFill/>
-          <a:ln/>
-        </p:spPr>
-        <p:txBody>
-          <a:bodyPr wrap="square" lIns="0" tIns="0" rIns="0" bIns="0" rtlCol="0" anchor="ctr"/>
-          <a:lstStyle/>
-          <a:p>
-            <a:pPr indent="0" marL="0">
-              <a:buNone/>
-            </a:pPr>
-            <a:r>
-              <a:rPr lang="en-US" sz="1700" dirty="0">
-                <a:solidFill>
-                  <a:srgbClr val="F2EEE9"/>
-                </a:solidFill>
-                <a:latin typeface="Calibri" pitchFamily="34" charset="0"/>
-                <a:ea typeface="Calibri" pitchFamily="34" charset="-122"/>
-                <a:cs typeface="Calibri" pitchFamily="34" charset="-120"/>
-              </a:rPr>
-              <a:t>Acceso al ecommerce para píxel y catálogo</a:t>
-            </a:r>
-            <a:endParaRPr lang="en-US" sz="1700" dirty="0"/>
-          </a:p>
-        </p:txBody>
-      </p:sp>
-      <p:sp>
-        <p:nvSpPr>
-          <p:cNvPr id="8" name="Shape 6"/>
-          <p:cNvSpPr/>
-          <p:nvPr/>
-        </p:nvSpPr>
-        <p:spPr>
-          <a:xfrm>
-            <a:off x="822960" y="4078224"/>
-            <a:ext cx="146304" cy="146304"/>
-          </a:xfrm>
-          <a:prstGeom prst="ellipse">
-            <a:avLst/>
-          </a:prstGeom>
-          <a:solidFill>
-            <a:srgbClr val="EF5B25"/>
-          </a:solidFill>
-          <a:ln/>
-        </p:spPr>
-      </p:sp>
-      <p:sp>
-        <p:nvSpPr>
-          <p:cNvPr id="9" name="Text 7"/>
-          <p:cNvSpPr/>
-          <p:nvPr/>
-        </p:nvSpPr>
-        <p:spPr>
-          <a:xfrm>
-            <a:off x="1261872" y="3904488"/>
-            <a:ext cx="5943600" cy="475488"/>
-          </a:xfrm>
-          <a:prstGeom prst="rect">
-            <a:avLst/>
-          </a:prstGeom>
-          <a:noFill/>
-          <a:ln/>
-        </p:spPr>
-        <p:txBody>
-          <a:bodyPr wrap="square" lIns="0" tIns="0" rIns="0" bIns="0" rtlCol="0" anchor="ctr"/>
-          <a:lstStyle/>
-          <a:p>
-            <a:pPr indent="0" marL="0">
-              <a:buNone/>
-            </a:pPr>
-            <a:r>
-              <a:rPr lang="en-US" sz="1700" dirty="0">
-                <a:solidFill>
-                  <a:srgbClr val="F2EEE9"/>
-                </a:solidFill>
-                <a:latin typeface="Calibri" pitchFamily="34" charset="0"/>
-                <a:ea typeface="Calibri" pitchFamily="34" charset="-122"/>
-                <a:cs typeface="Calibri" pitchFamily="34" charset="-120"/>
-              </a:rPr>
-              <a:t>Presupuesto de pauta confirmado</a:t>
-            </a:r>
-            <a:endParaRPr lang="en-US" sz="1700" dirty="0"/>
-          </a:p>
-        </p:txBody>
-      </p:sp>
-      <p:sp>
-        <p:nvSpPr>
-          <p:cNvPr id="10" name="Shape 8"/>
-          <p:cNvSpPr/>
-          <p:nvPr/>
-        </p:nvSpPr>
-        <p:spPr>
-          <a:xfrm>
-            <a:off x="822960" y="4773168"/>
-            <a:ext cx="146304" cy="146304"/>
-          </a:xfrm>
-          <a:prstGeom prst="ellipse">
-            <a:avLst/>
-          </a:prstGeom>
-          <a:solidFill>
-            <a:srgbClr val="EF5B25"/>
-          </a:solidFill>
-          <a:ln/>
-        </p:spPr>
-      </p:sp>
-      <p:sp>
-        <p:nvSpPr>
-          <p:cNvPr id="11" name="Text 9"/>
-          <p:cNvSpPr/>
-          <p:nvPr/>
-        </p:nvSpPr>
-        <p:spPr>
-          <a:xfrm>
-            <a:off x="1261872" y="4599432"/>
-            <a:ext cx="5943600" cy="475488"/>
-          </a:xfrm>
-          <a:prstGeom prst="rect">
-            <a:avLst/>
-          </a:prstGeom>
-          <a:noFill/>
-          <a:ln/>
-        </p:spPr>
-        <p:txBody>
-          <a:bodyPr wrap="square" lIns="0" tIns="0" rIns="0" bIns="0" rtlCol="0" anchor="ctr"/>
-          <a:lstStyle/>
-          <a:p>
-            <a:pPr indent="0" marL="0">
-              <a:buNone/>
-            </a:pPr>
-            <a:r>
-              <a:rPr lang="en-US" sz="1700" dirty="0">
-                <a:solidFill>
-                  <a:srgbClr val="F2EEE9"/>
-                </a:solidFill>
-                <a:latin typeface="Calibri" pitchFamily="34" charset="0"/>
-                <a:ea typeface="Calibri" pitchFamily="34" charset="-122"/>
-                <a:cs typeface="Calibri" pitchFamily="34" charset="-120"/>
-              </a:rPr>
-              <a:t>Creativos del equipo creativo</a:t>
-            </a:r>
-            <a:endParaRPr lang="en-US" sz="1700" dirty="0"/>
-          </a:p>
-        </p:txBody>
-      </p:sp>
-      <p:sp>
-        <p:nvSpPr>
-          <p:cNvPr id="12" name="Shape 10"/>
-          <p:cNvSpPr/>
-          <p:nvPr/>
-        </p:nvSpPr>
-        <p:spPr>
-          <a:xfrm>
-            <a:off x="822960" y="5468112"/>
-            <a:ext cx="146304" cy="146304"/>
-          </a:xfrm>
-          <a:prstGeom prst="ellipse">
-            <a:avLst/>
-          </a:prstGeom>
-          <a:solidFill>
-            <a:srgbClr val="EF5B25"/>
-          </a:solidFill>
-          <a:ln/>
-        </p:spPr>
-      </p:sp>
-      <p:sp>
-        <p:nvSpPr>
-          <p:cNvPr id="13" name="Text 11"/>
-          <p:cNvSpPr/>
-          <p:nvPr/>
-        </p:nvSpPr>
-        <p:spPr>
-          <a:xfrm>
-            <a:off x="1261872" y="5294376"/>
-            <a:ext cx="5943600" cy="475488"/>
-          </a:xfrm>
-          <a:prstGeom prst="rect">
-            <a:avLst/>
-          </a:prstGeom>
-          <a:noFill/>
-          <a:ln/>
-        </p:spPr>
-        <p:txBody>
-          <a:bodyPr wrap="square" lIns="0" tIns="0" rIns="0" bIns="0" rtlCol="0" anchor="ctr"/>
-          <a:lstStyle/>
-          <a:p>
-            <a:pPr indent="0" marL="0">
-              <a:buNone/>
-            </a:pPr>
-            <a:r>
-              <a:rPr lang="en-US" sz="1700" dirty="0">
-                <a:solidFill>
-                  <a:srgbClr val="F2EEE9"/>
-                </a:solidFill>
-                <a:latin typeface="Calibri" pitchFamily="34" charset="0"/>
-                <a:ea typeface="Calibri" pitchFamily="34" charset="-122"/>
-                <a:cs typeface="Calibri" pitchFamily="34" charset="-120"/>
-              </a:rPr>
-              <a:t>Un kickoff de 45 minutos</a:t>
-            </a:r>
-            <a:endParaRPr lang="en-US" sz="1700" dirty="0"/>
-          </a:p>
-        </p:txBody>
-      </p:sp>
-      <p:sp>
-        <p:nvSpPr>
-          <p:cNvPr id="14" name="Text 12"/>
-          <p:cNvSpPr/>
-          <p:nvPr/>
-        </p:nvSpPr>
-        <p:spPr>
-          <a:xfrm>
-            <a:off x="7589520" y="2468880"/>
-            <a:ext cx="3779215" cy="1554480"/>
-          </a:xfrm>
-          <a:prstGeom prst="rect">
-            <a:avLst/>
-          </a:prstGeom>
-          <a:noFill/>
-          <a:ln/>
-        </p:spPr>
-        <p:txBody>
-          <a:bodyPr wrap="square" lIns="0" tIns="0" rIns="0" bIns="0" rtlCol="0" anchor="t"/>
-          <a:lstStyle/>
-          <a:p>
-            <a:pPr indent="0" marL="0">
-              <a:lnSpc>
-                <a:spcPct val="108000"/>
-              </a:lnSpc>
-              <a:buNone/>
-            </a:pPr>
-            <a:r>
-              <a:rPr lang="en-US" sz="3000" b="1" dirty="0">
-                <a:solidFill>
-                  <a:srgbClr val="EF5B25"/>
-                </a:solidFill>
-                <a:latin typeface="Arial" pitchFamily="34" charset="0"/>
-                <a:ea typeface="Arial" pitchFamily="34" charset="-122"/>
-                <a:cs typeface="Arial" pitchFamily="34" charset="-120"/>
-              </a:rPr>
-              <a:t>Campañas activas</a:t>
-            </a:r>
-            <a:endParaRPr lang="en-US" sz="3000" dirty="0"/>
-          </a:p>
-          <a:p>
-            <a:pPr indent="0" marL="0">
-              <a:lnSpc>
-                <a:spcPct val="108000"/>
-              </a:lnSpc>
-              <a:buNone/>
-            </a:pPr>
-            <a:r>
-              <a:rPr lang="en-US" sz="3000" b="1" dirty="0">
-                <a:solidFill>
-                  <a:srgbClr val="EF5B25"/>
-                </a:solidFill>
-                <a:latin typeface="Arial" pitchFamily="34" charset="0"/>
-                <a:ea typeface="Arial" pitchFamily="34" charset="-122"/>
-                <a:cs typeface="Arial" pitchFamily="34" charset="-120"/>
-              </a:rPr>
-              <a:t>en dos semanas.</a:t>
-            </a:r>
-            <a:endParaRPr lang="en-US" sz="3000" dirty="0"/>
-          </a:p>
-        </p:txBody>
-      </p:sp>
-      <p:sp>
-        <p:nvSpPr>
-          <p:cNvPr id="15" name="Text 13"/>
-          <p:cNvSpPr/>
-          <p:nvPr/>
-        </p:nvSpPr>
-        <p:spPr>
-          <a:xfrm>
-            <a:off x="7589520" y="4160520"/>
-            <a:ext cx="3779215" cy="310896"/>
-          </a:xfrm>
-          <a:prstGeom prst="rect">
-            <a:avLst/>
-          </a:prstGeom>
-          <a:noFill/>
-          <a:ln/>
-        </p:spPr>
-        <p:txBody>
-          <a:bodyPr wrap="square" lIns="0" tIns="0" rIns="0" bIns="0" rtlCol="0" anchor="ctr"/>
-          <a:lstStyle/>
-          <a:p>
-            <a:pPr indent="0" marL="0">
-              <a:buNone/>
-            </a:pPr>
-            <a:r>
-              <a:rPr lang="en-US" sz="1500" b="1" dirty="0">
-                <a:solidFill>
-                  <a:srgbClr val="F2EEE9"/>
-                </a:solidFill>
-                <a:latin typeface="Arial" pitchFamily="34" charset="0"/>
-                <a:ea typeface="Arial" pitchFamily="34" charset="-122"/>
-                <a:cs typeface="Arial" pitchFamily="34" charset="-120"/>
-              </a:rPr>
-              <a:t>Nicolás</a:t>
+              <a:t>nicolas@sherpasstudio.cl  ·  +56 9 3125 6539</a:t>
             </a:r>
             <a:endParaRPr lang="en-US" sz="1500" dirty="0"/>
-          </a:p>
-        </p:txBody>
-      </p:sp>
-      <p:sp>
-        <p:nvSpPr>
-          <p:cNvPr id="16" name="Text 14"/>
-          <p:cNvSpPr/>
-          <p:nvPr/>
-        </p:nvSpPr>
-        <p:spPr>
-          <a:xfrm>
-            <a:off x="7589520" y="4498848"/>
-            <a:ext cx="3779215" cy="621792"/>
-          </a:xfrm>
-          <a:prstGeom prst="rect">
-            <a:avLst/>
-          </a:prstGeom>
-          <a:noFill/>
-          <a:ln/>
-        </p:spPr>
-        <p:txBody>
-          <a:bodyPr wrap="square" lIns="0" tIns="0" rIns="0" bIns="0" rtlCol="0" anchor="ctr"/>
-          <a:lstStyle/>
-          <a:p>
-            <a:pPr indent="0" marL="0">
-              <a:lnSpc>
-                <a:spcPct val="125000"/>
-              </a:lnSpc>
-              <a:buNone/>
-            </a:pPr>
-            <a:r>
-              <a:rPr lang="en-US" sz="1400" dirty="0">
-                <a:solidFill>
-                  <a:srgbClr val="8A807A"/>
-                </a:solidFill>
-                <a:latin typeface="Calibri" pitchFamily="34" charset="0"/>
-                <a:ea typeface="Calibri" pitchFamily="34" charset="-122"/>
-                <a:cs typeface="Calibri" pitchFamily="34" charset="-120"/>
-              </a:rPr>
-              <a:t>nicolas@sherpasstudio.cl</a:t>
-            </a:r>
-            <a:endParaRPr lang="en-US" sz="1400" dirty="0"/>
-          </a:p>
-          <a:p>
-            <a:pPr indent="0" marL="0">
-              <a:lnSpc>
-                <a:spcPct val="125000"/>
-              </a:lnSpc>
-              <a:buNone/>
-            </a:pPr>
-            <a:r>
-              <a:rPr lang="en-US" sz="1400" dirty="0">
-                <a:solidFill>
-                  <a:srgbClr val="8A807A"/>
-                </a:solidFill>
-                <a:latin typeface="Calibri" pitchFamily="34" charset="0"/>
-                <a:ea typeface="Calibri" pitchFamily="34" charset="-122"/>
-                <a:cs typeface="Calibri" pitchFamily="34" charset="-120"/>
-              </a:rPr>
-              <a:t>+56 9 3125 6539</a:t>
-            </a:r>
-            <a:endParaRPr lang="en-US" sz="1400" dirty="0"/>
           </a:p>
         </p:txBody>
       </p:sp>

--- a/propuestas/pobrevermut/PobreVermut - Propuesta Campanas 2026.pptx
+++ b/propuestas/pobrevermut/PobreVermut - Propuesta Campanas 2026.pptx
@@ -1213,7 +1213,7 @@
     <p:bg>
       <p:bgPr>
         <a:solidFill>
-          <a:srgbClr val="0F0E0D"/>
+          <a:srgbClr val="3A1842"/>
         </a:solidFill>
       </p:bgPr>
     </p:bg>
@@ -1231,36 +1231,40 @@
           <a:chExt cx="0" cy="0"/>
         </a:xfrm>
       </p:grpSpPr>
-      <p:sp>
-        <p:nvSpPr>
-          <p:cNvPr id="2" name="Shape 0"/>
-          <p:cNvSpPr/>
-          <p:nvPr/>
-        </p:nvSpPr>
-        <p:spPr>
-          <a:xfrm>
-            <a:off x="9006840" y="2487168"/>
-            <a:ext cx="2377440" cy="2377440"/>
-          </a:xfrm>
-          <a:prstGeom prst="ellipse">
-            <a:avLst/>
-          </a:prstGeom>
-          <a:solidFill>
-            <a:srgbClr val="EF5B25"/>
-          </a:solidFill>
-          <a:ln/>
-        </p:spPr>
-      </p:sp>
-      <p:sp>
-        <p:nvSpPr>
-          <p:cNvPr id="3" name="Text 1"/>
-          <p:cNvSpPr/>
-          <p:nvPr/>
-        </p:nvSpPr>
-        <p:spPr>
-          <a:xfrm>
-            <a:off x="822960" y="868680"/>
-            <a:ext cx="6400800" cy="310896"/>
+      <p:pic>
+        <p:nvPicPr>
+          <p:cNvPr id="2" name="Image 0" descr="/tmp/claude-0/-home-user-Gmb-Aagent/415d07b8-2eab-51b2-81d2-2f92b3b46afc/scratchpad/marca/vaso-magenta.png">    </p:cNvPr>
+          <p:cNvPicPr>
+            <a:picLocks noChangeAspect="1"/>
+          </p:cNvPicPr>
+          <p:nvPr/>
+        </p:nvPicPr>
+        <p:blipFill>
+          <a:blip r:embed="rId1"/>
+          <a:stretch>
+            <a:fillRect/>
+          </a:stretch>
+        </p:blipFill>
+        <p:spPr>
+          <a:xfrm>
+            <a:off x="9555480" y="1847088"/>
+            <a:ext cx="1792224" cy="2843784"/>
+          </a:xfrm>
+          <a:prstGeom prst="rect">
+            <a:avLst/>
+          </a:prstGeom>
+        </p:spPr>
+      </p:pic>
+      <p:sp>
+        <p:nvSpPr>
+          <p:cNvPr id="3" name="Text 0"/>
+          <p:cNvSpPr/>
+          <p:nvPr/>
+        </p:nvSpPr>
+        <p:spPr>
+          <a:xfrm>
+            <a:off x="822960" y="804672"/>
+            <a:ext cx="6858000" cy="347472"/>
           </a:xfrm>
           <a:prstGeom prst="rect">
             <a:avLst/>
@@ -1276,9 +1280,9 @@
               <a:buNone/>
             </a:pPr>
             <a:r>
-              <a:rPr lang="en-US" sz="1200" b="1" spc="600" kern="0" dirty="0">
-                <a:solidFill>
-                  <a:srgbClr val="EF5B25"/>
+              <a:rPr lang="en-US" sz="1500" spc="900" kern="0" dirty="0">
+                <a:solidFill>
+                  <a:srgbClr val="FFFFFF"/>
                 </a:solidFill>
                 <a:latin typeface="Arial" pitchFamily="34" charset="0"/>
                 <a:ea typeface="Arial" pitchFamily="34" charset="-122"/>
@@ -1286,20 +1290,20 @@
               </a:rPr>
               <a:t>POBREVERMUT</a:t>
             </a:r>
-            <a:endParaRPr lang="en-US" sz="1200" dirty="0"/>
-          </a:p>
-        </p:txBody>
-      </p:sp>
-      <p:sp>
-        <p:nvSpPr>
-          <p:cNvPr id="4" name="Text 2"/>
-          <p:cNvSpPr/>
-          <p:nvPr/>
-        </p:nvSpPr>
-        <p:spPr>
-          <a:xfrm>
-            <a:off x="822960" y="2743200"/>
-            <a:ext cx="7863840" cy="1920240"/>
+            <a:endParaRPr lang="en-US" sz="1500" dirty="0"/>
+          </a:p>
+        </p:txBody>
+      </p:sp>
+      <p:sp>
+        <p:nvSpPr>
+          <p:cNvPr id="4" name="Text 1"/>
+          <p:cNvSpPr/>
+          <p:nvPr/>
+        </p:nvSpPr>
+        <p:spPr>
+          <a:xfrm>
+            <a:off x="822960" y="2423160"/>
+            <a:ext cx="8412480" cy="2011680"/>
           </a:xfrm>
           <a:prstGeom prst="rect">
             <a:avLst/>
@@ -1313,40 +1317,40 @@
           <a:p>
             <a:pPr indent="0" marL="0">
               <a:lnSpc>
-                <a:spcPct val="102000"/>
+                <a:spcPct val="100000"/>
               </a:lnSpc>
               <a:buNone/>
             </a:pPr>
             <a:r>
               <a:rPr lang="en-US" sz="5400" b="1" dirty="0">
                 <a:solidFill>
-                  <a:srgbClr val="F2EEE9"/>
+                  <a:srgbClr val="FFFFFF"/>
                 </a:solidFill>
                 <a:latin typeface="Arial" pitchFamily="34" charset="0"/>
                 <a:ea typeface="Arial" pitchFamily="34" charset="-122"/>
                 <a:cs typeface="Arial" pitchFamily="34" charset="-120"/>
               </a:rPr>
-              <a:t>Campañas para</a:t>
+              <a:t>CAMPAÑAS PARA</a:t>
             </a:r>
             <a:endParaRPr lang="en-US" sz="5400" dirty="0"/>
           </a:p>
           <a:p>
             <a:pPr indent="0" marL="0">
               <a:lnSpc>
-                <a:spcPct val="102000"/>
+                <a:spcPct val="100000"/>
               </a:lnSpc>
               <a:buNone/>
             </a:pPr>
             <a:r>
               <a:rPr lang="en-US" sz="5400" b="1" dirty="0">
                 <a:solidFill>
-                  <a:srgbClr val="EF5B25"/>
+                  <a:srgbClr val="DE27A0"/>
                 </a:solidFill>
                 <a:latin typeface="Arial" pitchFamily="34" charset="0"/>
                 <a:ea typeface="Arial" pitchFamily="34" charset="-122"/>
                 <a:cs typeface="Arial" pitchFamily="34" charset="-120"/>
               </a:rPr>
-              <a:t>vender online</a:t>
+              <a:t>VENDER ONLINE</a:t>
             </a:r>
             <a:endParaRPr lang="en-US" sz="5400" dirty="0"/>
           </a:p>
@@ -1354,14 +1358,14 @@
       </p:sp>
       <p:sp>
         <p:nvSpPr>
-          <p:cNvPr id="5" name="Text 3"/>
-          <p:cNvSpPr/>
-          <p:nvPr/>
-        </p:nvSpPr>
-        <p:spPr>
-          <a:xfrm>
-            <a:off x="822960" y="4828032"/>
-            <a:ext cx="7863840" cy="365760"/>
+          <p:cNvPr id="5" name="Text 2"/>
+          <p:cNvSpPr/>
+          <p:nvPr/>
+        </p:nvSpPr>
+        <p:spPr>
+          <a:xfrm>
+            <a:off x="822960" y="4663440"/>
+            <a:ext cx="8412480" cy="310896"/>
           </a:xfrm>
           <a:prstGeom prst="rect">
             <a:avLst/>
@@ -1377,30 +1381,30 @@
               <a:buNone/>
             </a:pPr>
             <a:r>
-              <a:rPr lang="en-US" sz="1700" dirty="0">
-                <a:solidFill>
-                  <a:srgbClr val="8A807A"/>
-                </a:solidFill>
-                <a:latin typeface="Calibri" pitchFamily="34" charset="0"/>
-                <a:ea typeface="Calibri" pitchFamily="34" charset="-122"/>
-                <a:cs typeface="Calibri" pitchFamily="34" charset="-120"/>
-              </a:rPr>
-              <a:t>Ya hay marca, comunidad y ecommerce. Ahora, a vender.</a:t>
-            </a:r>
-            <a:endParaRPr lang="en-US" sz="1700" dirty="0"/>
-          </a:p>
-        </p:txBody>
-      </p:sp>
-      <p:sp>
-        <p:nvSpPr>
-          <p:cNvPr id="6" name="Text 4"/>
-          <p:cNvSpPr/>
-          <p:nvPr/>
-        </p:nvSpPr>
-        <p:spPr>
-          <a:xfrm>
-            <a:off x="822960" y="5742432"/>
-            <a:ext cx="5486400" cy="274320"/>
+              <a:rPr lang="en-US" sz="1200" b="1" spc="100" kern="0" dirty="0">
+                <a:solidFill>
+                  <a:srgbClr val="BFA3C8"/>
+                </a:solidFill>
+                <a:latin typeface="Courier New" pitchFamily="34" charset="0"/>
+                <a:ea typeface="Courier New" pitchFamily="34" charset="-122"/>
+                <a:cs typeface="Courier New" pitchFamily="34" charset="-120"/>
+              </a:rPr>
+              <a:t>YA HAY MARCA, COMUNIDAD Y ECOMMERCE. AHORA, A VENDER.</a:t>
+            </a:r>
+            <a:endParaRPr lang="en-US" sz="1200" dirty="0"/>
+          </a:p>
+        </p:txBody>
+      </p:sp>
+      <p:sp>
+        <p:nvSpPr>
+          <p:cNvPr id="6" name="Text 3"/>
+          <p:cNvSpPr/>
+          <p:nvPr/>
+        </p:nvSpPr>
+        <p:spPr>
+          <a:xfrm>
+            <a:off x="822960" y="5705856"/>
+            <a:ext cx="5943600" cy="274320"/>
           </a:xfrm>
           <a:prstGeom prst="rect">
             <a:avLst/>
@@ -1416,30 +1420,30 @@
               <a:buNone/>
             </a:pPr>
             <a:r>
-              <a:rPr lang="en-US" sz="1300" dirty="0">
-                <a:solidFill>
-                  <a:srgbClr val="8A807A"/>
-                </a:solidFill>
-                <a:latin typeface="Calibri" pitchFamily="34" charset="0"/>
-                <a:ea typeface="Calibri" pitchFamily="34" charset="-122"/>
-                <a:cs typeface="Calibri" pitchFamily="34" charset="-120"/>
-              </a:rPr>
-              <a:t>Propuesta  ·  Agosto 2026</a:t>
-            </a:r>
-            <a:endParaRPr lang="en-US" sz="1300" dirty="0"/>
-          </a:p>
-        </p:txBody>
-      </p:sp>
-      <p:sp>
-        <p:nvSpPr>
-          <p:cNvPr id="7" name="Text 5"/>
+              <a:rPr lang="en-US" sz="1100" b="1" spc="100" kern="0" dirty="0">
+                <a:solidFill>
+                  <a:srgbClr val="BFA3C8"/>
+                </a:solidFill>
+                <a:latin typeface="Courier New" pitchFamily="34" charset="0"/>
+                <a:ea typeface="Courier New" pitchFamily="34" charset="-122"/>
+                <a:cs typeface="Courier New" pitchFamily="34" charset="-120"/>
+              </a:rPr>
+              <a:t>PROPUESTA  ·  AGOSTO 2026</a:t>
+            </a:r>
+            <a:endParaRPr lang="en-US" sz="1100" dirty="0"/>
+          </a:p>
+        </p:txBody>
+      </p:sp>
+      <p:sp>
+        <p:nvSpPr>
+          <p:cNvPr id="7" name="Text 4"/>
           <p:cNvSpPr/>
           <p:nvPr/>
         </p:nvSpPr>
         <p:spPr>
           <a:xfrm>
             <a:off x="822960" y="6035040"/>
-            <a:ext cx="5486400" cy="274320"/>
+            <a:ext cx="5943600" cy="274320"/>
           </a:xfrm>
           <a:prstGeom prst="rect">
             <a:avLst/>
@@ -1455,17 +1459,17 @@
               <a:buNone/>
             </a:pPr>
             <a:r>
-              <a:rPr lang="en-US" sz="1300" b="1" dirty="0">
-                <a:solidFill>
-                  <a:srgbClr val="F2EEE9"/>
-                </a:solidFill>
-                <a:latin typeface="Calibri" pitchFamily="34" charset="0"/>
-                <a:ea typeface="Calibri" pitchFamily="34" charset="-122"/>
-                <a:cs typeface="Calibri" pitchFamily="34" charset="-120"/>
-              </a:rPr>
-              <a:t>Nicolás  ·  nicolas@sherpasstudio.cl</a:t>
-            </a:r>
-            <a:endParaRPr lang="en-US" sz="1300" dirty="0"/>
+              <a:rPr lang="en-US" sz="1100" b="1" spc="100" kern="0" dirty="0">
+                <a:solidFill>
+                  <a:srgbClr val="FFFFFF"/>
+                </a:solidFill>
+                <a:latin typeface="Courier New" pitchFamily="34" charset="0"/>
+                <a:ea typeface="Courier New" pitchFamily="34" charset="-122"/>
+                <a:cs typeface="Courier New" pitchFamily="34" charset="-120"/>
+              </a:rPr>
+              <a:t>NICOLÁS  ·  NICOLAS@SHERPASSTUDIO.CL</a:t>
+            </a:r>
+            <a:endParaRPr lang="en-US" sz="1100" dirty="0"/>
           </a:p>
         </p:txBody>
       </p:sp>
@@ -1483,7 +1487,7 @@
     <p:bg>
       <p:bgPr>
         <a:solidFill>
-          <a:srgbClr val="0F0E0D"/>
+          <a:srgbClr val="3A1842"/>
         </a:solidFill>
       </p:bgPr>
     </p:bg>
@@ -1526,15 +1530,93 @@
               <a:buNone/>
             </a:pPr>
             <a:r>
-              <a:rPr lang="en-US" sz="1100" b="1" spc="250" kern="0" dirty="0">
-                <a:solidFill>
-                  <a:srgbClr val="EF5B25"/>
+              <a:rPr lang="en-US" sz="1200" b="1" spc="200" kern="0" dirty="0">
+                <a:solidFill>
+                  <a:srgbClr val="DE27A0"/>
+                </a:solidFill>
+                <a:latin typeface="Courier New" pitchFamily="34" charset="0"/>
+                <a:ea typeface="Courier New" pitchFamily="34" charset="-122"/>
+                <a:cs typeface="Courier New" pitchFamily="34" charset="-120"/>
+              </a:rPr>
+              <a:t>01  —  EL PLAN</a:t>
+            </a:r>
+            <a:endParaRPr lang="en-US" sz="1200" dirty="0"/>
+          </a:p>
+        </p:txBody>
+      </p:sp>
+      <p:sp>
+        <p:nvSpPr>
+          <p:cNvPr id="3" name="Text 1"/>
+          <p:cNvSpPr/>
+          <p:nvPr/>
+        </p:nvSpPr>
+        <p:spPr>
+          <a:xfrm>
+            <a:off x="822960" y="1152144"/>
+            <a:ext cx="10545775" cy="731520"/>
+          </a:xfrm>
+          <a:prstGeom prst="rect">
+            <a:avLst/>
+          </a:prstGeom>
+          <a:noFill/>
+          <a:ln/>
+        </p:spPr>
+        <p:txBody>
+          <a:bodyPr wrap="square" lIns="0" tIns="0" rIns="0" bIns="0" rtlCol="0" anchor="ctr"/>
+          <a:lstStyle/>
+          <a:p>
+            <a:pPr indent="0" marL="0">
+              <a:buNone/>
+            </a:pPr>
+            <a:r>
+              <a:rPr lang="en-US" sz="3600" b="1" dirty="0">
+                <a:solidFill>
+                  <a:srgbClr val="FFFFFF"/>
                 </a:solidFill>
                 <a:latin typeface="Arial" pitchFamily="34" charset="0"/>
                 <a:ea typeface="Arial" pitchFamily="34" charset="-122"/>
                 <a:cs typeface="Arial" pitchFamily="34" charset="-120"/>
               </a:rPr>
-              <a:t>01  —  EL PLAN</a:t>
+              <a:t>TRES FASES, UN OBJETIVO</a:t>
+            </a:r>
+            <a:endParaRPr lang="en-US" sz="3600" dirty="0"/>
+          </a:p>
+        </p:txBody>
+      </p:sp>
+      <p:sp>
+        <p:nvSpPr>
+          <p:cNvPr id="4" name="Text 2"/>
+          <p:cNvSpPr/>
+          <p:nvPr/>
+        </p:nvSpPr>
+        <p:spPr>
+          <a:xfrm>
+            <a:off x="822960" y="1975104"/>
+            <a:ext cx="10545775" cy="292608"/>
+          </a:xfrm>
+          <a:prstGeom prst="rect">
+            <a:avLst/>
+          </a:prstGeom>
+          <a:noFill/>
+          <a:ln/>
+        </p:spPr>
+        <p:txBody>
+          <a:bodyPr wrap="square" lIns="0" tIns="0" rIns="0" bIns="0" rtlCol="0" anchor="ctr"/>
+          <a:lstStyle/>
+          <a:p>
+            <a:pPr indent="0" marL="0">
+              <a:buNone/>
+            </a:pPr>
+            <a:r>
+              <a:rPr lang="en-US" sz="1100" b="1" spc="100" kern="0" dirty="0">
+                <a:solidFill>
+                  <a:srgbClr val="BFA3C8"/>
+                </a:solidFill>
+                <a:latin typeface="Courier New" pitchFamily="34" charset="0"/>
+                <a:ea typeface="Courier New" pitchFamily="34" charset="-122"/>
+                <a:cs typeface="Courier New" pitchFamily="34" charset="-120"/>
+              </a:rPr>
+              <a:t>CADA FASE CONSTRUYE LO QUE LA SIGUIENTE NECESITA.</a:t>
             </a:r>
             <a:endParaRPr lang="en-US" sz="1100" dirty="0"/>
           </a:p>
@@ -1542,53 +1624,53 @@
       </p:sp>
       <p:sp>
         <p:nvSpPr>
-          <p:cNvPr id="3" name="Text 1"/>
-          <p:cNvSpPr/>
-          <p:nvPr/>
-        </p:nvSpPr>
-        <p:spPr>
-          <a:xfrm>
-            <a:off x="822960" y="1133856"/>
-            <a:ext cx="10545775" cy="731520"/>
-          </a:xfrm>
-          <a:prstGeom prst="rect">
-            <a:avLst/>
-          </a:prstGeom>
-          <a:noFill/>
-          <a:ln/>
-        </p:spPr>
-        <p:txBody>
-          <a:bodyPr wrap="square" lIns="0" tIns="0" rIns="0" bIns="0" rtlCol="0" anchor="ctr"/>
-          <a:lstStyle/>
-          <a:p>
-            <a:pPr indent="0" marL="0">
-              <a:buNone/>
-            </a:pPr>
-            <a:r>
-              <a:rPr lang="en-US" sz="3800" b="1" dirty="0">
-                <a:solidFill>
-                  <a:srgbClr val="F2EEE9"/>
+          <p:cNvPr id="5" name="Text 3"/>
+          <p:cNvSpPr/>
+          <p:nvPr/>
+        </p:nvSpPr>
+        <p:spPr>
+          <a:xfrm>
+            <a:off x="822960" y="2670048"/>
+            <a:ext cx="3108960" cy="1051560"/>
+          </a:xfrm>
+          <a:prstGeom prst="rect">
+            <a:avLst/>
+          </a:prstGeom>
+          <a:noFill/>
+          <a:ln/>
+        </p:spPr>
+        <p:txBody>
+          <a:bodyPr wrap="square" lIns="0" tIns="0" rIns="0" bIns="0" rtlCol="0" anchor="t"/>
+          <a:lstStyle/>
+          <a:p>
+            <a:pPr indent="0" marL="0">
+              <a:buNone/>
+            </a:pPr>
+            <a:r>
+              <a:rPr lang="en-US" sz="7200" b="1" dirty="0">
+                <a:solidFill>
+                  <a:srgbClr val="DE27A0"/>
                 </a:solidFill>
                 <a:latin typeface="Arial" pitchFamily="34" charset="0"/>
                 <a:ea typeface="Arial" pitchFamily="34" charset="-122"/>
                 <a:cs typeface="Arial" pitchFamily="34" charset="-120"/>
               </a:rPr>
-              <a:t>Tres fases, un objetivo</a:t>
-            </a:r>
-            <a:endParaRPr lang="en-US" sz="3800" dirty="0"/>
-          </a:p>
-        </p:txBody>
-      </p:sp>
-      <p:sp>
-        <p:nvSpPr>
-          <p:cNvPr id="4" name="Text 2"/>
-          <p:cNvSpPr/>
-          <p:nvPr/>
-        </p:nvSpPr>
-        <p:spPr>
-          <a:xfrm>
-            <a:off x="822960" y="1901952"/>
-            <a:ext cx="10545775" cy="329184"/>
+              <a:t>1</a:t>
+            </a:r>
+            <a:endParaRPr lang="en-US" sz="7200" dirty="0"/>
+          </a:p>
+        </p:txBody>
+      </p:sp>
+      <p:sp>
+        <p:nvSpPr>
+          <p:cNvPr id="6" name="Text 4"/>
+          <p:cNvSpPr/>
+          <p:nvPr/>
+        </p:nvSpPr>
+        <p:spPr>
+          <a:xfrm>
+            <a:off x="822960" y="3822192"/>
+            <a:ext cx="3108960" cy="256032"/>
           </a:xfrm>
           <a:prstGeom prst="rect">
             <a:avLst/>
@@ -1604,30 +1686,30 @@
               <a:buNone/>
             </a:pPr>
             <a:r>
-              <a:rPr lang="en-US" sz="1500" dirty="0">
-                <a:solidFill>
-                  <a:srgbClr val="8A807A"/>
-                </a:solidFill>
-                <a:latin typeface="Calibri" pitchFamily="34" charset="0"/>
-                <a:ea typeface="Calibri" pitchFamily="34" charset="-122"/>
-                <a:cs typeface="Calibri" pitchFamily="34" charset="-120"/>
-              </a:rPr>
-              <a:t>Cada fase construye lo que la siguiente necesita.</a:t>
-            </a:r>
-            <a:endParaRPr lang="en-US" sz="1500" dirty="0"/>
-          </a:p>
-        </p:txBody>
-      </p:sp>
-      <p:sp>
-        <p:nvSpPr>
-          <p:cNvPr id="5" name="Text 3"/>
-          <p:cNvSpPr/>
-          <p:nvPr/>
-        </p:nvSpPr>
-        <p:spPr>
-          <a:xfrm>
-            <a:off x="822960" y="2606040"/>
-            <a:ext cx="3108960" cy="1051560"/>
+              <a:rPr lang="en-US" sz="1100" b="1" spc="300" kern="0" dirty="0">
+                <a:solidFill>
+                  <a:srgbClr val="DE27A0"/>
+                </a:solidFill>
+                <a:latin typeface="Courier New" pitchFamily="34" charset="0"/>
+                <a:ea typeface="Courier New" pitchFamily="34" charset="-122"/>
+                <a:cs typeface="Courier New" pitchFamily="34" charset="-120"/>
+              </a:rPr>
+              <a:t>META</a:t>
+            </a:r>
+            <a:endParaRPr lang="en-US" sz="1100" dirty="0"/>
+          </a:p>
+        </p:txBody>
+      </p:sp>
+      <p:sp>
+        <p:nvSpPr>
+          <p:cNvPr id="7" name="Text 5"/>
+          <p:cNvSpPr/>
+          <p:nvPr/>
+        </p:nvSpPr>
+        <p:spPr>
+          <a:xfrm>
+            <a:off x="822960" y="4151376"/>
+            <a:ext cx="3108960" cy="1005840"/>
           </a:xfrm>
           <a:prstGeom prst="rect">
             <a:avLst/>
@@ -1640,72 +1722,176 @@
           <a:lstStyle/>
           <a:p>
             <a:pPr indent="0" marL="0">
-              <a:buNone/>
-            </a:pPr>
-            <a:r>
-              <a:rPr lang="en-US" sz="7200" b="1" dirty="0">
-                <a:solidFill>
-                  <a:srgbClr val="EF5B25"/>
+              <a:lnSpc>
+                <a:spcPct val="105000"/>
+              </a:lnSpc>
+              <a:buNone/>
+            </a:pPr>
+            <a:r>
+              <a:rPr lang="en-US" sz="2300" b="1" dirty="0">
+                <a:solidFill>
+                  <a:srgbClr val="FFFFFF"/>
                 </a:solidFill>
                 <a:latin typeface="Arial" pitchFamily="34" charset="0"/>
                 <a:ea typeface="Arial" pitchFamily="34" charset="-122"/>
                 <a:cs typeface="Arial" pitchFamily="34" charset="-120"/>
               </a:rPr>
-              <a:t>1</a:t>
-            </a:r>
-            <a:endParaRPr lang="en-US" sz="7200" dirty="0"/>
-          </a:p>
-        </p:txBody>
-      </p:sp>
-      <p:sp>
-        <p:nvSpPr>
-          <p:cNvPr id="6" name="Text 4"/>
-          <p:cNvSpPr/>
-          <p:nvPr/>
-        </p:nvSpPr>
-        <p:spPr>
-          <a:xfrm>
-            <a:off x="822960" y="3767328"/>
-            <a:ext cx="3108960" cy="256032"/>
-          </a:xfrm>
-          <a:prstGeom prst="rect">
-            <a:avLst/>
-          </a:prstGeom>
-          <a:noFill/>
-          <a:ln/>
-        </p:spPr>
-        <p:txBody>
-          <a:bodyPr wrap="square" lIns="0" tIns="0" rIns="0" bIns="0" rtlCol="0" anchor="ctr"/>
-          <a:lstStyle/>
-          <a:p>
-            <a:pPr indent="0" marL="0">
-              <a:buNone/>
-            </a:pPr>
-            <a:r>
-              <a:rPr lang="en-US" sz="1050" b="1" spc="250" kern="0" dirty="0">
-                <a:solidFill>
-                  <a:srgbClr val="8A807A"/>
+              <a:t>QUE NOS</a:t>
+            </a:r>
+            <a:endParaRPr lang="en-US" sz="2300" dirty="0"/>
+          </a:p>
+          <a:p>
+            <a:pPr indent="0" marL="0">
+              <a:lnSpc>
+                <a:spcPct val="105000"/>
+              </a:lnSpc>
+              <a:buNone/>
+            </a:pPr>
+            <a:r>
+              <a:rPr lang="en-US" sz="2300" b="1" dirty="0">
+                <a:solidFill>
+                  <a:srgbClr val="FFFFFF"/>
                 </a:solidFill>
                 <a:latin typeface="Arial" pitchFamily="34" charset="0"/>
                 <a:ea typeface="Arial" pitchFamily="34" charset="-122"/>
                 <a:cs typeface="Arial" pitchFamily="34" charset="-120"/>
               </a:rPr>
+              <a:t>CONOZCAN</a:t>
+            </a:r>
+            <a:endParaRPr lang="en-US" sz="2300" dirty="0"/>
+          </a:p>
+        </p:txBody>
+      </p:sp>
+      <p:sp>
+        <p:nvSpPr>
+          <p:cNvPr id="8" name="Text 6"/>
+          <p:cNvSpPr/>
+          <p:nvPr/>
+        </p:nvSpPr>
+        <p:spPr>
+          <a:xfrm>
+            <a:off x="822960" y="5285232"/>
+            <a:ext cx="3108960" cy="822960"/>
+          </a:xfrm>
+          <a:prstGeom prst="rect">
+            <a:avLst/>
+          </a:prstGeom>
+          <a:noFill/>
+          <a:ln/>
+        </p:spPr>
+        <p:txBody>
+          <a:bodyPr wrap="square" lIns="0" tIns="0" rIns="0" bIns="0" rtlCol="0" anchor="t"/>
+          <a:lstStyle/>
+          <a:p>
+            <a:pPr indent="0" marL="0">
+              <a:lnSpc>
+                <a:spcPct val="130000"/>
+              </a:lnSpc>
+              <a:buNone/>
+            </a:pPr>
+            <a:r>
+              <a:rPr lang="en-US" sz="1100" b="1" spc="50" kern="0" dirty="0">
+                <a:solidFill>
+                  <a:srgbClr val="BFA3C8"/>
+                </a:solidFill>
+                <a:latin typeface="Courier New" pitchFamily="34" charset="0"/>
+                <a:ea typeface="Courier New" pitchFamily="34" charset="-122"/>
+                <a:cs typeface="Courier New" pitchFamily="34" charset="-120"/>
+              </a:rPr>
+              <a:t>INSTALAMOS LA MARCA Y DEJAMOS LA MEDICIÓN ANDANDO.</a:t>
+            </a:r>
+            <a:endParaRPr lang="en-US" sz="1100" dirty="0"/>
+          </a:p>
+        </p:txBody>
+      </p:sp>
+      <p:sp>
+        <p:nvSpPr>
+          <p:cNvPr id="9" name="Text 7"/>
+          <p:cNvSpPr/>
+          <p:nvPr/>
+        </p:nvSpPr>
+        <p:spPr>
+          <a:xfrm>
+            <a:off x="4541368" y="2670048"/>
+            <a:ext cx="3108960" cy="1051560"/>
+          </a:xfrm>
+          <a:prstGeom prst="rect">
+            <a:avLst/>
+          </a:prstGeom>
+          <a:noFill/>
+          <a:ln/>
+        </p:spPr>
+        <p:txBody>
+          <a:bodyPr wrap="square" lIns="0" tIns="0" rIns="0" bIns="0" rtlCol="0" anchor="t"/>
+          <a:lstStyle/>
+          <a:p>
+            <a:pPr indent="0" marL="0">
+              <a:buNone/>
+            </a:pPr>
+            <a:r>
+              <a:rPr lang="en-US" sz="7200" b="1" dirty="0">
+                <a:solidFill>
+                  <a:srgbClr val="DE27A0"/>
+                </a:solidFill>
+                <a:latin typeface="Arial" pitchFamily="34" charset="0"/>
+                <a:ea typeface="Arial" pitchFamily="34" charset="-122"/>
+                <a:cs typeface="Arial" pitchFamily="34" charset="-120"/>
+              </a:rPr>
+              <a:t>2</a:t>
+            </a:r>
+            <a:endParaRPr lang="en-US" sz="7200" dirty="0"/>
+          </a:p>
+        </p:txBody>
+      </p:sp>
+      <p:sp>
+        <p:nvSpPr>
+          <p:cNvPr id="10" name="Text 8"/>
+          <p:cNvSpPr/>
+          <p:nvPr/>
+        </p:nvSpPr>
+        <p:spPr>
+          <a:xfrm>
+            <a:off x="4541368" y="3822192"/>
+            <a:ext cx="3108960" cy="256032"/>
+          </a:xfrm>
+          <a:prstGeom prst="rect">
+            <a:avLst/>
+          </a:prstGeom>
+          <a:noFill/>
+          <a:ln/>
+        </p:spPr>
+        <p:txBody>
+          <a:bodyPr wrap="square" lIns="0" tIns="0" rIns="0" bIns="0" rtlCol="0" anchor="ctr"/>
+          <a:lstStyle/>
+          <a:p>
+            <a:pPr indent="0" marL="0">
+              <a:buNone/>
+            </a:pPr>
+            <a:r>
+              <a:rPr lang="en-US" sz="1100" b="1" spc="300" kern="0" dirty="0">
+                <a:solidFill>
+                  <a:srgbClr val="DE27A0"/>
+                </a:solidFill>
+                <a:latin typeface="Courier New" pitchFamily="34" charset="0"/>
+                <a:ea typeface="Courier New" pitchFamily="34" charset="-122"/>
+                <a:cs typeface="Courier New" pitchFamily="34" charset="-120"/>
+              </a:rPr>
               <a:t>META</a:t>
             </a:r>
-            <a:endParaRPr lang="en-US" sz="1050" dirty="0"/>
-          </a:p>
-        </p:txBody>
-      </p:sp>
-      <p:sp>
-        <p:nvSpPr>
-          <p:cNvPr id="7" name="Text 5"/>
-          <p:cNvSpPr/>
-          <p:nvPr/>
-        </p:nvSpPr>
-        <p:spPr>
-          <a:xfrm>
-            <a:off x="822960" y="4078224"/>
-            <a:ext cx="3108960" cy="1051560"/>
+            <a:endParaRPr lang="en-US" sz="1100" dirty="0"/>
+          </a:p>
+        </p:txBody>
+      </p:sp>
+      <p:sp>
+        <p:nvSpPr>
+          <p:cNvPr id="11" name="Text 9"/>
+          <p:cNvSpPr/>
+          <p:nvPr/>
+        </p:nvSpPr>
+        <p:spPr>
+          <a:xfrm>
+            <a:off x="4541368" y="4151376"/>
+            <a:ext cx="3108960" cy="1005840"/>
           </a:xfrm>
           <a:prstGeom prst="rect">
             <a:avLst/>
@@ -1724,17 +1910,17 @@
               <a:buNone/>
             </a:pPr>
             <a:r>
-              <a:rPr lang="en-US" sz="2500" b="1" dirty="0">
-                <a:solidFill>
-                  <a:srgbClr val="F2EEE9"/>
+              <a:rPr lang="en-US" sz="2300" b="1" dirty="0">
+                <a:solidFill>
+                  <a:srgbClr val="FFFFFF"/>
                 </a:solidFill>
                 <a:latin typeface="Arial" pitchFamily="34" charset="0"/>
                 <a:ea typeface="Arial" pitchFamily="34" charset="-122"/>
                 <a:cs typeface="Arial" pitchFamily="34" charset="-120"/>
               </a:rPr>
-              <a:t>Que nos</a:t>
-            </a:r>
-            <a:endParaRPr lang="en-US" sz="2500" dirty="0"/>
+              <a:t>QUE</a:t>
+            </a:r>
+            <a:endParaRPr lang="en-US" sz="2300" dirty="0"/>
           </a:p>
           <a:p>
             <a:pPr indent="0" marL="0">
@@ -1744,30 +1930,30 @@
               <a:buNone/>
             </a:pPr>
             <a:r>
-              <a:rPr lang="en-US" sz="2500" b="1" dirty="0">
-                <a:solidFill>
-                  <a:srgbClr val="F2EEE9"/>
+              <a:rPr lang="en-US" sz="2300" b="1" dirty="0">
+                <a:solidFill>
+                  <a:srgbClr val="FFFFFF"/>
                 </a:solidFill>
                 <a:latin typeface="Arial" pitchFamily="34" charset="0"/>
                 <a:ea typeface="Arial" pitchFamily="34" charset="-122"/>
                 <a:cs typeface="Arial" pitchFamily="34" charset="-120"/>
               </a:rPr>
-              <a:t>conozcan</a:t>
-            </a:r>
-            <a:endParaRPr lang="en-US" sz="2500" dirty="0"/>
-          </a:p>
-        </p:txBody>
-      </p:sp>
-      <p:sp>
-        <p:nvSpPr>
-          <p:cNvPr id="8" name="Text 6"/>
-          <p:cNvSpPr/>
-          <p:nvPr/>
-        </p:nvSpPr>
-        <p:spPr>
-          <a:xfrm>
-            <a:off x="822960" y="5230368"/>
-            <a:ext cx="3108960" cy="777240"/>
+              <a:t>COMPREN</a:t>
+            </a:r>
+            <a:endParaRPr lang="en-US" sz="2300" dirty="0"/>
+          </a:p>
+        </p:txBody>
+      </p:sp>
+      <p:sp>
+        <p:nvSpPr>
+          <p:cNvPr id="12" name="Text 10"/>
+          <p:cNvSpPr/>
+          <p:nvPr/>
+        </p:nvSpPr>
+        <p:spPr>
+          <a:xfrm>
+            <a:off x="4541368" y="5285232"/>
+            <a:ext cx="3108960" cy="822960"/>
           </a:xfrm>
           <a:prstGeom prst="rect">
             <a:avLst/>
@@ -1781,34 +1967,34 @@
           <a:p>
             <a:pPr indent="0" marL="0">
               <a:lnSpc>
-                <a:spcPct val="115000"/>
+                <a:spcPct val="130000"/>
               </a:lnSpc>
               <a:buNone/>
             </a:pPr>
             <a:r>
-              <a:rPr lang="en-US" sz="1400" dirty="0">
-                <a:solidFill>
-                  <a:srgbClr val="8A807A"/>
-                </a:solidFill>
-                <a:latin typeface="Calibri" pitchFamily="34" charset="0"/>
-                <a:ea typeface="Calibri" pitchFamily="34" charset="-122"/>
-                <a:cs typeface="Calibri" pitchFamily="34" charset="-120"/>
-              </a:rPr>
-              <a:t>Instalamos la marca y dejamos la medición andando.</a:t>
-            </a:r>
-            <a:endParaRPr lang="en-US" sz="1400" dirty="0"/>
-          </a:p>
-        </p:txBody>
-      </p:sp>
-      <p:sp>
-        <p:nvSpPr>
-          <p:cNvPr id="9" name="Text 7"/>
-          <p:cNvSpPr/>
-          <p:nvPr/>
-        </p:nvSpPr>
-        <p:spPr>
-          <a:xfrm>
-            <a:off x="4541368" y="2606040"/>
+              <a:rPr lang="en-US" sz="1100" b="1" spc="50" kern="0" dirty="0">
+                <a:solidFill>
+                  <a:srgbClr val="BFA3C8"/>
+                </a:solidFill>
+                <a:latin typeface="Courier New" pitchFamily="34" charset="0"/>
+                <a:ea typeface="Courier New" pitchFamily="34" charset="-122"/>
+                <a:cs typeface="Courier New" pitchFamily="34" charset="-120"/>
+              </a:rPr>
+              <a:t>CAMPAÑAS DE VENTA DIRECTA AL ECOMMERCE.</a:t>
+            </a:r>
+            <a:endParaRPr lang="en-US" sz="1100" dirty="0"/>
+          </a:p>
+        </p:txBody>
+      </p:sp>
+      <p:sp>
+        <p:nvSpPr>
+          <p:cNvPr id="13" name="Text 11"/>
+          <p:cNvSpPr/>
+          <p:nvPr/>
+        </p:nvSpPr>
+        <p:spPr>
+          <a:xfrm>
+            <a:off x="8259775" y="2670048"/>
             <a:ext cx="3108960" cy="1051560"/>
           </a:xfrm>
           <a:prstGeom prst="rect">
@@ -1827,13 +2013,13 @@
             <a:r>
               <a:rPr lang="en-US" sz="7200" b="1" dirty="0">
                 <a:solidFill>
-                  <a:srgbClr val="EF5B25"/>
+                  <a:srgbClr val="DE27A0"/>
                 </a:solidFill>
                 <a:latin typeface="Arial" pitchFamily="34" charset="0"/>
                 <a:ea typeface="Arial" pitchFamily="34" charset="-122"/>
                 <a:cs typeface="Arial" pitchFamily="34" charset="-120"/>
               </a:rPr>
-              <a:t>2</a:t>
+              <a:t>3</a:t>
             </a:r>
             <a:endParaRPr lang="en-US" sz="7200" dirty="0"/>
           </a:p>
@@ -1841,13 +2027,13 @@
       </p:sp>
       <p:sp>
         <p:nvSpPr>
-          <p:cNvPr id="10" name="Text 8"/>
-          <p:cNvSpPr/>
-          <p:nvPr/>
-        </p:nvSpPr>
-        <p:spPr>
-          <a:xfrm>
-            <a:off x="4541368" y="3767328"/>
+          <p:cNvPr id="14" name="Text 12"/>
+          <p:cNvSpPr/>
+          <p:nvPr/>
+        </p:nvSpPr>
+        <p:spPr>
+          <a:xfrm>
+            <a:off x="8259775" y="3822192"/>
             <a:ext cx="3108960" cy="256032"/>
           </a:xfrm>
           <a:prstGeom prst="rect">
@@ -1864,40 +2050,60 @@
               <a:buNone/>
             </a:pPr>
             <a:r>
-              <a:rPr lang="en-US" sz="1050" b="1" spc="250" kern="0" dirty="0">
-                <a:solidFill>
-                  <a:srgbClr val="8A807A"/>
+              <a:rPr lang="en-US" sz="1100" b="1" spc="300" kern="0" dirty="0">
+                <a:solidFill>
+                  <a:srgbClr val="DE27A0"/>
+                </a:solidFill>
+                <a:latin typeface="Courier New" pitchFamily="34" charset="0"/>
+                <a:ea typeface="Courier New" pitchFamily="34" charset="-122"/>
+                <a:cs typeface="Courier New" pitchFamily="34" charset="-120"/>
+              </a:rPr>
+              <a:t>GOOGLE</a:t>
+            </a:r>
+            <a:endParaRPr lang="en-US" sz="1100" dirty="0"/>
+          </a:p>
+        </p:txBody>
+      </p:sp>
+      <p:sp>
+        <p:nvSpPr>
+          <p:cNvPr id="15" name="Text 13"/>
+          <p:cNvSpPr/>
+          <p:nvPr/>
+        </p:nvSpPr>
+        <p:spPr>
+          <a:xfrm>
+            <a:off x="8259775" y="4151376"/>
+            <a:ext cx="3108960" cy="1005840"/>
+          </a:xfrm>
+          <a:prstGeom prst="rect">
+            <a:avLst/>
+          </a:prstGeom>
+          <a:noFill/>
+          <a:ln/>
+        </p:spPr>
+        <p:txBody>
+          <a:bodyPr wrap="square" lIns="0" tIns="0" rIns="0" bIns="0" rtlCol="0" anchor="t"/>
+          <a:lstStyle/>
+          <a:p>
+            <a:pPr indent="0" marL="0">
+              <a:lnSpc>
+                <a:spcPct val="105000"/>
+              </a:lnSpc>
+              <a:buNone/>
+            </a:pPr>
+            <a:r>
+              <a:rPr lang="en-US" sz="2300" b="1" dirty="0">
+                <a:solidFill>
+                  <a:srgbClr val="FFFFFF"/>
                 </a:solidFill>
                 <a:latin typeface="Arial" pitchFamily="34" charset="0"/>
                 <a:ea typeface="Arial" pitchFamily="34" charset="-122"/>
                 <a:cs typeface="Arial" pitchFamily="34" charset="-120"/>
               </a:rPr>
-              <a:t>META</a:t>
-            </a:r>
-            <a:endParaRPr lang="en-US" sz="1050" dirty="0"/>
-          </a:p>
-        </p:txBody>
-      </p:sp>
-      <p:sp>
-        <p:nvSpPr>
-          <p:cNvPr id="11" name="Text 9"/>
-          <p:cNvSpPr/>
-          <p:nvPr/>
-        </p:nvSpPr>
-        <p:spPr>
-          <a:xfrm>
-            <a:off x="4541368" y="4078224"/>
-            <a:ext cx="3108960" cy="1051560"/>
-          </a:xfrm>
-          <a:prstGeom prst="rect">
-            <a:avLst/>
-          </a:prstGeom>
-          <a:noFill/>
-          <a:ln/>
-        </p:spPr>
-        <p:txBody>
-          <a:bodyPr wrap="square" lIns="0" tIns="0" rIns="0" bIns="0" rtlCol="0" anchor="t"/>
-          <a:lstStyle/>
+              <a:t>QUE NOS</a:t>
+            </a:r>
+            <a:endParaRPr lang="en-US" sz="2300" dirty="0"/>
+          </a:p>
           <a:p>
             <a:pPr indent="0" marL="0">
               <a:lnSpc>
@@ -1906,261 +2112,59 @@
               <a:buNone/>
             </a:pPr>
             <a:r>
-              <a:rPr lang="en-US" sz="2500" b="1" dirty="0">
-                <a:solidFill>
-                  <a:srgbClr val="F2EEE9"/>
+              <a:rPr lang="en-US" sz="2300" b="1" dirty="0">
+                <a:solidFill>
+                  <a:srgbClr val="FFFFFF"/>
                 </a:solidFill>
                 <a:latin typeface="Arial" pitchFamily="34" charset="0"/>
                 <a:ea typeface="Arial" pitchFamily="34" charset="-122"/>
                 <a:cs typeface="Arial" pitchFamily="34" charset="-120"/>
               </a:rPr>
-              <a:t>Que</a:t>
-            </a:r>
-            <a:endParaRPr lang="en-US" sz="2500" dirty="0"/>
-          </a:p>
+              <a:t>ENCUENTREN</a:t>
+            </a:r>
+            <a:endParaRPr lang="en-US" sz="2300" dirty="0"/>
+          </a:p>
+        </p:txBody>
+      </p:sp>
+      <p:sp>
+        <p:nvSpPr>
+          <p:cNvPr id="16" name="Text 14"/>
+          <p:cNvSpPr/>
+          <p:nvPr/>
+        </p:nvSpPr>
+        <p:spPr>
+          <a:xfrm>
+            <a:off x="8259775" y="5285232"/>
+            <a:ext cx="3108960" cy="822960"/>
+          </a:xfrm>
+          <a:prstGeom prst="rect">
+            <a:avLst/>
+          </a:prstGeom>
+          <a:noFill/>
+          <a:ln/>
+        </p:spPr>
+        <p:txBody>
+          <a:bodyPr wrap="square" lIns="0" tIns="0" rIns="0" bIns="0" rtlCol="0" anchor="t"/>
+          <a:lstStyle/>
           <a:p>
             <a:pPr indent="0" marL="0">
               <a:lnSpc>
-                <a:spcPct val="105000"/>
+                <a:spcPct val="130000"/>
               </a:lnSpc>
               <a:buNone/>
             </a:pPr>
             <a:r>
-              <a:rPr lang="en-US" sz="2500" b="1" dirty="0">
-                <a:solidFill>
-                  <a:srgbClr val="F2EEE9"/>
-                </a:solidFill>
-                <a:latin typeface="Arial" pitchFamily="34" charset="0"/>
-                <a:ea typeface="Arial" pitchFamily="34" charset="-122"/>
-                <a:cs typeface="Arial" pitchFamily="34" charset="-120"/>
-              </a:rPr>
-              <a:t>compren</a:t>
-            </a:r>
-            <a:endParaRPr lang="en-US" sz="2500" dirty="0"/>
-          </a:p>
-        </p:txBody>
-      </p:sp>
-      <p:sp>
-        <p:nvSpPr>
-          <p:cNvPr id="12" name="Text 10"/>
-          <p:cNvSpPr/>
-          <p:nvPr/>
-        </p:nvSpPr>
-        <p:spPr>
-          <a:xfrm>
-            <a:off x="4541368" y="5230368"/>
-            <a:ext cx="3108960" cy="777240"/>
-          </a:xfrm>
-          <a:prstGeom prst="rect">
-            <a:avLst/>
-          </a:prstGeom>
-          <a:noFill/>
-          <a:ln/>
-        </p:spPr>
-        <p:txBody>
-          <a:bodyPr wrap="square" lIns="0" tIns="0" rIns="0" bIns="0" rtlCol="0" anchor="t"/>
-          <a:lstStyle/>
-          <a:p>
-            <a:pPr indent="0" marL="0">
-              <a:lnSpc>
-                <a:spcPct val="115000"/>
-              </a:lnSpc>
-              <a:buNone/>
-            </a:pPr>
-            <a:r>
-              <a:rPr lang="en-US" sz="1400" dirty="0">
-                <a:solidFill>
-                  <a:srgbClr val="8A807A"/>
-                </a:solidFill>
-                <a:latin typeface="Calibri" pitchFamily="34" charset="0"/>
-                <a:ea typeface="Calibri" pitchFamily="34" charset="-122"/>
-                <a:cs typeface="Calibri" pitchFamily="34" charset="-120"/>
-              </a:rPr>
-              <a:t>Campañas de venta directa al ecommerce.</a:t>
-            </a:r>
-            <a:endParaRPr lang="en-US" sz="1400" dirty="0"/>
-          </a:p>
-        </p:txBody>
-      </p:sp>
-      <p:sp>
-        <p:nvSpPr>
-          <p:cNvPr id="13" name="Text 11"/>
-          <p:cNvSpPr/>
-          <p:nvPr/>
-        </p:nvSpPr>
-        <p:spPr>
-          <a:xfrm>
-            <a:off x="8259775" y="2606040"/>
-            <a:ext cx="3108960" cy="1051560"/>
-          </a:xfrm>
-          <a:prstGeom prst="rect">
-            <a:avLst/>
-          </a:prstGeom>
-          <a:noFill/>
-          <a:ln/>
-        </p:spPr>
-        <p:txBody>
-          <a:bodyPr wrap="square" lIns="0" tIns="0" rIns="0" bIns="0" rtlCol="0" anchor="t"/>
-          <a:lstStyle/>
-          <a:p>
-            <a:pPr indent="0" marL="0">
-              <a:buNone/>
-            </a:pPr>
-            <a:r>
-              <a:rPr lang="en-US" sz="7200" b="1" dirty="0">
-                <a:solidFill>
-                  <a:srgbClr val="EF5B25"/>
-                </a:solidFill>
-                <a:latin typeface="Arial" pitchFamily="34" charset="0"/>
-                <a:ea typeface="Arial" pitchFamily="34" charset="-122"/>
-                <a:cs typeface="Arial" pitchFamily="34" charset="-120"/>
-              </a:rPr>
-              <a:t>3</a:t>
-            </a:r>
-            <a:endParaRPr lang="en-US" sz="7200" dirty="0"/>
-          </a:p>
-        </p:txBody>
-      </p:sp>
-      <p:sp>
-        <p:nvSpPr>
-          <p:cNvPr id="14" name="Text 12"/>
-          <p:cNvSpPr/>
-          <p:nvPr/>
-        </p:nvSpPr>
-        <p:spPr>
-          <a:xfrm>
-            <a:off x="8259775" y="3767328"/>
-            <a:ext cx="3108960" cy="256032"/>
-          </a:xfrm>
-          <a:prstGeom prst="rect">
-            <a:avLst/>
-          </a:prstGeom>
-          <a:noFill/>
-          <a:ln/>
-        </p:spPr>
-        <p:txBody>
-          <a:bodyPr wrap="square" lIns="0" tIns="0" rIns="0" bIns="0" rtlCol="0" anchor="ctr"/>
-          <a:lstStyle/>
-          <a:p>
-            <a:pPr indent="0" marL="0">
-              <a:buNone/>
-            </a:pPr>
-            <a:r>
-              <a:rPr lang="en-US" sz="1050" b="1" spc="250" kern="0" dirty="0">
-                <a:solidFill>
-                  <a:srgbClr val="8A807A"/>
-                </a:solidFill>
-                <a:latin typeface="Arial" pitchFamily="34" charset="0"/>
-                <a:ea typeface="Arial" pitchFamily="34" charset="-122"/>
-                <a:cs typeface="Arial" pitchFamily="34" charset="-120"/>
-              </a:rPr>
-              <a:t>GOOGLE</a:t>
-            </a:r>
-            <a:endParaRPr lang="en-US" sz="1050" dirty="0"/>
-          </a:p>
-        </p:txBody>
-      </p:sp>
-      <p:sp>
-        <p:nvSpPr>
-          <p:cNvPr id="15" name="Text 13"/>
-          <p:cNvSpPr/>
-          <p:nvPr/>
-        </p:nvSpPr>
-        <p:spPr>
-          <a:xfrm>
-            <a:off x="8259775" y="4078224"/>
-            <a:ext cx="3108960" cy="1051560"/>
-          </a:xfrm>
-          <a:prstGeom prst="rect">
-            <a:avLst/>
-          </a:prstGeom>
-          <a:noFill/>
-          <a:ln/>
-        </p:spPr>
-        <p:txBody>
-          <a:bodyPr wrap="square" lIns="0" tIns="0" rIns="0" bIns="0" rtlCol="0" anchor="t"/>
-          <a:lstStyle/>
-          <a:p>
-            <a:pPr indent="0" marL="0">
-              <a:lnSpc>
-                <a:spcPct val="105000"/>
-              </a:lnSpc>
-              <a:buNone/>
-            </a:pPr>
-            <a:r>
-              <a:rPr lang="en-US" sz="2500" b="1" dirty="0">
-                <a:solidFill>
-                  <a:srgbClr val="F2EEE9"/>
-                </a:solidFill>
-                <a:latin typeface="Arial" pitchFamily="34" charset="0"/>
-                <a:ea typeface="Arial" pitchFamily="34" charset="-122"/>
-                <a:cs typeface="Arial" pitchFamily="34" charset="-120"/>
-              </a:rPr>
-              <a:t>Que nos</a:t>
-            </a:r>
-            <a:endParaRPr lang="en-US" sz="2500" dirty="0"/>
-          </a:p>
-          <a:p>
-            <a:pPr indent="0" marL="0">
-              <a:lnSpc>
-                <a:spcPct val="105000"/>
-              </a:lnSpc>
-              <a:buNone/>
-            </a:pPr>
-            <a:r>
-              <a:rPr lang="en-US" sz="2500" b="1" dirty="0">
-                <a:solidFill>
-                  <a:srgbClr val="F2EEE9"/>
-                </a:solidFill>
-                <a:latin typeface="Arial" pitchFamily="34" charset="0"/>
-                <a:ea typeface="Arial" pitchFamily="34" charset="-122"/>
-                <a:cs typeface="Arial" pitchFamily="34" charset="-120"/>
-              </a:rPr>
-              <a:t>encuentren</a:t>
-            </a:r>
-            <a:endParaRPr lang="en-US" sz="2500" dirty="0"/>
-          </a:p>
-        </p:txBody>
-      </p:sp>
-      <p:sp>
-        <p:nvSpPr>
-          <p:cNvPr id="16" name="Text 14"/>
-          <p:cNvSpPr/>
-          <p:nvPr/>
-        </p:nvSpPr>
-        <p:spPr>
-          <a:xfrm>
-            <a:off x="8259775" y="5230368"/>
-            <a:ext cx="3108960" cy="777240"/>
-          </a:xfrm>
-          <a:prstGeom prst="rect">
-            <a:avLst/>
-          </a:prstGeom>
-          <a:noFill/>
-          <a:ln/>
-        </p:spPr>
-        <p:txBody>
-          <a:bodyPr wrap="square" lIns="0" tIns="0" rIns="0" bIns="0" rtlCol="0" anchor="t"/>
-          <a:lstStyle/>
-          <a:p>
-            <a:pPr indent="0" marL="0">
-              <a:lnSpc>
-                <a:spcPct val="115000"/>
-              </a:lnSpc>
-              <a:buNone/>
-            </a:pPr>
-            <a:r>
-              <a:rPr lang="en-US" sz="1400" dirty="0">
-                <a:solidFill>
-                  <a:srgbClr val="8A807A"/>
-                </a:solidFill>
-                <a:latin typeface="Calibri" pitchFamily="34" charset="0"/>
-                <a:ea typeface="Calibri" pitchFamily="34" charset="-122"/>
-                <a:cs typeface="Calibri" pitchFamily="34" charset="-120"/>
-              </a:rPr>
-              <a:t>Capturamos a quien ya está buscando vermut.</a:t>
-            </a:r>
-            <a:endParaRPr lang="en-US" sz="1400" dirty="0"/>
+              <a:rPr lang="en-US" sz="1100" b="1" spc="50" kern="0" dirty="0">
+                <a:solidFill>
+                  <a:srgbClr val="BFA3C8"/>
+                </a:solidFill>
+                <a:latin typeface="Courier New" pitchFamily="34" charset="0"/>
+                <a:ea typeface="Courier New" pitchFamily="34" charset="-122"/>
+                <a:cs typeface="Courier New" pitchFamily="34" charset="-120"/>
+              </a:rPr>
+              <a:t>CAPTURAMOS A QUIEN YA ESTÁ BUSCANDO VERMUT.</a:t>
+            </a:r>
+            <a:endParaRPr lang="en-US" sz="1100" dirty="0"/>
           </a:p>
         </p:txBody>
       </p:sp>
@@ -2178,7 +2182,7 @@
     <p:bg>
       <p:bgPr>
         <a:solidFill>
-          <a:srgbClr val="0F0E0D"/>
+          <a:srgbClr val="3A1842"/>
         </a:solidFill>
       </p:bgPr>
     </p:bg>
@@ -2221,30 +2225,69 @@
               <a:buNone/>
             </a:pPr>
             <a:r>
-              <a:rPr lang="en-US" sz="1100" b="1" spc="250" kern="0" dirty="0">
-                <a:solidFill>
-                  <a:srgbClr val="EF5B25"/>
+              <a:rPr lang="en-US" sz="1200" b="1" spc="200" kern="0" dirty="0">
+                <a:solidFill>
+                  <a:srgbClr val="DE27A0"/>
+                </a:solidFill>
+                <a:latin typeface="Courier New" pitchFamily="34" charset="0"/>
+                <a:ea typeface="Courier New" pitchFamily="34" charset="-122"/>
+                <a:cs typeface="Courier New" pitchFamily="34" charset="-120"/>
+              </a:rPr>
+              <a:t>02  —  MI TRABAJO</a:t>
+            </a:r>
+            <a:endParaRPr lang="en-US" sz="1200" dirty="0"/>
+          </a:p>
+        </p:txBody>
+      </p:sp>
+      <p:sp>
+        <p:nvSpPr>
+          <p:cNvPr id="3" name="Text 1"/>
+          <p:cNvSpPr/>
+          <p:nvPr/>
+        </p:nvSpPr>
+        <p:spPr>
+          <a:xfrm>
+            <a:off x="822960" y="1152144"/>
+            <a:ext cx="10545775" cy="731520"/>
+          </a:xfrm>
+          <a:prstGeom prst="rect">
+            <a:avLst/>
+          </a:prstGeom>
+          <a:noFill/>
+          <a:ln/>
+        </p:spPr>
+        <p:txBody>
+          <a:bodyPr wrap="square" lIns="0" tIns="0" rIns="0" bIns="0" rtlCol="0" anchor="ctr"/>
+          <a:lstStyle/>
+          <a:p>
+            <a:pPr indent="0" marL="0">
+              <a:buNone/>
+            </a:pPr>
+            <a:r>
+              <a:rPr lang="en-US" sz="3600" b="1" dirty="0">
+                <a:solidFill>
+                  <a:srgbClr val="FFFFFF"/>
                 </a:solidFill>
                 <a:latin typeface="Arial" pitchFamily="34" charset="0"/>
                 <a:ea typeface="Arial" pitchFamily="34" charset="-122"/>
                 <a:cs typeface="Arial" pitchFamily="34" charset="-120"/>
               </a:rPr>
-              <a:t>02  —  MI TRABAJO</a:t>
-            </a:r>
-            <a:endParaRPr lang="en-US" sz="1100" dirty="0"/>
-          </a:p>
-        </p:txBody>
-      </p:sp>
-      <p:sp>
-        <p:nvSpPr>
-          <p:cNvPr id="3" name="Text 1"/>
-          <p:cNvSpPr/>
-          <p:nvPr/>
-        </p:nvSpPr>
-        <p:spPr>
-          <a:xfrm>
-            <a:off x="822960" y="1133856"/>
-            <a:ext cx="10545775" cy="731520"/>
+              <a:t>QUÉ HAGO CADA MES</a:t>
+            </a:r>
+            <a:endParaRPr lang="en-US" sz="3600" dirty="0"/>
+          </a:p>
+        </p:txBody>
+      </p:sp>
+      <p:sp>
+        <p:nvSpPr>
+          <p:cNvPr id="4" name="Text 2"/>
+          <p:cNvSpPr/>
+          <p:nvPr/>
+        </p:nvSpPr>
+        <p:spPr>
+          <a:xfrm>
+            <a:off x="822960" y="2670048"/>
+            <a:ext cx="685800" cy="512064"/>
           </a:xfrm>
           <a:prstGeom prst="rect">
             <a:avLst/>
@@ -2260,30 +2303,30 @@
               <a:buNone/>
             </a:pPr>
             <a:r>
-              <a:rPr lang="en-US" sz="3800" b="1" dirty="0">
-                <a:solidFill>
-                  <a:srgbClr val="F2EEE9"/>
-                </a:solidFill>
-                <a:latin typeface="Arial" pitchFamily="34" charset="0"/>
-                <a:ea typeface="Arial" pitchFamily="34" charset="-122"/>
-                <a:cs typeface="Arial" pitchFamily="34" charset="-120"/>
-              </a:rPr>
-              <a:t>Qué hago cada mes</a:t>
-            </a:r>
-            <a:endParaRPr lang="en-US" sz="3800" dirty="0"/>
-          </a:p>
-        </p:txBody>
-      </p:sp>
-      <p:sp>
-        <p:nvSpPr>
-          <p:cNvPr id="4" name="Text 2"/>
-          <p:cNvSpPr/>
-          <p:nvPr/>
-        </p:nvSpPr>
-        <p:spPr>
-          <a:xfrm>
-            <a:off x="822960" y="2578608"/>
-            <a:ext cx="658368" cy="530352"/>
+              <a:rPr lang="en-US" sz="1500" b="1" spc="100" kern="0" dirty="0">
+                <a:solidFill>
+                  <a:srgbClr val="DE27A0"/>
+                </a:solidFill>
+                <a:latin typeface="Courier New" pitchFamily="34" charset="0"/>
+                <a:ea typeface="Courier New" pitchFamily="34" charset="-122"/>
+                <a:cs typeface="Courier New" pitchFamily="34" charset="-120"/>
+              </a:rPr>
+              <a:t>01</a:t>
+            </a:r>
+            <a:endParaRPr lang="en-US" sz="1500" dirty="0"/>
+          </a:p>
+        </p:txBody>
+      </p:sp>
+      <p:sp>
+        <p:nvSpPr>
+          <p:cNvPr id="5" name="Text 3"/>
+          <p:cNvSpPr/>
+          <p:nvPr/>
+        </p:nvSpPr>
+        <p:spPr>
+          <a:xfrm>
+            <a:off x="1719072" y="2670048"/>
+            <a:ext cx="9649663" cy="512064"/>
           </a:xfrm>
           <a:prstGeom prst="rect">
             <a:avLst/>
@@ -2299,30 +2342,30 @@
               <a:buNone/>
             </a:pPr>
             <a:r>
-              <a:rPr lang="en-US" sz="1600" b="1" dirty="0">
-                <a:solidFill>
-                  <a:srgbClr val="EF5B25"/>
-                </a:solidFill>
-                <a:latin typeface="Arial" pitchFamily="34" charset="0"/>
-                <a:ea typeface="Arial" pitchFamily="34" charset="-122"/>
-                <a:cs typeface="Arial" pitchFamily="34" charset="-120"/>
-              </a:rPr>
-              <a:t>01</a:t>
-            </a:r>
-            <a:endParaRPr lang="en-US" sz="1600" dirty="0"/>
-          </a:p>
-        </p:txBody>
-      </p:sp>
-      <p:sp>
-        <p:nvSpPr>
-          <p:cNvPr id="5" name="Text 3"/>
-          <p:cNvSpPr/>
-          <p:nvPr/>
-        </p:nvSpPr>
-        <p:spPr>
-          <a:xfrm>
-            <a:off x="1664208" y="2578608"/>
-            <a:ext cx="9704527" cy="530352"/>
+              <a:rPr lang="en-US" sz="1500" b="1" spc="80" kern="0" dirty="0">
+                <a:solidFill>
+                  <a:srgbClr val="FFFFFF"/>
+                </a:solidFill>
+                <a:latin typeface="Courier New" pitchFamily="34" charset="0"/>
+                <a:ea typeface="Courier New" pitchFamily="34" charset="-122"/>
+                <a:cs typeface="Courier New" pitchFamily="34" charset="-120"/>
+              </a:rPr>
+              <a:t>EL PLAN DE MEDIOS DEL MES</a:t>
+            </a:r>
+            <a:endParaRPr lang="en-US" sz="1500" dirty="0"/>
+          </a:p>
+        </p:txBody>
+      </p:sp>
+      <p:sp>
+        <p:nvSpPr>
+          <p:cNvPr id="6" name="Text 4"/>
+          <p:cNvSpPr/>
+          <p:nvPr/>
+        </p:nvSpPr>
+        <p:spPr>
+          <a:xfrm>
+            <a:off x="822960" y="3383280"/>
+            <a:ext cx="685800" cy="512064"/>
           </a:xfrm>
           <a:prstGeom prst="rect">
             <a:avLst/>
@@ -2338,30 +2381,30 @@
               <a:buNone/>
             </a:pPr>
             <a:r>
-              <a:rPr lang="en-US" sz="2100" dirty="0">
-                <a:solidFill>
-                  <a:srgbClr val="F2EEE9"/>
-                </a:solidFill>
-                <a:latin typeface="Calibri" pitchFamily="34" charset="0"/>
-                <a:ea typeface="Calibri" pitchFamily="34" charset="-122"/>
-                <a:cs typeface="Calibri" pitchFamily="34" charset="-120"/>
-              </a:rPr>
-              <a:t>El plan de medios del mes</a:t>
-            </a:r>
-            <a:endParaRPr lang="en-US" sz="2100" dirty="0"/>
-          </a:p>
-        </p:txBody>
-      </p:sp>
-      <p:sp>
-        <p:nvSpPr>
-          <p:cNvPr id="6" name="Text 4"/>
-          <p:cNvSpPr/>
-          <p:nvPr/>
-        </p:nvSpPr>
-        <p:spPr>
-          <a:xfrm>
-            <a:off x="822960" y="3310128"/>
-            <a:ext cx="658368" cy="530352"/>
+              <a:rPr lang="en-US" sz="1500" b="1" spc="100" kern="0" dirty="0">
+                <a:solidFill>
+                  <a:srgbClr val="DE27A0"/>
+                </a:solidFill>
+                <a:latin typeface="Courier New" pitchFamily="34" charset="0"/>
+                <a:ea typeface="Courier New" pitchFamily="34" charset="-122"/>
+                <a:cs typeface="Courier New" pitchFamily="34" charset="-120"/>
+              </a:rPr>
+              <a:t>02</a:t>
+            </a:r>
+            <a:endParaRPr lang="en-US" sz="1500" dirty="0"/>
+          </a:p>
+        </p:txBody>
+      </p:sp>
+      <p:sp>
+        <p:nvSpPr>
+          <p:cNvPr id="7" name="Text 5"/>
+          <p:cNvSpPr/>
+          <p:nvPr/>
+        </p:nvSpPr>
+        <p:spPr>
+          <a:xfrm>
+            <a:off x="1719072" y="3383280"/>
+            <a:ext cx="9649663" cy="512064"/>
           </a:xfrm>
           <a:prstGeom prst="rect">
             <a:avLst/>
@@ -2377,30 +2420,30 @@
               <a:buNone/>
             </a:pPr>
             <a:r>
-              <a:rPr lang="en-US" sz="1600" b="1" dirty="0">
-                <a:solidFill>
-                  <a:srgbClr val="EF5B25"/>
-                </a:solidFill>
-                <a:latin typeface="Arial" pitchFamily="34" charset="0"/>
-                <a:ea typeface="Arial" pitchFamily="34" charset="-122"/>
-                <a:cs typeface="Arial" pitchFamily="34" charset="-120"/>
-              </a:rPr>
-              <a:t>02</a:t>
-            </a:r>
-            <a:endParaRPr lang="en-US" sz="1600" dirty="0"/>
-          </a:p>
-        </p:txBody>
-      </p:sp>
-      <p:sp>
-        <p:nvSpPr>
-          <p:cNvPr id="7" name="Text 5"/>
-          <p:cNvSpPr/>
-          <p:nvPr/>
-        </p:nvSpPr>
-        <p:spPr>
-          <a:xfrm>
-            <a:off x="1664208" y="3310128"/>
-            <a:ext cx="9704527" cy="530352"/>
+              <a:rPr lang="en-US" sz="1500" b="1" spc="80" kern="0" dirty="0">
+                <a:solidFill>
+                  <a:srgbClr val="FFFFFF"/>
+                </a:solidFill>
+                <a:latin typeface="Courier New" pitchFamily="34" charset="0"/>
+                <a:ea typeface="Courier New" pitchFamily="34" charset="-122"/>
+                <a:cs typeface="Courier New" pitchFamily="34" charset="-120"/>
+              </a:rPr>
+              <a:t>EL REQUERIMIENTO DE CREATIVOS AL EQUIPO CREATIVO</a:t>
+            </a:r>
+            <a:endParaRPr lang="en-US" sz="1500" dirty="0"/>
+          </a:p>
+        </p:txBody>
+      </p:sp>
+      <p:sp>
+        <p:nvSpPr>
+          <p:cNvPr id="8" name="Text 6"/>
+          <p:cNvSpPr/>
+          <p:nvPr/>
+        </p:nvSpPr>
+        <p:spPr>
+          <a:xfrm>
+            <a:off x="822960" y="4096512"/>
+            <a:ext cx="685800" cy="512064"/>
           </a:xfrm>
           <a:prstGeom prst="rect">
             <a:avLst/>
@@ -2416,30 +2459,30 @@
               <a:buNone/>
             </a:pPr>
             <a:r>
-              <a:rPr lang="en-US" sz="2100" dirty="0">
-                <a:solidFill>
-                  <a:srgbClr val="F2EEE9"/>
-                </a:solidFill>
-                <a:latin typeface="Calibri" pitchFamily="34" charset="0"/>
-                <a:ea typeface="Calibri" pitchFamily="34" charset="-122"/>
-                <a:cs typeface="Calibri" pitchFamily="34" charset="-120"/>
-              </a:rPr>
-              <a:t>El requerimiento de creativos al equipo creativo</a:t>
-            </a:r>
-            <a:endParaRPr lang="en-US" sz="2100" dirty="0"/>
-          </a:p>
-        </p:txBody>
-      </p:sp>
-      <p:sp>
-        <p:nvSpPr>
-          <p:cNvPr id="8" name="Text 6"/>
-          <p:cNvSpPr/>
-          <p:nvPr/>
-        </p:nvSpPr>
-        <p:spPr>
-          <a:xfrm>
-            <a:off x="822960" y="4041648"/>
-            <a:ext cx="658368" cy="530352"/>
+              <a:rPr lang="en-US" sz="1500" b="1" spc="100" kern="0" dirty="0">
+                <a:solidFill>
+                  <a:srgbClr val="DE27A0"/>
+                </a:solidFill>
+                <a:latin typeface="Courier New" pitchFamily="34" charset="0"/>
+                <a:ea typeface="Courier New" pitchFamily="34" charset="-122"/>
+                <a:cs typeface="Courier New" pitchFamily="34" charset="-120"/>
+              </a:rPr>
+              <a:t>03</a:t>
+            </a:r>
+            <a:endParaRPr lang="en-US" sz="1500" dirty="0"/>
+          </a:p>
+        </p:txBody>
+      </p:sp>
+      <p:sp>
+        <p:nvSpPr>
+          <p:cNvPr id="9" name="Text 7"/>
+          <p:cNvSpPr/>
+          <p:nvPr/>
+        </p:nvSpPr>
+        <p:spPr>
+          <a:xfrm>
+            <a:off x="1719072" y="4096512"/>
+            <a:ext cx="9649663" cy="512064"/>
           </a:xfrm>
           <a:prstGeom prst="rect">
             <a:avLst/>
@@ -2455,30 +2498,30 @@
               <a:buNone/>
             </a:pPr>
             <a:r>
-              <a:rPr lang="en-US" sz="1600" b="1" dirty="0">
-                <a:solidFill>
-                  <a:srgbClr val="EF5B25"/>
-                </a:solidFill>
-                <a:latin typeface="Arial" pitchFamily="34" charset="0"/>
-                <a:ea typeface="Arial" pitchFamily="34" charset="-122"/>
-                <a:cs typeface="Arial" pitchFamily="34" charset="-120"/>
-              </a:rPr>
-              <a:t>03</a:t>
-            </a:r>
-            <a:endParaRPr lang="en-US" sz="1600" dirty="0"/>
-          </a:p>
-        </p:txBody>
-      </p:sp>
-      <p:sp>
-        <p:nvSpPr>
-          <p:cNvPr id="9" name="Text 7"/>
-          <p:cNvSpPr/>
-          <p:nvPr/>
-        </p:nvSpPr>
-        <p:spPr>
-          <a:xfrm>
-            <a:off x="1664208" y="4041648"/>
-            <a:ext cx="9704527" cy="530352"/>
+              <a:rPr lang="en-US" sz="1500" b="1" spc="80" kern="0" dirty="0">
+                <a:solidFill>
+                  <a:srgbClr val="FFFFFF"/>
+                </a:solidFill>
+                <a:latin typeface="Courier New" pitchFamily="34" charset="0"/>
+                <a:ea typeface="Courier New" pitchFamily="34" charset="-122"/>
+                <a:cs typeface="Courier New" pitchFamily="34" charset="-120"/>
+              </a:rPr>
+              <a:t>CONFIGURACIÓN DE CAMPAÑAS, PÍXEL Y CATÁLOGO</a:t>
+            </a:r>
+            <a:endParaRPr lang="en-US" sz="1500" dirty="0"/>
+          </a:p>
+        </p:txBody>
+      </p:sp>
+      <p:sp>
+        <p:nvSpPr>
+          <p:cNvPr id="10" name="Text 8"/>
+          <p:cNvSpPr/>
+          <p:nvPr/>
+        </p:nvSpPr>
+        <p:spPr>
+          <a:xfrm>
+            <a:off x="822960" y="4809744"/>
+            <a:ext cx="685800" cy="512064"/>
           </a:xfrm>
           <a:prstGeom prst="rect">
             <a:avLst/>
@@ -2494,30 +2537,30 @@
               <a:buNone/>
             </a:pPr>
             <a:r>
-              <a:rPr lang="en-US" sz="2100" dirty="0">
-                <a:solidFill>
-                  <a:srgbClr val="F2EEE9"/>
-                </a:solidFill>
-                <a:latin typeface="Calibri" pitchFamily="34" charset="0"/>
-                <a:ea typeface="Calibri" pitchFamily="34" charset="-122"/>
-                <a:cs typeface="Calibri" pitchFamily="34" charset="-120"/>
-              </a:rPr>
-              <a:t>Configuración de campañas, píxel y catálogo</a:t>
-            </a:r>
-            <a:endParaRPr lang="en-US" sz="2100" dirty="0"/>
-          </a:p>
-        </p:txBody>
-      </p:sp>
-      <p:sp>
-        <p:nvSpPr>
-          <p:cNvPr id="10" name="Text 8"/>
-          <p:cNvSpPr/>
-          <p:nvPr/>
-        </p:nvSpPr>
-        <p:spPr>
-          <a:xfrm>
-            <a:off x="822960" y="4773168"/>
-            <a:ext cx="658368" cy="530352"/>
+              <a:rPr lang="en-US" sz="1500" b="1" spc="100" kern="0" dirty="0">
+                <a:solidFill>
+                  <a:srgbClr val="DE27A0"/>
+                </a:solidFill>
+                <a:latin typeface="Courier New" pitchFamily="34" charset="0"/>
+                <a:ea typeface="Courier New" pitchFamily="34" charset="-122"/>
+                <a:cs typeface="Courier New" pitchFamily="34" charset="-120"/>
+              </a:rPr>
+              <a:t>04</a:t>
+            </a:r>
+            <a:endParaRPr lang="en-US" sz="1500" dirty="0"/>
+          </a:p>
+        </p:txBody>
+      </p:sp>
+      <p:sp>
+        <p:nvSpPr>
+          <p:cNvPr id="11" name="Text 9"/>
+          <p:cNvSpPr/>
+          <p:nvPr/>
+        </p:nvSpPr>
+        <p:spPr>
+          <a:xfrm>
+            <a:off x="1719072" y="4809744"/>
+            <a:ext cx="9649663" cy="512064"/>
           </a:xfrm>
           <a:prstGeom prst="rect">
             <a:avLst/>
@@ -2533,30 +2576,30 @@
               <a:buNone/>
             </a:pPr>
             <a:r>
-              <a:rPr lang="en-US" sz="1600" b="1" dirty="0">
-                <a:solidFill>
-                  <a:srgbClr val="EF5B25"/>
-                </a:solidFill>
-                <a:latin typeface="Arial" pitchFamily="34" charset="0"/>
-                <a:ea typeface="Arial" pitchFamily="34" charset="-122"/>
-                <a:cs typeface="Arial" pitchFamily="34" charset="-120"/>
-              </a:rPr>
-              <a:t>04</a:t>
-            </a:r>
-            <a:endParaRPr lang="en-US" sz="1600" dirty="0"/>
-          </a:p>
-        </p:txBody>
-      </p:sp>
-      <p:sp>
-        <p:nvSpPr>
-          <p:cNvPr id="11" name="Text 9"/>
-          <p:cNvSpPr/>
-          <p:nvPr/>
-        </p:nvSpPr>
-        <p:spPr>
-          <a:xfrm>
-            <a:off x="1664208" y="4773168"/>
-            <a:ext cx="9704527" cy="530352"/>
+              <a:rPr lang="en-US" sz="1500" b="1" spc="80" kern="0" dirty="0">
+                <a:solidFill>
+                  <a:srgbClr val="FFFFFF"/>
+                </a:solidFill>
+                <a:latin typeface="Courier New" pitchFamily="34" charset="0"/>
+                <a:ea typeface="Courier New" pitchFamily="34" charset="-122"/>
+                <a:cs typeface="Courier New" pitchFamily="34" charset="-120"/>
+              </a:rPr>
+              <a:t>OPTIMIZACIÓN DURANTE TODO EL MES</a:t>
+            </a:r>
+            <a:endParaRPr lang="en-US" sz="1500" dirty="0"/>
+          </a:p>
+        </p:txBody>
+      </p:sp>
+      <p:sp>
+        <p:nvSpPr>
+          <p:cNvPr id="12" name="Text 10"/>
+          <p:cNvSpPr/>
+          <p:nvPr/>
+        </p:nvSpPr>
+        <p:spPr>
+          <a:xfrm>
+            <a:off x="822960" y="5522976"/>
+            <a:ext cx="685800" cy="512064"/>
           </a:xfrm>
           <a:prstGeom prst="rect">
             <a:avLst/>
@@ -2572,30 +2615,30 @@
               <a:buNone/>
             </a:pPr>
             <a:r>
-              <a:rPr lang="en-US" sz="2100" dirty="0">
-                <a:solidFill>
-                  <a:srgbClr val="F2EEE9"/>
-                </a:solidFill>
-                <a:latin typeface="Calibri" pitchFamily="34" charset="0"/>
-                <a:ea typeface="Calibri" pitchFamily="34" charset="-122"/>
-                <a:cs typeface="Calibri" pitchFamily="34" charset="-120"/>
-              </a:rPr>
-              <a:t>Optimización durante todo el mes</a:t>
-            </a:r>
-            <a:endParaRPr lang="en-US" sz="2100" dirty="0"/>
-          </a:p>
-        </p:txBody>
-      </p:sp>
-      <p:sp>
-        <p:nvSpPr>
-          <p:cNvPr id="12" name="Text 10"/>
-          <p:cNvSpPr/>
-          <p:nvPr/>
-        </p:nvSpPr>
-        <p:spPr>
-          <a:xfrm>
-            <a:off x="822960" y="5504688"/>
-            <a:ext cx="658368" cy="530352"/>
+              <a:rPr lang="en-US" sz="1500" b="1" spc="100" kern="0" dirty="0">
+                <a:solidFill>
+                  <a:srgbClr val="DE27A0"/>
+                </a:solidFill>
+                <a:latin typeface="Courier New" pitchFamily="34" charset="0"/>
+                <a:ea typeface="Courier New" pitchFamily="34" charset="-122"/>
+                <a:cs typeface="Courier New" pitchFamily="34" charset="-120"/>
+              </a:rPr>
+              <a:t>05</a:t>
+            </a:r>
+            <a:endParaRPr lang="en-US" sz="1500" dirty="0"/>
+          </a:p>
+        </p:txBody>
+      </p:sp>
+      <p:sp>
+        <p:nvSpPr>
+          <p:cNvPr id="13" name="Text 11"/>
+          <p:cNvSpPr/>
+          <p:nvPr/>
+        </p:nvSpPr>
+        <p:spPr>
+          <a:xfrm>
+            <a:off x="1719072" y="5522976"/>
+            <a:ext cx="9649663" cy="512064"/>
           </a:xfrm>
           <a:prstGeom prst="rect">
             <a:avLst/>
@@ -2611,56 +2654,17 @@
               <a:buNone/>
             </a:pPr>
             <a:r>
-              <a:rPr lang="en-US" sz="1600" b="1" dirty="0">
-                <a:solidFill>
-                  <a:srgbClr val="EF5B25"/>
-                </a:solidFill>
-                <a:latin typeface="Arial" pitchFamily="34" charset="0"/>
-                <a:ea typeface="Arial" pitchFamily="34" charset="-122"/>
-                <a:cs typeface="Arial" pitchFamily="34" charset="-120"/>
-              </a:rPr>
-              <a:t>05</a:t>
-            </a:r>
-            <a:endParaRPr lang="en-US" sz="1600" dirty="0"/>
-          </a:p>
-        </p:txBody>
-      </p:sp>
-      <p:sp>
-        <p:nvSpPr>
-          <p:cNvPr id="13" name="Text 11"/>
-          <p:cNvSpPr/>
-          <p:nvPr/>
-        </p:nvSpPr>
-        <p:spPr>
-          <a:xfrm>
-            <a:off x="1664208" y="5504688"/>
-            <a:ext cx="9704527" cy="530352"/>
-          </a:xfrm>
-          <a:prstGeom prst="rect">
-            <a:avLst/>
-          </a:prstGeom>
-          <a:noFill/>
-          <a:ln/>
-        </p:spPr>
-        <p:txBody>
-          <a:bodyPr wrap="square" lIns="0" tIns="0" rIns="0" bIns="0" rtlCol="0" anchor="ctr"/>
-          <a:lstStyle/>
-          <a:p>
-            <a:pPr indent="0" marL="0">
-              <a:buNone/>
-            </a:pPr>
-            <a:r>
-              <a:rPr lang="en-US" sz="2100" dirty="0">
-                <a:solidFill>
-                  <a:srgbClr val="F2EEE9"/>
-                </a:solidFill>
-                <a:latin typeface="Calibri" pitchFamily="34" charset="0"/>
-                <a:ea typeface="Calibri" pitchFamily="34" charset="-122"/>
-                <a:cs typeface="Calibri" pitchFamily="34" charset="-120"/>
-              </a:rPr>
-              <a:t>Reporte mensual con ventas, no con likes</a:t>
-            </a:r>
-            <a:endParaRPr lang="en-US" sz="2100" dirty="0"/>
+              <a:rPr lang="en-US" sz="1500" b="1" spc="80" kern="0" dirty="0">
+                <a:solidFill>
+                  <a:srgbClr val="FFFFFF"/>
+                </a:solidFill>
+                <a:latin typeface="Courier New" pitchFamily="34" charset="0"/>
+                <a:ea typeface="Courier New" pitchFamily="34" charset="-122"/>
+                <a:cs typeface="Courier New" pitchFamily="34" charset="-120"/>
+              </a:rPr>
+              <a:t>REPORTE MENSUAL CON VENTAS, NO CON LIKES</a:t>
+            </a:r>
+            <a:endParaRPr lang="en-US" sz="1500" dirty="0"/>
           </a:p>
         </p:txBody>
       </p:sp>
@@ -2678,7 +2682,7 @@
     <p:bg>
       <p:bgPr>
         <a:solidFill>
-          <a:srgbClr val="EF5B25"/>
+          <a:srgbClr val="284E58"/>
         </a:solidFill>
       </p:bgPr>
     </p:bg>
@@ -2721,30 +2725,69 @@
               <a:buNone/>
             </a:pPr>
             <a:r>
-              <a:rPr lang="en-US" sz="1100" b="1" spc="250" kern="0" dirty="0">
-                <a:solidFill>
-                  <a:srgbClr val="140C07"/>
+              <a:rPr lang="en-US" sz="1200" b="1" spc="200" kern="0" dirty="0">
+                <a:solidFill>
+                  <a:srgbClr val="46BD7C"/>
+                </a:solidFill>
+                <a:latin typeface="Courier New" pitchFamily="34" charset="0"/>
+                <a:ea typeface="Courier New" pitchFamily="34" charset="-122"/>
+                <a:cs typeface="Courier New" pitchFamily="34" charset="-120"/>
+              </a:rPr>
+              <a:t>03  —  HONORARIO</a:t>
+            </a:r>
+            <a:endParaRPr lang="en-US" sz="1200" dirty="0"/>
+          </a:p>
+        </p:txBody>
+      </p:sp>
+      <p:sp>
+        <p:nvSpPr>
+          <p:cNvPr id="3" name="Text 1"/>
+          <p:cNvSpPr/>
+          <p:nvPr/>
+        </p:nvSpPr>
+        <p:spPr>
+          <a:xfrm>
+            <a:off x="822960" y="1600200"/>
+            <a:ext cx="8686800" cy="1600200"/>
+          </a:xfrm>
+          <a:prstGeom prst="rect">
+            <a:avLst/>
+          </a:prstGeom>
+          <a:noFill/>
+          <a:ln/>
+        </p:spPr>
+        <p:txBody>
+          <a:bodyPr wrap="square" lIns="0" tIns="0" rIns="0" bIns="0" rtlCol="0" anchor="ctr"/>
+          <a:lstStyle/>
+          <a:p>
+            <a:pPr indent="0" marL="0">
+              <a:buNone/>
+            </a:pPr>
+            <a:r>
+              <a:rPr lang="en-US" sz="9600" b="1" dirty="0">
+                <a:solidFill>
+                  <a:srgbClr val="46BD7C"/>
                 </a:solidFill>
                 <a:latin typeface="Arial" pitchFamily="34" charset="0"/>
                 <a:ea typeface="Arial" pitchFamily="34" charset="-122"/>
                 <a:cs typeface="Arial" pitchFamily="34" charset="-120"/>
               </a:rPr>
-              <a:t>03  —  HONORARIO</a:t>
-            </a:r>
-            <a:endParaRPr lang="en-US" sz="1100" dirty="0"/>
-          </a:p>
-        </p:txBody>
-      </p:sp>
-      <p:sp>
-        <p:nvSpPr>
-          <p:cNvPr id="3" name="Text 1"/>
-          <p:cNvSpPr/>
-          <p:nvPr/>
-        </p:nvSpPr>
-        <p:spPr>
-          <a:xfrm>
-            <a:off x="822960" y="1600200"/>
-            <a:ext cx="8686800" cy="1600200"/>
+              <a:t>$350.000</a:t>
+            </a:r>
+            <a:endParaRPr lang="en-US" sz="9600" dirty="0"/>
+          </a:p>
+        </p:txBody>
+      </p:sp>
+      <p:sp>
+        <p:nvSpPr>
+          <p:cNvPr id="4" name="Text 2"/>
+          <p:cNvSpPr/>
+          <p:nvPr/>
+        </p:nvSpPr>
+        <p:spPr>
+          <a:xfrm>
+            <a:off x="822960" y="3364992"/>
+            <a:ext cx="7315200" cy="384048"/>
           </a:xfrm>
           <a:prstGeom prst="rect">
             <a:avLst/>
@@ -2760,56 +2803,17 @@
               <a:buNone/>
             </a:pPr>
             <a:r>
-              <a:rPr lang="en-US" sz="9600" b="1" dirty="0">
-                <a:solidFill>
-                  <a:srgbClr val="140C07"/>
-                </a:solidFill>
-                <a:latin typeface="Arial" pitchFamily="34" charset="0"/>
-                <a:ea typeface="Arial" pitchFamily="34" charset="-122"/>
-                <a:cs typeface="Arial" pitchFamily="34" charset="-120"/>
-              </a:rPr>
-              <a:t>$350.000</a:t>
-            </a:r>
-            <a:endParaRPr lang="en-US" sz="9600" dirty="0"/>
-          </a:p>
-        </p:txBody>
-      </p:sp>
-      <p:sp>
-        <p:nvSpPr>
-          <p:cNvPr id="4" name="Text 2"/>
-          <p:cNvSpPr/>
-          <p:nvPr/>
-        </p:nvSpPr>
-        <p:spPr>
-          <a:xfrm>
-            <a:off x="822960" y="3310128"/>
-            <a:ext cx="7315200" cy="457200"/>
-          </a:xfrm>
-          <a:prstGeom prst="rect">
-            <a:avLst/>
-          </a:prstGeom>
-          <a:noFill/>
-          <a:ln/>
-        </p:spPr>
-        <p:txBody>
-          <a:bodyPr wrap="square" lIns="0" tIns="0" rIns="0" bIns="0" rtlCol="0" anchor="ctr"/>
-          <a:lstStyle/>
-          <a:p>
-            <a:pPr indent="0" marL="0">
-              <a:buNone/>
-            </a:pPr>
-            <a:r>
-              <a:rPr lang="en-US" sz="2400" dirty="0">
-                <a:solidFill>
-                  <a:srgbClr val="140C07"/>
-                </a:solidFill>
-                <a:latin typeface="Calibri" pitchFamily="34" charset="0"/>
-                <a:ea typeface="Calibri" pitchFamily="34" charset="-122"/>
-                <a:cs typeface="Calibri" pitchFamily="34" charset="-120"/>
-              </a:rPr>
-              <a:t>líquidos al mes</a:t>
-            </a:r>
-            <a:endParaRPr lang="en-US" sz="2400" dirty="0"/>
+              <a:rPr lang="en-US" sz="1800" b="1" spc="300" kern="0" dirty="0">
+                <a:solidFill>
+                  <a:srgbClr val="FFFFFF"/>
+                </a:solidFill>
+                <a:latin typeface="Courier New" pitchFamily="34" charset="0"/>
+                <a:ea typeface="Courier New" pitchFamily="34" charset="-122"/>
+                <a:cs typeface="Courier New" pitchFamily="34" charset="-120"/>
+              </a:rPr>
+              <a:t>LÍQUIDOS AL MES</a:t>
+            </a:r>
+            <a:endParaRPr lang="en-US" sz="1800" dirty="0"/>
           </a:p>
         </p:txBody>
       </p:sp>
@@ -2838,17 +2842,17 @@
               <a:buNone/>
             </a:pPr>
             <a:r>
-              <a:rPr lang="en-US" sz="1050" b="1" spc="200" kern="0" dirty="0">
-                <a:solidFill>
-                  <a:srgbClr val="140C07"/>
-                </a:solidFill>
-                <a:latin typeface="Arial" pitchFamily="34" charset="0"/>
-                <a:ea typeface="Arial" pitchFamily="34" charset="-122"/>
-                <a:cs typeface="Arial" pitchFamily="34" charset="-120"/>
+              <a:rPr lang="en-US" sz="1100" b="1" spc="200" kern="0" dirty="0">
+                <a:solidFill>
+                  <a:srgbClr val="46BD7C"/>
+                </a:solidFill>
+                <a:latin typeface="Courier New" pitchFamily="34" charset="0"/>
+                <a:ea typeface="Courier New" pitchFamily="34" charset="-122"/>
+                <a:cs typeface="Courier New" pitchFamily="34" charset="-120"/>
               </a:rPr>
               <a:t>LA PAUTA VA APARTE</a:t>
             </a:r>
-            <a:endParaRPr lang="en-US" sz="1050" dirty="0"/>
+            <a:endParaRPr lang="en-US" sz="1100" dirty="0"/>
           </a:p>
         </p:txBody>
       </p:sp>
@@ -2860,8 +2864,8 @@
         </p:nvSpPr>
         <p:spPr>
           <a:xfrm>
-            <a:off x="822960" y="5010912"/>
-            <a:ext cx="4846320" cy="1234440"/>
+            <a:off x="822960" y="5029200"/>
+            <a:ext cx="4846320" cy="1280160"/>
           </a:xfrm>
           <a:prstGeom prst="rect">
             <a:avLst/>
@@ -2875,22 +2879,22 @@
           <a:p>
             <a:pPr indent="0" marL="0">
               <a:lnSpc>
-                <a:spcPct val="120000"/>
+                <a:spcPct val="135000"/>
               </a:lnSpc>
               <a:buNone/>
             </a:pPr>
             <a:r>
-              <a:rPr lang="en-US" sz="1600" b="1" dirty="0">
-                <a:solidFill>
-                  <a:srgbClr val="140C07"/>
-                </a:solidFill>
-                <a:latin typeface="Arial" pitchFamily="34" charset="0"/>
-                <a:ea typeface="Arial" pitchFamily="34" charset="-122"/>
-                <a:cs typeface="Arial" pitchFamily="34" charset="-120"/>
-              </a:rPr>
-              <a:t>Entre $200.000 y $450.000 al mes según la fase, a nombre de PobreVermut.</a:t>
-            </a:r>
-            <a:endParaRPr lang="en-US" sz="1600" dirty="0"/>
+              <a:rPr lang="en-US" sz="1150" b="1" spc="50" kern="0" dirty="0">
+                <a:solidFill>
+                  <a:srgbClr val="FFFFFF"/>
+                </a:solidFill>
+                <a:latin typeface="Courier New" pitchFamily="34" charset="0"/>
+                <a:ea typeface="Courier New" pitchFamily="34" charset="-122"/>
+                <a:cs typeface="Courier New" pitchFamily="34" charset="-120"/>
+              </a:rPr>
+              <a:t>ENTRE $200.000 Y $450.000 AL MES SEGÚN LA FASE, A NOMBRE DE POBREVERMUT.</a:t>
+            </a:r>
+            <a:endParaRPr lang="en-US" sz="1150" dirty="0"/>
           </a:p>
         </p:txBody>
       </p:sp>
@@ -2919,17 +2923,17 @@
               <a:buNone/>
             </a:pPr>
             <a:r>
-              <a:rPr lang="en-US" sz="1050" b="1" spc="200" kern="0" dirty="0">
-                <a:solidFill>
-                  <a:srgbClr val="140C07"/>
-                </a:solidFill>
-                <a:latin typeface="Arial" pitchFamily="34" charset="0"/>
-                <a:ea typeface="Arial" pitchFamily="34" charset="-122"/>
-                <a:cs typeface="Arial" pitchFamily="34" charset="-120"/>
+              <a:rPr lang="en-US" sz="1100" b="1" spc="200" kern="0" dirty="0">
+                <a:solidFill>
+                  <a:srgbClr val="46BD7C"/>
+                </a:solidFill>
+                <a:latin typeface="Courier New" pitchFamily="34" charset="0"/>
+                <a:ea typeface="Courier New" pitchFamily="34" charset="-122"/>
+                <a:cs typeface="Courier New" pitchFamily="34" charset="-120"/>
               </a:rPr>
               <a:t>UN PRIMER CICLO DE TRES MESES</a:t>
             </a:r>
-            <a:endParaRPr lang="en-US" sz="1050" dirty="0"/>
+            <a:endParaRPr lang="en-US" sz="1100" dirty="0"/>
           </a:p>
         </p:txBody>
       </p:sp>
@@ -2941,8 +2945,8 @@
         </p:nvSpPr>
         <p:spPr>
           <a:xfrm>
-            <a:off x="6245352" y="5010912"/>
-            <a:ext cx="4846320" cy="1234440"/>
+            <a:off x="6245352" y="5029200"/>
+            <a:ext cx="4846320" cy="1280160"/>
           </a:xfrm>
           <a:prstGeom prst="rect">
             <a:avLst/>
@@ -2956,22 +2960,22 @@
           <a:p>
             <a:pPr indent="0" marL="0">
               <a:lnSpc>
-                <a:spcPct val="120000"/>
+                <a:spcPct val="135000"/>
               </a:lnSpc>
               <a:buNone/>
             </a:pPr>
             <a:r>
-              <a:rPr lang="en-US" sz="1600" b="1" dirty="0">
-                <a:solidFill>
-                  <a:srgbClr val="140C07"/>
-                </a:solidFill>
-                <a:latin typeface="Arial" pitchFamily="34" charset="0"/>
-                <a:ea typeface="Arial" pitchFamily="34" charset="-122"/>
-                <a:cs typeface="Arial" pitchFamily="34" charset="-120"/>
-              </a:rPr>
-              <a:t>Partimos con tres meses de trabajo. Al cierre revisamos juntos los resultados y definimos cómo seguir.</a:t>
-            </a:r>
-            <a:endParaRPr lang="en-US" sz="1600" dirty="0"/>
+              <a:rPr lang="en-US" sz="1150" b="1" spc="50" kern="0" dirty="0">
+                <a:solidFill>
+                  <a:srgbClr val="FFFFFF"/>
+                </a:solidFill>
+                <a:latin typeface="Courier New" pitchFamily="34" charset="0"/>
+                <a:ea typeface="Courier New" pitchFamily="34" charset="-122"/>
+                <a:cs typeface="Courier New" pitchFamily="34" charset="-120"/>
+              </a:rPr>
+              <a:t>PARTIMOS CON TRES MESES DE TRABAJO. AL CIERRE REVISAMOS JUNTOS LOS RESULTADOS Y DEFINIMOS CÓMO SEGUIR.</a:t>
+            </a:r>
+            <a:endParaRPr lang="en-US" sz="1150" dirty="0"/>
           </a:p>
         </p:txBody>
       </p:sp>
@@ -2989,7 +2993,7 @@
     <p:bg>
       <p:bgPr>
         <a:solidFill>
-          <a:srgbClr val="0F0E0D"/>
+          <a:srgbClr val="3A1842"/>
         </a:solidFill>
       </p:bgPr>
     </p:bg>
@@ -3007,36 +3011,40 @@
           <a:chExt cx="0" cy="0"/>
         </a:xfrm>
       </p:grpSpPr>
-      <p:sp>
-        <p:nvSpPr>
-          <p:cNvPr id="2" name="Shape 0"/>
-          <p:cNvSpPr/>
-          <p:nvPr/>
-        </p:nvSpPr>
-        <p:spPr>
-          <a:xfrm>
-            <a:off x="5687568" y="1691640"/>
-            <a:ext cx="822960" cy="822960"/>
-          </a:xfrm>
-          <a:prstGeom prst="ellipse">
-            <a:avLst/>
-          </a:prstGeom>
-          <a:solidFill>
-            <a:srgbClr val="EF5B25"/>
-          </a:solidFill>
-          <a:ln/>
-        </p:spPr>
-      </p:sp>
-      <p:sp>
-        <p:nvSpPr>
-          <p:cNvPr id="3" name="Text 1"/>
-          <p:cNvSpPr/>
-          <p:nvPr/>
-        </p:nvSpPr>
-        <p:spPr>
-          <a:xfrm>
-            <a:off x="1371600" y="2999232"/>
-            <a:ext cx="9445752" cy="1005840"/>
+      <p:pic>
+        <p:nvPicPr>
+          <p:cNvPr id="2" name="Image 0" descr="/tmp/claude-0/-home-user-Gmb-Aagent/415d07b8-2eab-51b2-81d2-2f92b3b46afc/scratchpad/marca/tagline-blanco.png">    </p:cNvPr>
+          <p:cNvPicPr>
+            <a:picLocks noChangeAspect="1"/>
+          </p:cNvPicPr>
+          <p:nvPr/>
+        </p:nvPicPr>
+        <p:blipFill>
+          <a:blip r:embed="rId1"/>
+          <a:stretch>
+            <a:fillRect/>
+          </a:stretch>
+        </p:blipFill>
+        <p:spPr>
+          <a:xfrm>
+            <a:off x="5230368" y="1051560"/>
+            <a:ext cx="1728216" cy="1883664"/>
+          </a:xfrm>
+          <a:prstGeom prst="rect">
+            <a:avLst/>
+          </a:prstGeom>
+        </p:spPr>
+      </p:pic>
+      <p:sp>
+        <p:nvSpPr>
+          <p:cNvPr id="3" name="Text 0"/>
+          <p:cNvSpPr/>
+          <p:nvPr/>
+        </p:nvSpPr>
+        <p:spPr>
+          <a:xfrm>
+            <a:off x="1371600" y="3456432"/>
+            <a:ext cx="9445752" cy="868680"/>
           </a:xfrm>
           <a:prstGeom prst="rect">
             <a:avLst/>
@@ -3052,44 +3060,44 @@
               <a:buNone/>
             </a:pPr>
             <a:r>
-              <a:rPr lang="en-US" sz="5200" b="1" dirty="0">
-                <a:solidFill>
-                  <a:srgbClr val="F2EEE9"/>
+              <a:rPr lang="en-US" sz="4600" b="1" dirty="0">
+                <a:solidFill>
+                  <a:srgbClr val="FFFFFF"/>
                 </a:solidFill>
                 <a:latin typeface="Arial" pitchFamily="34" charset="0"/>
                 <a:ea typeface="Arial" pitchFamily="34" charset="-122"/>
                 <a:cs typeface="Arial" pitchFamily="34" charset="-120"/>
               </a:rPr>
-              <a:t>Trabajemos </a:t>
+              <a:t>TRABAJEMOS </a:t>
             </a:r>
             <a:pPr algn="ctr" indent="0" marL="0">
               <a:buNone/>
             </a:pPr>
             <a:r>
-              <a:rPr lang="en-US" sz="5200" b="1" dirty="0">
-                <a:solidFill>
-                  <a:srgbClr val="EF5B25"/>
+              <a:rPr lang="en-US" sz="4600" b="1" dirty="0">
+                <a:solidFill>
+                  <a:srgbClr val="DE27A0"/>
                 </a:solidFill>
                 <a:latin typeface="Arial" pitchFamily="34" charset="0"/>
                 <a:ea typeface="Arial" pitchFamily="34" charset="-122"/>
                 <a:cs typeface="Arial" pitchFamily="34" charset="-120"/>
               </a:rPr>
-              <a:t>juntos.</a:t>
-            </a:r>
-            <a:endParaRPr lang="en-US" sz="5200" dirty="0"/>
-          </a:p>
-        </p:txBody>
-      </p:sp>
-      <p:sp>
-        <p:nvSpPr>
-          <p:cNvPr id="4" name="Text 2"/>
-          <p:cNvSpPr/>
-          <p:nvPr/>
-        </p:nvSpPr>
-        <p:spPr>
-          <a:xfrm>
-            <a:off x="1371600" y="4709160"/>
-            <a:ext cx="9445752" cy="329184"/>
+              <a:t>JUNTOS</a:t>
+            </a:r>
+            <a:endParaRPr lang="en-US" sz="4600" dirty="0"/>
+          </a:p>
+        </p:txBody>
+      </p:sp>
+      <p:sp>
+        <p:nvSpPr>
+          <p:cNvPr id="4" name="Text 1"/>
+          <p:cNvSpPr/>
+          <p:nvPr/>
+        </p:nvSpPr>
+        <p:spPr>
+          <a:xfrm>
+            <a:off x="1371600" y="4828032"/>
+            <a:ext cx="9445752" cy="292608"/>
           </a:xfrm>
           <a:prstGeom prst="rect">
             <a:avLst/>
@@ -3105,30 +3113,30 @@
               <a:buNone/>
             </a:pPr>
             <a:r>
-              <a:rPr lang="en-US" sz="1600" b="1" dirty="0">
-                <a:solidFill>
-                  <a:srgbClr val="F2EEE9"/>
-                </a:solidFill>
-                <a:latin typeface="Arial" pitchFamily="34" charset="0"/>
-                <a:ea typeface="Arial" pitchFamily="34" charset="-122"/>
-                <a:cs typeface="Arial" pitchFamily="34" charset="-120"/>
-              </a:rPr>
-              <a:t>Nicolás</a:t>
-            </a:r>
-            <a:endParaRPr lang="en-US" sz="1600" dirty="0"/>
-          </a:p>
-        </p:txBody>
-      </p:sp>
-      <p:sp>
-        <p:nvSpPr>
-          <p:cNvPr id="5" name="Text 3"/>
-          <p:cNvSpPr/>
-          <p:nvPr/>
-        </p:nvSpPr>
-        <p:spPr>
-          <a:xfrm>
-            <a:off x="1371600" y="5065776"/>
-            <a:ext cx="9445752" cy="329184"/>
+              <a:rPr lang="en-US" sz="1300" b="1" spc="300" kern="0" dirty="0">
+                <a:solidFill>
+                  <a:srgbClr val="FFFFFF"/>
+                </a:solidFill>
+                <a:latin typeface="Courier New" pitchFamily="34" charset="0"/>
+                <a:ea typeface="Courier New" pitchFamily="34" charset="-122"/>
+                <a:cs typeface="Courier New" pitchFamily="34" charset="-120"/>
+              </a:rPr>
+              <a:t>NICOLÁS</a:t>
+            </a:r>
+            <a:endParaRPr lang="en-US" sz="1300" dirty="0"/>
+          </a:p>
+        </p:txBody>
+      </p:sp>
+      <p:sp>
+        <p:nvSpPr>
+          <p:cNvPr id="5" name="Text 2"/>
+          <p:cNvSpPr/>
+          <p:nvPr/>
+        </p:nvSpPr>
+        <p:spPr>
+          <a:xfrm>
+            <a:off x="1371600" y="5193792"/>
+            <a:ext cx="9445752" cy="292608"/>
           </a:xfrm>
           <a:prstGeom prst="rect">
             <a:avLst/>
@@ -3144,17 +3152,17 @@
               <a:buNone/>
             </a:pPr>
             <a:r>
-              <a:rPr lang="en-US" sz="1500" dirty="0">
-                <a:solidFill>
-                  <a:srgbClr val="8A807A"/>
-                </a:solidFill>
-                <a:latin typeface="Calibri" pitchFamily="34" charset="0"/>
-                <a:ea typeface="Calibri" pitchFamily="34" charset="-122"/>
-                <a:cs typeface="Calibri" pitchFamily="34" charset="-120"/>
-              </a:rPr>
-              <a:t>nicolas@sherpasstudio.cl  ·  +56 9 3125 6539</a:t>
-            </a:r>
-            <a:endParaRPr lang="en-US" sz="1500" dirty="0"/>
+              <a:rPr lang="en-US" sz="1100" b="1" spc="100" kern="0" dirty="0">
+                <a:solidFill>
+                  <a:srgbClr val="BFA3C8"/>
+                </a:solidFill>
+                <a:latin typeface="Courier New" pitchFamily="34" charset="0"/>
+                <a:ea typeface="Courier New" pitchFamily="34" charset="-122"/>
+                <a:cs typeface="Courier New" pitchFamily="34" charset="-120"/>
+              </a:rPr>
+              <a:t>NICOLAS@SHERPASSTUDIO.CL  ·  +56 9 3125 6539</a:t>
+            </a:r>
+            <a:endParaRPr lang="en-US" sz="1100" dirty="0"/>
           </a:p>
         </p:txBody>
       </p:sp>

--- a/propuestas/pobrevermut/PobreVermut - Propuesta Campanas 2026.pptx
+++ b/propuestas/pobrevermut/PobreVermut - Propuesta Campanas 2026.pptx
@@ -1231,33 +1231,9 @@
           <a:chExt cx="0" cy="0"/>
         </a:xfrm>
       </p:grpSpPr>
-      <p:pic>
-        <p:nvPicPr>
-          <p:cNvPr id="2" name="Image 0" descr="/tmp/claude-0/-home-user-Gmb-Aagent/415d07b8-2eab-51b2-81d2-2f92b3b46afc/scratchpad/marca/vaso-magenta.png">    </p:cNvPr>
-          <p:cNvPicPr>
-            <a:picLocks noChangeAspect="1"/>
-          </p:cNvPicPr>
-          <p:nvPr/>
-        </p:nvPicPr>
-        <p:blipFill>
-          <a:blip r:embed="rId1"/>
-          <a:stretch>
-            <a:fillRect/>
-          </a:stretch>
-        </p:blipFill>
-        <p:spPr>
-          <a:xfrm>
-            <a:off x="9555480" y="1847088"/>
-            <a:ext cx="1792224" cy="2843784"/>
-          </a:xfrm>
-          <a:prstGeom prst="rect">
-            <a:avLst/>
-          </a:prstGeom>
-        </p:spPr>
-      </p:pic>
-      <p:sp>
-        <p:nvSpPr>
-          <p:cNvPr id="3" name="Text 0"/>
+      <p:sp>
+        <p:nvSpPr>
+          <p:cNvPr id="2" name="Text 0"/>
           <p:cNvSpPr/>
           <p:nvPr/>
         </p:nvSpPr>
@@ -1296,7 +1272,7 @@
       </p:sp>
       <p:sp>
         <p:nvSpPr>
-          <p:cNvPr id="4" name="Text 1"/>
+          <p:cNvPr id="3" name="Text 1"/>
           <p:cNvSpPr/>
           <p:nvPr/>
         </p:nvSpPr>
@@ -1358,7 +1334,7 @@
       </p:sp>
       <p:sp>
         <p:nvSpPr>
-          <p:cNvPr id="5" name="Text 2"/>
+          <p:cNvPr id="4" name="Text 2"/>
           <p:cNvSpPr/>
           <p:nvPr/>
         </p:nvSpPr>
@@ -1397,7 +1373,7 @@
       </p:sp>
       <p:sp>
         <p:nvSpPr>
-          <p:cNvPr id="6" name="Text 3"/>
+          <p:cNvPr id="5" name="Text 3"/>
           <p:cNvSpPr/>
           <p:nvPr/>
         </p:nvSpPr>
@@ -1436,7 +1412,7 @@
       </p:sp>
       <p:sp>
         <p:nvSpPr>
-          <p:cNvPr id="7" name="Text 4"/>
+          <p:cNvPr id="6" name="Text 4"/>
           <p:cNvSpPr/>
           <p:nvPr/>
         </p:nvSpPr>

--- a/propuestas/pobrevermut/PobreVermut - Propuesta Campanas 2026.pptx
+++ b/propuestas/pobrevermut/PobreVermut - Propuesta Campanas 2026.pptx
@@ -2748,7 +2748,7 @@
                 <a:ea typeface="Arial" pitchFamily="34" charset="-122"/>
                 <a:cs typeface="Arial" pitchFamily="34" charset="-120"/>
               </a:rPr>
-              <a:t>$350.000</a:t>
+              <a:t>$300.000</a:t>
             </a:r>
             <a:endParaRPr lang="en-US" sz="9600" dirty="0"/>
           </a:p>
